--- a/docs/Cafe.pi_쉬운_사용자매뉴얼.pptx
+++ b/docs/Cafe.pi_쉬운_사용자매뉴얼.pptx
@@ -2846,7 +2846,7 @@
                   <a:srgbClr val="000000"/>
                 </a:solidFill>
               </a:rPr>
-              <a:t>🫘</a:t>
+              <a:t>☕</a:t>
             </a:r>
             <a:endParaRPr lang="en-US" sz="2600" dirty="0"/>
           </a:p>
@@ -2903,7 +2903,7 @@
                 <a:ea typeface="Malgun Gothic" pitchFamily="34" charset="-122"/>
                 <a:cs typeface="Malgun Gothic" pitchFamily="34" charset="-120"/>
               </a:rPr>
-              <a:t>앱 속 마음 코인 — 충전하고 보내기</a:t>
+              <a:t>커피빈 코인 — 충전하고 마음 전하기</a:t>
             </a:r>
             <a:endParaRPr lang="en-US" sz="1700" dirty="0"/>
           </a:p>
@@ -3857,7 +3857,7 @@
                 <a:ea typeface="Malgun Gothic" pitchFamily="34" charset="-122"/>
                 <a:cs typeface="Malgun Gothic" pitchFamily="34" charset="-120"/>
               </a:rPr>
-              <a:t>🔑  로그인하기</a:t>
+              <a:t>🔑  로그인 &amp; 두 계정 연결하기</a:t>
             </a:r>
             <a:endParaRPr lang="en-US" sz="3200" dirty="0"/>
           </a:p>
@@ -3896,7 +3896,7 @@
                 <a:ea typeface="Malgun Gothic" pitchFamily="34" charset="-122"/>
                 <a:cs typeface="Malgun Gothic" pitchFamily="34" charset="-120"/>
               </a:rPr>
-              <a:t>Pi 계정과 구글 계정을 하나로 연결하면 어디서 들어와도 내 정보 그대로!</a:t>
+              <a:t>Pi 브라우저에서 6자리 코드 받기 → 일반 브라우저에 붙여넣고 버튼 한 번이면 끝!</a:t>
             </a:r>
             <a:endParaRPr lang="en-US" sz="1600" dirty="0"/>
           </a:p>
@@ -3910,8 +3910,8 @@
         </p:nvSpPr>
         <p:spPr>
           <a:xfrm>
-            <a:off x="548640" y="1783080"/>
-            <a:ext cx="11091672" cy="1051560"/>
+            <a:off x="548640" y="1828800"/>
+            <a:ext cx="4572000" cy="3520440"/>
           </a:xfrm>
           <a:prstGeom prst="rect">
             <a:avLst/>
@@ -3921,7 +3921,7 @@
           </a:solidFill>
           <a:ln w="12700">
             <a:solidFill>
-              <a:srgbClr val="EADFCE"/>
+              <a:srgbClr val="E0D3C2"/>
             </a:solidFill>
             <a:prstDash val="solid"/>
           </a:ln>
@@ -3942,11 +3942,214 @@
         </p:nvSpPr>
         <p:spPr>
           <a:xfrm>
-            <a:off x="548640" y="1783080"/>
-            <a:ext cx="109728" cy="1051560"/>
-          </a:xfrm>
-          <a:prstGeom prst="rect">
-            <a:avLst/>
+            <a:off x="548640" y="1828800"/>
+            <a:ext cx="4572000" cy="502920"/>
+          </a:xfrm>
+          <a:prstGeom prst="rect">
+            <a:avLst/>
+          </a:prstGeom>
+          <a:solidFill>
+            <a:srgbClr val="3B2A20"/>
+          </a:solidFill>
+          <a:ln/>
+        </p:spPr>
+      </p:sp>
+      <p:sp>
+        <p:nvSpPr>
+          <p:cNvPr id="8" name="Text 6"/>
+          <p:cNvSpPr/>
+          <p:nvPr/>
+        </p:nvSpPr>
+        <p:spPr>
+          <a:xfrm>
+            <a:off x="548640" y="1828800"/>
+            <a:ext cx="4572000" cy="502920"/>
+          </a:xfrm>
+          <a:prstGeom prst="rect">
+            <a:avLst/>
+          </a:prstGeom>
+          <a:noFill/>
+          <a:ln/>
+        </p:spPr>
+        <p:txBody>
+          <a:bodyPr wrap="square" lIns="0" tIns="0" rIns="0" bIns="0" rtlCol="0" anchor="ctr"/>
+          <a:lstStyle/>
+          <a:p>
+            <a:pPr algn="ctr" indent="0" marL="0">
+              <a:buNone/>
+            </a:pPr>
+            <a:r>
+              <a:rPr lang="en-US" sz="1500" b="1" dirty="0">
+                <a:solidFill>
+                  <a:srgbClr val="FFFFFF"/>
+                </a:solidFill>
+                <a:latin typeface="Malgun Gothic" pitchFamily="34" charset="0"/>
+                <a:ea typeface="Malgun Gothic" pitchFamily="34" charset="-122"/>
+                <a:cs typeface="Malgun Gothic" pitchFamily="34" charset="-120"/>
+              </a:rPr>
+              <a:t>📱 Pi Browser</a:t>
+            </a:r>
+            <a:endParaRPr lang="en-US" sz="1500" dirty="0"/>
+          </a:p>
+        </p:txBody>
+      </p:sp>
+      <p:sp>
+        <p:nvSpPr>
+          <p:cNvPr id="9" name="Text 7"/>
+          <p:cNvSpPr/>
+          <p:nvPr/>
+        </p:nvSpPr>
+        <p:spPr>
+          <a:xfrm>
+            <a:off x="868680" y="2450592"/>
+            <a:ext cx="3931920" cy="365760"/>
+          </a:xfrm>
+          <a:prstGeom prst="rect">
+            <a:avLst/>
+          </a:prstGeom>
+          <a:noFill/>
+          <a:ln/>
+        </p:spPr>
+        <p:txBody>
+          <a:bodyPr wrap="square" lIns="0" tIns="0" rIns="0" bIns="0" rtlCol="0" anchor="ctr"/>
+          <a:lstStyle/>
+          <a:p>
+            <a:pPr indent="0" marL="0">
+              <a:buNone/>
+            </a:pPr>
+            <a:r>
+              <a:rPr lang="en-US" sz="1400" b="1" dirty="0">
+                <a:solidFill>
+                  <a:srgbClr val="2B2018"/>
+                </a:solidFill>
+                <a:latin typeface="Malgun Gothic" pitchFamily="34" charset="0"/>
+                <a:ea typeface="Malgun Gothic" pitchFamily="34" charset="-122"/>
+                <a:cs typeface="Malgun Gothic" pitchFamily="34" charset="-120"/>
+              </a:rPr>
+              <a:t>① “연동 코드 생성” 누르기</a:t>
+            </a:r>
+            <a:endParaRPr lang="en-US" sz="1400" dirty="0"/>
+          </a:p>
+        </p:txBody>
+      </p:sp>
+      <p:sp>
+        <p:nvSpPr>
+          <p:cNvPr id="10" name="Shape 8"/>
+          <p:cNvSpPr/>
+          <p:nvPr/>
+        </p:nvSpPr>
+        <p:spPr>
+          <a:xfrm>
+            <a:off x="960120" y="2880360"/>
+            <a:ext cx="3749040" cy="822960"/>
+          </a:xfrm>
+          <a:prstGeom prst="rect">
+            <a:avLst/>
+          </a:prstGeom>
+          <a:solidFill>
+            <a:srgbClr val="FFF7E8"/>
+          </a:solidFill>
+          <a:ln w="19050">
+            <a:solidFill>
+              <a:srgbClr val="F4A52A"/>
+            </a:solidFill>
+            <a:prstDash val="solid"/>
+          </a:ln>
+        </p:spPr>
+      </p:sp>
+      <p:sp>
+        <p:nvSpPr>
+          <p:cNvPr id="11" name="Text 9"/>
+          <p:cNvSpPr/>
+          <p:nvPr/>
+        </p:nvSpPr>
+        <p:spPr>
+          <a:xfrm>
+            <a:off x="960120" y="2880360"/>
+            <a:ext cx="3749040" cy="822960"/>
+          </a:xfrm>
+          <a:prstGeom prst="rect">
+            <a:avLst/>
+          </a:prstGeom>
+          <a:noFill/>
+          <a:ln/>
+        </p:spPr>
+        <p:txBody>
+          <a:bodyPr wrap="square" lIns="0" tIns="0" rIns="0" bIns="0" rtlCol="0" anchor="ctr"/>
+          <a:lstStyle/>
+          <a:p>
+            <a:pPr algn="ctr" indent="0" marL="0">
+              <a:buNone/>
+            </a:pPr>
+            <a:r>
+              <a:rPr lang="en-US" sz="3400" b="1" spc="200" kern="0" dirty="0">
+                <a:solidFill>
+                  <a:srgbClr val="B9740A"/>
+                </a:solidFill>
+                <a:latin typeface="Consolas" pitchFamily="34" charset="0"/>
+                <a:ea typeface="Consolas" pitchFamily="34" charset="-122"/>
+                <a:cs typeface="Consolas" pitchFamily="34" charset="-120"/>
+              </a:rPr>
+              <a:t>A3F-9K2</a:t>
+            </a:r>
+            <a:endParaRPr lang="en-US" sz="3400" dirty="0"/>
+          </a:p>
+        </p:txBody>
+      </p:sp>
+      <p:sp>
+        <p:nvSpPr>
+          <p:cNvPr id="12" name="Text 10"/>
+          <p:cNvSpPr/>
+          <p:nvPr/>
+        </p:nvSpPr>
+        <p:spPr>
+          <a:xfrm>
+            <a:off x="960120" y="3730752"/>
+            <a:ext cx="3749040" cy="274320"/>
+          </a:xfrm>
+          <a:prstGeom prst="rect">
+            <a:avLst/>
+          </a:prstGeom>
+          <a:noFill/>
+          <a:ln/>
+        </p:spPr>
+        <p:txBody>
+          <a:bodyPr wrap="square" lIns="0" tIns="0" rIns="0" bIns="0" rtlCol="0" anchor="ctr"/>
+          <a:lstStyle/>
+          <a:p>
+            <a:pPr algn="ctr" indent="0" marL="0">
+              <a:buNone/>
+            </a:pPr>
+            <a:r>
+              <a:rPr lang="en-US" sz="1100" dirty="0">
+                <a:solidFill>
+                  <a:srgbClr val="8A7A6D"/>
+                </a:solidFill>
+                <a:latin typeface="Malgun Gothic" pitchFamily="34" charset="0"/>
+                <a:ea typeface="Malgun Gothic" pitchFamily="34" charset="-122"/>
+                <a:cs typeface="Malgun Gothic" pitchFamily="34" charset="-120"/>
+              </a:rPr>
+              <a:t>🕘 10분 안에 사용하세요</a:t>
+            </a:r>
+            <a:endParaRPr lang="en-US" sz="1100" dirty="0"/>
+          </a:p>
+        </p:txBody>
+      </p:sp>
+      <p:sp>
+        <p:nvSpPr>
+          <p:cNvPr id="13" name="Shape 11"/>
+          <p:cNvSpPr/>
+          <p:nvPr/>
+        </p:nvSpPr>
+        <p:spPr>
+          <a:xfrm>
+            <a:off x="960120" y="4114800"/>
+            <a:ext cx="3749040" cy="566928"/>
+          </a:xfrm>
+          <a:prstGeom prst="roundRect">
+            <a:avLst>
+              <a:gd name="adj" fmla="val 16129"/>
+            </a:avLst>
           </a:prstGeom>
           <a:solidFill>
             <a:srgbClr val="F4A52A"/>
@@ -3956,34 +4159,14 @@
       </p:sp>
       <p:sp>
         <p:nvSpPr>
-          <p:cNvPr id="8" name="Shape 6"/>
-          <p:cNvSpPr/>
-          <p:nvPr/>
-        </p:nvSpPr>
-        <p:spPr>
-          <a:xfrm>
-            <a:off x="804672" y="2052828"/>
-            <a:ext cx="512064" cy="512064"/>
-          </a:xfrm>
-          <a:prstGeom prst="ellipse">
-            <a:avLst/>
-          </a:prstGeom>
-          <a:solidFill>
-            <a:srgbClr val="3B2A20"/>
-          </a:solidFill>
-          <a:ln/>
-        </p:spPr>
-      </p:sp>
-      <p:sp>
-        <p:nvSpPr>
-          <p:cNvPr id="9" name="Text 7"/>
-          <p:cNvSpPr/>
-          <p:nvPr/>
-        </p:nvSpPr>
-        <p:spPr>
-          <a:xfrm>
-            <a:off x="804672" y="2052828"/>
-            <a:ext cx="512064" cy="512064"/>
+          <p:cNvPr id="14" name="Text 12"/>
+          <p:cNvSpPr/>
+          <p:nvPr/>
+        </p:nvSpPr>
+        <p:spPr>
+          <a:xfrm>
+            <a:off x="960120" y="4114800"/>
+            <a:ext cx="3749040" cy="566928"/>
           </a:xfrm>
           <a:prstGeom prst="rect">
             <a:avLst/>
@@ -3999,7 +4182,7 @@
               <a:buNone/>
             </a:pPr>
             <a:r>
-              <a:rPr lang="en-US" sz="2000" b="1" dirty="0">
+              <a:rPr lang="en-US" sz="1400" b="1" dirty="0">
                 <a:solidFill>
                   <a:srgbClr val="FFFFFF"/>
                 </a:solidFill>
@@ -4007,62 +4190,100 @@
                 <a:ea typeface="Malgun Gothic" pitchFamily="34" charset="-122"/>
                 <a:cs typeface="Malgun Gothic" pitchFamily="34" charset="-120"/>
               </a:rPr>
-              <a:t>1</a:t>
-            </a:r>
-            <a:endParaRPr lang="en-US" sz="2000" dirty="0"/>
-          </a:p>
-        </p:txBody>
-      </p:sp>
-      <p:sp>
-        <p:nvSpPr>
-          <p:cNvPr id="10" name="Text 8"/>
-          <p:cNvSpPr/>
-          <p:nvPr/>
-        </p:nvSpPr>
-        <p:spPr>
-          <a:xfrm>
-            <a:off x="1508760" y="1874520"/>
-            <a:ext cx="9902952" cy="868680"/>
-          </a:xfrm>
-          <a:prstGeom prst="rect">
-            <a:avLst/>
-          </a:prstGeom>
-          <a:noFill/>
-          <a:ln/>
-        </p:spPr>
-        <p:txBody>
-          <a:bodyPr wrap="square" lIns="0" tIns="0" rIns="0" bIns="0" rtlCol="0" anchor="ctr"/>
-          <a:lstStyle/>
-          <a:p>
-            <a:pPr indent="0" marL="0">
+              <a:t>② 연동 URL 복사  📋</a:t>
+            </a:r>
+            <a:endParaRPr lang="en-US" sz="1400" dirty="0"/>
+          </a:p>
+        </p:txBody>
+      </p:sp>
+      <p:sp>
+        <p:nvSpPr>
+          <p:cNvPr id="15" name="Text 13"/>
+          <p:cNvSpPr/>
+          <p:nvPr/>
+        </p:nvSpPr>
+        <p:spPr>
+          <a:xfrm>
+            <a:off x="5074920" y="2834640"/>
+            <a:ext cx="1600200" cy="822960"/>
+          </a:xfrm>
+          <a:prstGeom prst="rect">
+            <a:avLst/>
+          </a:prstGeom>
+          <a:noFill/>
+          <a:ln/>
+        </p:spPr>
+        <p:txBody>
+          <a:bodyPr wrap="square" lIns="0" tIns="0" rIns="0" bIns="0" rtlCol="0" anchor="ctr"/>
+          <a:lstStyle/>
+          <a:p>
+            <a:pPr algn="ctr" indent="0" marL="0">
+              <a:buNone/>
+            </a:pPr>
+            <a:r>
+              <a:rPr lang="en-US" sz="4600" b="1" dirty="0">
+                <a:solidFill>
+                  <a:srgbClr val="B9740A"/>
+                </a:solidFill>
+                <a:latin typeface="Malgun Gothic" pitchFamily="34" charset="0"/>
+                <a:ea typeface="Malgun Gothic" pitchFamily="34" charset="-122"/>
+                <a:cs typeface="Malgun Gothic" pitchFamily="34" charset="-120"/>
+              </a:rPr>
+              <a:t>➜</a:t>
+            </a:r>
+            <a:endParaRPr lang="en-US" sz="4600" dirty="0"/>
+          </a:p>
+        </p:txBody>
+      </p:sp>
+      <p:sp>
+        <p:nvSpPr>
+          <p:cNvPr id="16" name="Text 14"/>
+          <p:cNvSpPr/>
+          <p:nvPr/>
+        </p:nvSpPr>
+        <p:spPr>
+          <a:xfrm>
+            <a:off x="5029200" y="3657600"/>
+            <a:ext cx="1691640" cy="640080"/>
+          </a:xfrm>
+          <a:prstGeom prst="rect">
+            <a:avLst/>
+          </a:prstGeom>
+          <a:noFill/>
+          <a:ln/>
+        </p:spPr>
+        <p:txBody>
+          <a:bodyPr wrap="square" lIns="0" tIns="0" rIns="0" bIns="0" rtlCol="0" anchor="ctr"/>
+          <a:lstStyle/>
+          <a:p>
+            <a:pPr algn="ctr" indent="0" marL="0">
               <a:lnSpc>
-                <a:spcPct val="102000"/>
+                <a:spcPct val="100000"/>
               </a:lnSpc>
               <a:buNone/>
             </a:pPr>
             <a:r>
-              <a:rPr lang="en-US" sz="1700" b="1" dirty="0">
-                <a:solidFill>
-                  <a:srgbClr val="2B2018"/>
-                </a:solidFill>
-                <a:latin typeface="Malgun Gothic" pitchFamily="34" charset="0"/>
-                <a:ea typeface="Malgun Gothic" pitchFamily="34" charset="-122"/>
-                <a:cs typeface="Malgun Gothic" pitchFamily="34" charset="-120"/>
-              </a:rPr>
-              <a:t>Pi 브라우저로 들어오면 자동 로그인
-</a:t>
-            </a:r>
-            <a:endParaRPr lang="en-US" sz="1700" dirty="0"/>
-          </a:p>
-          <a:p>
-            <a:pPr indent="0" marL="0">
+              <a:rPr lang="en-US" sz="1100" dirty="0">
+                <a:solidFill>
+                  <a:srgbClr val="8A7A6D"/>
+                </a:solidFill>
+                <a:latin typeface="Malgun Gothic" pitchFamily="34" charset="0"/>
+                <a:ea typeface="Malgun Gothic" pitchFamily="34" charset="-122"/>
+                <a:cs typeface="Malgun Gothic" pitchFamily="34" charset="-120"/>
+              </a:rPr>
+              <a:t>복사해서</a:t>
+            </a:r>
+            <a:endParaRPr lang="en-US" sz="1100" dirty="0"/>
+          </a:p>
+          <a:p>
+            <a:pPr algn="ctr" indent="0" marL="0">
               <a:lnSpc>
-                <a:spcPct val="102000"/>
+                <a:spcPct val="100000"/>
               </a:lnSpc>
               <a:buNone/>
             </a:pPr>
             <a:r>
-              <a:rPr lang="en-US" sz="1350" dirty="0">
+              <a:rPr lang="en-US" sz="1100" dirty="0">
                 <a:solidFill>
                   <a:srgbClr val="8A7A6D"/>
                 </a:solidFill>
@@ -4070,22 +4291,22 @@
                 <a:ea typeface="Malgun Gothic" pitchFamily="34" charset="-122"/>
                 <a:cs typeface="Malgun Gothic" pitchFamily="34" charset="-120"/>
               </a:rPr>
-              <a:t>Pi Browser 앱에서 Cafe.pi를 열면 별도 입력 없이 바로 로그인돼요. (버튼이 보이면 한 번만 누르면 끝)</a:t>
-            </a:r>
-            <a:endParaRPr lang="en-US" sz="1700" dirty="0"/>
-          </a:p>
-        </p:txBody>
-      </p:sp>
-      <p:sp>
-        <p:nvSpPr>
-          <p:cNvPr id="11" name="Shape 9"/>
-          <p:cNvSpPr/>
-          <p:nvPr/>
-        </p:nvSpPr>
-        <p:spPr>
-          <a:xfrm>
-            <a:off x="548640" y="2990088"/>
-            <a:ext cx="11091672" cy="1051560"/>
+              <a:t>붙여넣기</a:t>
+            </a:r>
+            <a:endParaRPr lang="en-US" sz="1100" dirty="0"/>
+          </a:p>
+        </p:txBody>
+      </p:sp>
+      <p:sp>
+        <p:nvSpPr>
+          <p:cNvPr id="17" name="Shape 15"/>
+          <p:cNvSpPr/>
+          <p:nvPr/>
+        </p:nvSpPr>
+        <p:spPr>
+          <a:xfrm>
+            <a:off x="6675120" y="1828800"/>
+            <a:ext cx="4965192" cy="3520440"/>
           </a:xfrm>
           <a:prstGeom prst="rect">
             <a:avLst/>
@@ -4095,7 +4316,7 @@
           </a:solidFill>
           <a:ln w="12700">
             <a:solidFill>
-              <a:srgbClr val="EADFCE"/>
+              <a:srgbClr val="E0D3C2"/>
             </a:solidFill>
             <a:prstDash val="solid"/>
           </a:ln>
@@ -4110,54 +4331,34 @@
       </p:sp>
       <p:sp>
         <p:nvSpPr>
-          <p:cNvPr id="12" name="Shape 10"/>
-          <p:cNvSpPr/>
-          <p:nvPr/>
-        </p:nvSpPr>
-        <p:spPr>
-          <a:xfrm>
-            <a:off x="548640" y="2990088"/>
-            <a:ext cx="109728" cy="1051560"/>
-          </a:xfrm>
-          <a:prstGeom prst="rect">
-            <a:avLst/>
-          </a:prstGeom>
-          <a:solidFill>
-            <a:srgbClr val="F4A52A"/>
-          </a:solidFill>
-          <a:ln/>
-        </p:spPr>
-      </p:sp>
-      <p:sp>
-        <p:nvSpPr>
-          <p:cNvPr id="13" name="Shape 11"/>
-          <p:cNvSpPr/>
-          <p:nvPr/>
-        </p:nvSpPr>
-        <p:spPr>
-          <a:xfrm>
-            <a:off x="804672" y="3259836"/>
-            <a:ext cx="512064" cy="512064"/>
-          </a:xfrm>
-          <a:prstGeom prst="ellipse">
-            <a:avLst/>
-          </a:prstGeom>
-          <a:solidFill>
-            <a:srgbClr val="3B2A20"/>
-          </a:solidFill>
-          <a:ln/>
-        </p:spPr>
-      </p:sp>
-      <p:sp>
-        <p:nvSpPr>
-          <p:cNvPr id="14" name="Text 12"/>
-          <p:cNvSpPr/>
-          <p:nvPr/>
-        </p:nvSpPr>
-        <p:spPr>
-          <a:xfrm>
-            <a:off x="804672" y="3259836"/>
-            <a:ext cx="512064" cy="512064"/>
+          <p:cNvPr id="18" name="Shape 16"/>
+          <p:cNvSpPr/>
+          <p:nvPr/>
+        </p:nvSpPr>
+        <p:spPr>
+          <a:xfrm>
+            <a:off x="6675120" y="1828800"/>
+            <a:ext cx="4965192" cy="502920"/>
+          </a:xfrm>
+          <a:prstGeom prst="rect">
+            <a:avLst/>
+          </a:prstGeom>
+          <a:solidFill>
+            <a:srgbClr val="2E7D6F"/>
+          </a:solidFill>
+          <a:ln/>
+        </p:spPr>
+      </p:sp>
+      <p:sp>
+        <p:nvSpPr>
+          <p:cNvPr id="19" name="Text 17"/>
+          <p:cNvSpPr/>
+          <p:nvPr/>
+        </p:nvSpPr>
+        <p:spPr>
+          <a:xfrm>
+            <a:off x="6675120" y="1828800"/>
+            <a:ext cx="4965192" cy="502920"/>
           </a:xfrm>
           <a:prstGeom prst="rect">
             <a:avLst/>
@@ -4173,7 +4374,7 @@
               <a:buNone/>
             </a:pPr>
             <a:r>
-              <a:rPr lang="en-US" sz="2000" b="1" dirty="0">
+              <a:rPr lang="en-US" sz="1400" b="1" dirty="0">
                 <a:solidFill>
                   <a:srgbClr val="FFFFFF"/>
                 </a:solidFill>
@@ -4181,22 +4382,22 @@
                 <a:ea typeface="Malgun Gothic" pitchFamily="34" charset="-122"/>
                 <a:cs typeface="Malgun Gothic" pitchFamily="34" charset="-120"/>
               </a:rPr>
-              <a:t>2</a:t>
-            </a:r>
-            <a:endParaRPr lang="en-US" sz="2000" dirty="0"/>
-          </a:p>
-        </p:txBody>
-      </p:sp>
-      <p:sp>
-        <p:nvSpPr>
-          <p:cNvPr id="15" name="Text 13"/>
-          <p:cNvSpPr/>
-          <p:nvPr/>
-        </p:nvSpPr>
-        <p:spPr>
-          <a:xfrm>
-            <a:off x="1508760" y="3081528"/>
-            <a:ext cx="9902952" cy="868680"/>
+              <a:t>🌐 일반 브라우저 (크롬·사파리)</a:t>
+            </a:r>
+            <a:endParaRPr lang="en-US" sz="1400" dirty="0"/>
+          </a:p>
+        </p:txBody>
+      </p:sp>
+      <p:sp>
+        <p:nvSpPr>
+          <p:cNvPr id="20" name="Text 18"/>
+          <p:cNvSpPr/>
+          <p:nvPr/>
+        </p:nvSpPr>
+        <p:spPr>
+          <a:xfrm>
+            <a:off x="6995160" y="2450592"/>
+            <a:ext cx="4325112" cy="365760"/>
           </a:xfrm>
           <a:prstGeom prst="rect">
             <a:avLst/>
@@ -4209,13 +4410,10 @@
           <a:lstStyle/>
           <a:p>
             <a:pPr indent="0" marL="0">
-              <a:lnSpc>
-                <a:spcPct val="102000"/>
-              </a:lnSpc>
-              <a:buNone/>
-            </a:pPr>
-            <a:r>
-              <a:rPr lang="en-US" sz="1700" b="1" dirty="0">
+              <a:buNone/>
+            </a:pPr>
+            <a:r>
+              <a:rPr lang="en-US" sz="1350" b="1" dirty="0">
                 <a:solidFill>
                   <a:srgbClr val="2B2018"/>
                 </a:solidFill>
@@ -4223,98 +4421,93 @@
                 <a:ea typeface="Malgun Gothic" pitchFamily="34" charset="-122"/>
                 <a:cs typeface="Malgun Gothic" pitchFamily="34" charset="-120"/>
               </a:rPr>
-              <a:t>일반 휴대폰·컴퓨터는 구글로 로그인
-</a:t>
-            </a:r>
-            <a:endParaRPr lang="en-US" sz="1700" dirty="0"/>
-          </a:p>
-          <a:p>
-            <a:pPr indent="0" marL="0">
-              <a:lnSpc>
-                <a:spcPct val="102000"/>
-              </a:lnSpc>
-              <a:buNone/>
-            </a:pPr>
-            <a:r>
-              <a:rPr lang="en-US" sz="1350" dirty="0">
-                <a:solidFill>
-                  <a:srgbClr val="8A7A6D"/>
-                </a:solidFill>
-                <a:latin typeface="Malgun Gothic" pitchFamily="34" charset="0"/>
-                <a:ea typeface="Malgun Gothic" pitchFamily="34" charset="-122"/>
-                <a:cs typeface="Malgun Gothic" pitchFamily="34" charset="-120"/>
-              </a:rPr>
-              <a:t>Pi 브라우저가 아니면 "구글 계정으로 로그인" 버튼을 누르고 평소 쓰는 구글 계정을 고르면 됩니다.</a:t>
-            </a:r>
-            <a:endParaRPr lang="en-US" sz="1700" dirty="0"/>
-          </a:p>
-        </p:txBody>
-      </p:sp>
-      <p:sp>
-        <p:nvSpPr>
-          <p:cNvPr id="16" name="Shape 14"/>
-          <p:cNvSpPr/>
-          <p:nvPr/>
-        </p:nvSpPr>
-        <p:spPr>
-          <a:xfrm>
-            <a:off x="548640" y="4197096"/>
-            <a:ext cx="11091672" cy="1051560"/>
-          </a:xfrm>
-          <a:prstGeom prst="rect">
-            <a:avLst/>
-          </a:prstGeom>
-          <a:solidFill>
-            <a:srgbClr val="FFFFFF"/>
+              <a:t>③ 구글 로그인 후, 주소창에 붙여넣기</a:t>
+            </a:r>
+            <a:endParaRPr lang="en-US" sz="1350" dirty="0"/>
+          </a:p>
+        </p:txBody>
+      </p:sp>
+      <p:sp>
+        <p:nvSpPr>
+          <p:cNvPr id="21" name="Shape 19"/>
+          <p:cNvSpPr/>
+          <p:nvPr/>
+        </p:nvSpPr>
+        <p:spPr>
+          <a:xfrm>
+            <a:off x="7086600" y="2880360"/>
+            <a:ext cx="4142232" cy="502920"/>
+          </a:xfrm>
+          <a:prstGeom prst="roundRect">
+            <a:avLst>
+              <a:gd name="adj" fmla="val 14545"/>
+            </a:avLst>
+          </a:prstGeom>
+          <a:solidFill>
+            <a:srgbClr val="F2ECE3"/>
           </a:solidFill>
           <a:ln w="12700">
             <a:solidFill>
-              <a:srgbClr val="EADFCE"/>
+              <a:srgbClr val="D8CBBA"/>
             </a:solidFill>
             <a:prstDash val="solid"/>
           </a:ln>
-          <a:effectLst>
-            <a:outerShdw sx="100000" sy="100000" kx="0" ky="0" algn="bl" rotWithShape="0" blurRad="101600" dist="38100" dir="8100000">
-              <a:srgbClr val="000000">
-                <a:alpha val="12000"/>
-              </a:srgbClr>
-            </a:outerShdw>
-          </a:effectLst>
-        </p:spPr>
-      </p:sp>
-      <p:sp>
-        <p:nvSpPr>
-          <p:cNvPr id="17" name="Shape 15"/>
-          <p:cNvSpPr/>
-          <p:nvPr/>
-        </p:nvSpPr>
-        <p:spPr>
-          <a:xfrm>
-            <a:off x="548640" y="4197096"/>
-            <a:ext cx="109728" cy="1051560"/>
-          </a:xfrm>
-          <a:prstGeom prst="rect">
-            <a:avLst/>
-          </a:prstGeom>
-          <a:solidFill>
-            <a:srgbClr val="F4A52A"/>
-          </a:solidFill>
-          <a:ln/>
-        </p:spPr>
-      </p:sp>
-      <p:sp>
-        <p:nvSpPr>
-          <p:cNvPr id="18" name="Shape 16"/>
-          <p:cNvSpPr/>
-          <p:nvPr/>
-        </p:nvSpPr>
-        <p:spPr>
-          <a:xfrm>
-            <a:off x="804672" y="4466844"/>
-            <a:ext cx="512064" cy="512064"/>
-          </a:xfrm>
-          <a:prstGeom prst="ellipse">
-            <a:avLst/>
+        </p:spPr>
+      </p:sp>
+      <p:sp>
+        <p:nvSpPr>
+          <p:cNvPr id="22" name="Text 20"/>
+          <p:cNvSpPr/>
+          <p:nvPr/>
+        </p:nvSpPr>
+        <p:spPr>
+          <a:xfrm>
+            <a:off x="7315200" y="2880360"/>
+            <a:ext cx="3959352" cy="502920"/>
+          </a:xfrm>
+          <a:prstGeom prst="rect">
+            <a:avLst/>
+          </a:prstGeom>
+          <a:noFill/>
+          <a:ln/>
+        </p:spPr>
+        <p:txBody>
+          <a:bodyPr wrap="square" lIns="0" tIns="0" rIns="0" bIns="0" rtlCol="0" anchor="ctr"/>
+          <a:lstStyle/>
+          <a:p>
+            <a:pPr indent="0" marL="0">
+              <a:buNone/>
+            </a:pPr>
+            <a:r>
+              <a:rPr lang="en-US" sz="1200" dirty="0">
+                <a:solidFill>
+                  <a:srgbClr val="2B2018"/>
+                </a:solidFill>
+                <a:latin typeface="Consolas" pitchFamily="34" charset="0"/>
+                <a:ea typeface="Consolas" pitchFamily="34" charset="-122"/>
+                <a:cs typeface="Consolas" pitchFamily="34" charset="-120"/>
+              </a:rPr>
+              <a:t>🔗  …/link?code=A3F9K2</a:t>
+            </a:r>
+            <a:endParaRPr lang="en-US" sz="1200" dirty="0"/>
+          </a:p>
+        </p:txBody>
+      </p:sp>
+      <p:sp>
+        <p:nvSpPr>
+          <p:cNvPr id="23" name="Shape 21"/>
+          <p:cNvSpPr/>
+          <p:nvPr/>
+        </p:nvSpPr>
+        <p:spPr>
+          <a:xfrm>
+            <a:off x="7086600" y="3566160"/>
+            <a:ext cx="4142232" cy="566928"/>
+          </a:xfrm>
+          <a:prstGeom prst="roundRect">
+            <a:avLst>
+              <a:gd name="adj" fmla="val 16129"/>
+            </a:avLst>
           </a:prstGeom>
           <a:solidFill>
             <a:srgbClr val="3B2A20"/>
@@ -4324,14 +4517,14 @@
       </p:sp>
       <p:sp>
         <p:nvSpPr>
-          <p:cNvPr id="19" name="Text 17"/>
-          <p:cNvSpPr/>
-          <p:nvPr/>
-        </p:nvSpPr>
-        <p:spPr>
-          <a:xfrm>
-            <a:off x="804672" y="4466844"/>
-            <a:ext cx="512064" cy="512064"/>
+          <p:cNvPr id="24" name="Text 22"/>
+          <p:cNvSpPr/>
+          <p:nvPr/>
+        </p:nvSpPr>
+        <p:spPr>
+          <a:xfrm>
+            <a:off x="7086600" y="3566160"/>
+            <a:ext cx="4142232" cy="566928"/>
           </a:xfrm>
           <a:prstGeom prst="rect">
             <a:avLst/>
@@ -4347,7 +4540,7 @@
               <a:buNone/>
             </a:pPr>
             <a:r>
-              <a:rPr lang="en-US" sz="2000" b="1" dirty="0">
+              <a:rPr lang="en-US" sz="1400" b="1" dirty="0">
                 <a:solidFill>
                   <a:srgbClr val="FFFFFF"/>
                 </a:solidFill>
@@ -4355,78 +4548,81 @@
                 <a:ea typeface="Malgun Gothic" pitchFamily="34" charset="-122"/>
                 <a:cs typeface="Malgun Gothic" pitchFamily="34" charset="-120"/>
               </a:rPr>
-              <a:t>3</a:t>
-            </a:r>
-            <a:endParaRPr lang="en-US" sz="2000" dirty="0"/>
-          </a:p>
-        </p:txBody>
-      </p:sp>
-      <p:sp>
-        <p:nvSpPr>
-          <p:cNvPr id="20" name="Text 18"/>
-          <p:cNvSpPr/>
-          <p:nvPr/>
-        </p:nvSpPr>
-        <p:spPr>
-          <a:xfrm>
-            <a:off x="1508760" y="4288536"/>
-            <a:ext cx="9902952" cy="868680"/>
-          </a:xfrm>
-          <a:prstGeom prst="rect">
-            <a:avLst/>
-          </a:prstGeom>
-          <a:noFill/>
-          <a:ln/>
-        </p:spPr>
-        <p:txBody>
-          <a:bodyPr wrap="square" lIns="0" tIns="0" rIns="0" bIns="0" rtlCol="0" anchor="ctr"/>
-          <a:lstStyle/>
-          <a:p>
-            <a:pPr indent="0" marL="0">
-              <a:lnSpc>
-                <a:spcPct val="102000"/>
-              </a:lnSpc>
-              <a:buNone/>
-            </a:pPr>
-            <a:r>
-              <a:rPr lang="en-US" sz="1700" b="1" dirty="0">
-                <a:solidFill>
-                  <a:srgbClr val="2B2018"/>
-                </a:solidFill>
-                <a:latin typeface="Malgun Gothic" pitchFamily="34" charset="0"/>
-                <a:ea typeface="Malgun Gothic" pitchFamily="34" charset="-122"/>
-                <a:cs typeface="Malgun Gothic" pitchFamily="34" charset="-120"/>
-              </a:rPr>
-              <a:t>"내 정보"에서 두 계정 연결(연동)
-</a:t>
-            </a:r>
-            <a:endParaRPr lang="en-US" sz="1700" dirty="0"/>
-          </a:p>
-          <a:p>
-            <a:pPr indent="0" marL="0">
-              <a:lnSpc>
-                <a:spcPct val="102000"/>
-              </a:lnSpc>
-              <a:buNone/>
-            </a:pPr>
-            <a:r>
-              <a:rPr lang="en-US" sz="1350" dirty="0">
-                <a:solidFill>
-                  <a:srgbClr val="8A7A6D"/>
-                </a:solidFill>
-                <a:latin typeface="Malgun Gothic" pitchFamily="34" charset="0"/>
-                <a:ea typeface="Malgun Gothic" pitchFamily="34" charset="-122"/>
-                <a:cs typeface="Malgun Gothic" pitchFamily="34" charset="-120"/>
-              </a:rPr>
-              <a:t>내 정보 화면의 "계정 연동"에서 Pi와 구글을 한 번 연결해두면, 어느 쪽으로 들어와도 같은 내 계정으로 이어집니다.</a:t>
-            </a:r>
-            <a:endParaRPr lang="en-US" sz="1700" dirty="0"/>
-          </a:p>
-        </p:txBody>
-      </p:sp>
-      <p:sp>
-        <p:nvSpPr>
-          <p:cNvPr id="21" name="Shape 19"/>
+              <a:t>④ “연동하기” 클릭</a:t>
+            </a:r>
+            <a:endParaRPr lang="en-US" sz="1400" dirty="0"/>
+          </a:p>
+        </p:txBody>
+      </p:sp>
+      <p:sp>
+        <p:nvSpPr>
+          <p:cNvPr id="25" name="Shape 23"/>
+          <p:cNvSpPr/>
+          <p:nvPr/>
+        </p:nvSpPr>
+        <p:spPr>
+          <a:xfrm>
+            <a:off x="7086600" y="4297680"/>
+            <a:ext cx="4142232" cy="566928"/>
+          </a:xfrm>
+          <a:prstGeom prst="roundRect">
+            <a:avLst>
+              <a:gd name="adj" fmla="val 16129"/>
+            </a:avLst>
+          </a:prstGeom>
+          <a:solidFill>
+            <a:srgbClr val="E8F5E9"/>
+          </a:solidFill>
+          <a:ln w="12700">
+            <a:solidFill>
+              <a:srgbClr val="9CCFA3"/>
+            </a:solidFill>
+            <a:prstDash val="solid"/>
+          </a:ln>
+        </p:spPr>
+      </p:sp>
+      <p:sp>
+        <p:nvSpPr>
+          <p:cNvPr id="26" name="Text 24"/>
+          <p:cNvSpPr/>
+          <p:nvPr/>
+        </p:nvSpPr>
+        <p:spPr>
+          <a:xfrm>
+            <a:off x="7086600" y="4297680"/>
+            <a:ext cx="4142232" cy="566928"/>
+          </a:xfrm>
+          <a:prstGeom prst="rect">
+            <a:avLst/>
+          </a:prstGeom>
+          <a:noFill/>
+          <a:ln/>
+        </p:spPr>
+        <p:txBody>
+          <a:bodyPr wrap="square" lIns="0" tIns="0" rIns="0" bIns="0" rtlCol="0" anchor="ctr"/>
+          <a:lstStyle/>
+          <a:p>
+            <a:pPr algn="ctr" indent="0" marL="0">
+              <a:buNone/>
+            </a:pPr>
+            <a:r>
+              <a:rPr lang="en-US" sz="1400" b="1" dirty="0">
+                <a:solidFill>
+                  <a:srgbClr val="2E7D32"/>
+                </a:solidFill>
+                <a:latin typeface="Malgun Gothic" pitchFamily="34" charset="0"/>
+                <a:ea typeface="Malgun Gothic" pitchFamily="34" charset="-122"/>
+                <a:cs typeface="Malgun Gothic" pitchFamily="34" charset="-120"/>
+              </a:rPr>
+              <a:t>✓ Pi + Google 연동 완료!</a:t>
+            </a:r>
+            <a:endParaRPr lang="en-US" sz="1400" dirty="0"/>
+          </a:p>
+        </p:txBody>
+      </p:sp>
+      <p:sp>
+        <p:nvSpPr>
+          <p:cNvPr id="27" name="Shape 25"/>
           <p:cNvSpPr/>
           <p:nvPr/>
         </p:nvSpPr>
@@ -4453,7 +4649,7 @@
       </p:sp>
       <p:sp>
         <p:nvSpPr>
-          <p:cNvPr id="22" name="Text 20"/>
+          <p:cNvPr id="28" name="Text 26"/>
           <p:cNvSpPr/>
           <p:nvPr/>
         </p:nvSpPr>
@@ -4498,7 +4694,7 @@
                 <a:ea typeface="Malgun Gothic" pitchFamily="34" charset="-122"/>
                 <a:cs typeface="Malgun Gothic" pitchFamily="34" charset="-120"/>
               </a:rPr>
-              <a:t>집 열쇠와 자동차 열쇠를 열쇠고리 하나에 모으는 것과 같아요. 한 번만 묶어두면 편해요.</a:t>
+              <a:t>Pi 브라우저는 보안상 정보를 저장 못 해서, 6자리 코드(또는 링크)로 두 브라우저를 안전하게 이어줘요.</a:t>
             </a:r>
             <a:endParaRPr lang="en-US" sz="1400" dirty="0"/>
           </a:p>
@@ -4506,7 +4702,7 @@
       </p:sp>
       <p:sp>
         <p:nvSpPr>
-          <p:cNvPr id="23" name="Text 21"/>
+          <p:cNvPr id="29" name="Text 27"/>
           <p:cNvSpPr/>
           <p:nvPr/>
         </p:nvSpPr>
@@ -4559,7 +4755,7 @@
       </p:sp>
       <p:sp>
         <p:nvSpPr>
-          <p:cNvPr id="24" name="Text 22"/>
+          <p:cNvPr id="30" name="Text 28"/>
           <p:cNvSpPr/>
           <p:nvPr/>
         </p:nvSpPr>
@@ -4727,7 +4923,7 @@
                 <a:ea typeface="Malgun Gothic" pitchFamily="34" charset="-122"/>
                 <a:cs typeface="Malgun Gothic" pitchFamily="34" charset="-120"/>
               </a:rPr>
-              <a:t>🫘  Bean(빈) 이해하기</a:t>
+              <a:t>☕  Bean(커피빈) 이해하기</a:t>
             </a:r>
             <a:endParaRPr lang="en-US" sz="3200" dirty="0"/>
           </a:p>
@@ -4766,7 +4962,7 @@
                 <a:ea typeface="Malgun Gothic" pitchFamily="34" charset="-122"/>
                 <a:cs typeface="Malgun Gothic" pitchFamily="34" charset="-120"/>
               </a:rPr>
-              <a:t>앱 안에서 마음을 전하는 작은 코인이에요. 충전해서 쓰고, 고마운 사람에게 보냅니다.</a:t>
+              <a:t>커피빈은 앱 안에서 마음을 전하는 작은 코인이에요. 충전해서 쓰고, 고마운 사람에게 보냅니다.</a:t>
             </a:r>
             <a:endParaRPr lang="en-US" sz="1600" dirty="0"/>
           </a:p>
@@ -4940,7 +5136,7 @@
                 <a:ea typeface="Malgun Gothic" pitchFamily="34" charset="-122"/>
                 <a:cs typeface="Malgun Gothic" pitchFamily="34" charset="-120"/>
               </a:rPr>
-              <a:t>카페에서 고마운 사람에게 톡 보내는 "마음 코인(🫘)"이에요. 칭찬·응원·감사를 숫자 대신 Bean으로 표현합니다.</a:t>
+              <a:t>카페에서 고마운 사람에게 톡 보내는 "커피빈 코인(☕)"이에요. 칭찬·응원·감사를 숫자 대신 커피빈으로 표현합니다.</a:t>
             </a:r>
             <a:endParaRPr lang="en-US" sz="1700" dirty="0"/>
           </a:p>
@@ -5114,7 +5310,7 @@
                 <a:ea typeface="Malgun Gothic" pitchFamily="34" charset="-122"/>
                 <a:cs typeface="Malgun Gothic" pitchFamily="34" charset="-120"/>
               </a:rPr>
-              <a:t>Pi로 Bean을 충전해요. 충전 버튼을 누르고 원하는 만큼 고른 뒤 Pi로 결제하면 내 Bean이 쌓입니다.</a:t>
+              <a:t>Pi로 커피빈을 충전해요. 충전 버튼을 누르고 원하는 만큼 고른 뒤 Pi로 결제하면 내 커피빈이 쌓입니다.</a:t>
             </a:r>
             <a:endParaRPr lang="en-US" sz="1700" dirty="0"/>
           </a:p>
@@ -5288,7 +5484,7 @@
                 <a:ea typeface="Malgun Gothic" pitchFamily="34" charset="-122"/>
                 <a:cs typeface="Malgun Gothic" pitchFamily="34" charset="-120"/>
               </a:rPr>
-              <a:t>대화방에서 상대에게 "Bean 보내기"를 누르면 마음이 전달돼요. 받은 사람은 알림으로 확인합니다.</a:t>
+              <a:t>대화방에서 상대에게 "커피빈 보내기"를 누르면 마음이 전달돼요. 받은 사람은 알림으로 확인합니다.</a:t>
             </a:r>
             <a:endParaRPr lang="en-US" sz="1700" dirty="0"/>
           </a:p>
@@ -5368,7 +5564,7 @@
                 <a:ea typeface="Malgun Gothic" pitchFamily="34" charset="-122"/>
                 <a:cs typeface="Malgun Gothic" pitchFamily="34" charset="-120"/>
               </a:rPr>
-              <a:t>커피 한 잔 사주는 마음을 앱 안에서 "콩(Bean) 한 줌"으로 건네는 거예요.</a:t>
+              <a:t>커피 한 잔 대접하듯, 앱 안에서 "커피빈(Bean)"으로 따뜻한 마음을 건네는 거예요. ☕</a:t>
             </a:r>
             <a:endParaRPr lang="en-US" sz="1400" dirty="0"/>
           </a:p>
@@ -5597,7 +5793,7 @@
                 <a:ea typeface="Malgun Gothic" pitchFamily="34" charset="-122"/>
                 <a:cs typeface="Malgun Gothic" pitchFamily="34" charset="-120"/>
               </a:rPr>
-              <a:t>🎫  구독(이용권) 사용하기</a:t>
+              <a:t>🎫  PiCafe 구독(이용권) 요금제</a:t>
             </a:r>
             <a:endParaRPr lang="en-US" sz="3200" dirty="0"/>
           </a:p>
@@ -5636,7 +5832,7 @@
                 <a:ea typeface="Malgun Gothic" pitchFamily="34" charset="-122"/>
                 <a:cs typeface="Malgun Gothic" pitchFamily="34" charset="-120"/>
               </a:rPr>
-              <a:t>필요한 만큼 기능을 넓혀주는 "이용권"이에요. 카페용과 가게용은 목적이 달라요.</a:t>
+              <a:t>카페를 더 넓게 쓰는 이용권. 무료부터 시작하고, 필요하면 올리세요.</a:t>
             </a:r>
             <a:endParaRPr lang="en-US" sz="1600" dirty="0"/>
           </a:p>
@@ -5650,8 +5846,8 @@
         </p:nvSpPr>
         <p:spPr>
           <a:xfrm>
-            <a:off x="548640" y="1874520"/>
-            <a:ext cx="5449824" cy="3383280"/>
+            <a:off x="548640" y="1783080"/>
+            <a:ext cx="3483864" cy="3337560"/>
           </a:xfrm>
           <a:prstGeom prst="rect">
             <a:avLst/>
@@ -5682,14 +5878,14 @@
         </p:nvSpPr>
         <p:spPr>
           <a:xfrm>
-            <a:off x="548640" y="1874520"/>
-            <a:ext cx="5449824" cy="640080"/>
-          </a:xfrm>
-          <a:prstGeom prst="rect">
-            <a:avLst/>
-          </a:prstGeom>
-          <a:solidFill>
-            <a:srgbClr val="2E7D6F"/>
+            <a:off x="548640" y="1783080"/>
+            <a:ext cx="3483864" cy="548640"/>
+          </a:xfrm>
+          <a:prstGeom prst="rect">
+            <a:avLst/>
+          </a:prstGeom>
+          <a:solidFill>
+            <a:srgbClr val="9C8C7C"/>
           </a:solidFill>
           <a:ln/>
         </p:spPr>
@@ -5702,8 +5898,8 @@
         </p:nvSpPr>
         <p:spPr>
           <a:xfrm>
-            <a:off x="548640" y="1874520"/>
-            <a:ext cx="5449824" cy="640080"/>
+            <a:off x="548640" y="1783080"/>
+            <a:ext cx="3483864" cy="548640"/>
           </a:xfrm>
           <a:prstGeom prst="rect">
             <a:avLst/>
@@ -5719,7 +5915,7 @@
               <a:buNone/>
             </a:pPr>
             <a:r>
-              <a:rPr lang="en-US" sz="1800" b="1" dirty="0">
+              <a:rPr lang="en-US" sz="1600" b="1" dirty="0">
                 <a:solidFill>
                   <a:srgbClr val="FFFFFF"/>
                 </a:solidFill>
@@ -5727,9 +5923,9 @@
                 <a:ea typeface="Malgun Gothic" pitchFamily="34" charset="-122"/>
                 <a:cs typeface="Malgun Gothic" pitchFamily="34" charset="-120"/>
               </a:rPr>
-              <a:t>💬 PiCafe 용 이용권</a:t>
-            </a:r>
-            <a:endParaRPr lang="en-US" sz="1800" dirty="0"/>
+              <a:t>Pi Explorer</a:t>
+            </a:r>
+            <a:endParaRPr lang="en-US" sz="1600" dirty="0"/>
           </a:p>
         </p:txBody>
       </p:sp>
@@ -5741,8 +5937,89 @@
         </p:nvSpPr>
         <p:spPr>
           <a:xfrm>
-            <a:off x="868680" y="2743200"/>
-            <a:ext cx="4846320" cy="2377440"/>
+            <a:off x="548640" y="2468880"/>
+            <a:ext cx="3483864" cy="548640"/>
+          </a:xfrm>
+          <a:prstGeom prst="rect">
+            <a:avLst/>
+          </a:prstGeom>
+          <a:noFill/>
+          <a:ln/>
+        </p:spPr>
+        <p:txBody>
+          <a:bodyPr wrap="square" lIns="0" tIns="0" rIns="0" bIns="0" rtlCol="0" anchor="ctr"/>
+          <a:lstStyle/>
+          <a:p>
+            <a:pPr algn="ctr" indent="0" marL="0">
+              <a:buNone/>
+            </a:pPr>
+            <a:r>
+              <a:rPr lang="en-US" sz="3000" b="1" dirty="0">
+                <a:solidFill>
+                  <a:srgbClr val="3B2A20"/>
+                </a:solidFill>
+                <a:latin typeface="Malgun Gothic" pitchFamily="34" charset="0"/>
+                <a:ea typeface="Malgun Gothic" pitchFamily="34" charset="-122"/>
+                <a:cs typeface="Malgun Gothic" pitchFamily="34" charset="-120"/>
+              </a:rPr>
+              <a:t>무료</a:t>
+            </a:r>
+            <a:endParaRPr lang="en-US" sz="3000" dirty="0"/>
+          </a:p>
+        </p:txBody>
+      </p:sp>
+      <p:sp>
+        <p:nvSpPr>
+          <p:cNvPr id="10" name="Text 8"/>
+          <p:cNvSpPr/>
+          <p:nvPr/>
+        </p:nvSpPr>
+        <p:spPr>
+          <a:xfrm>
+            <a:off x="731520" y="3044952"/>
+            <a:ext cx="3118104" cy="457200"/>
+          </a:xfrm>
+          <a:prstGeom prst="rect">
+            <a:avLst/>
+          </a:prstGeom>
+          <a:noFill/>
+          <a:ln/>
+        </p:spPr>
+        <p:txBody>
+          <a:bodyPr wrap="square" lIns="0" tIns="0" rIns="0" bIns="0" rtlCol="0" anchor="ctr"/>
+          <a:lstStyle/>
+          <a:p>
+            <a:pPr algn="ctr" indent="0" marL="0">
+              <a:lnSpc>
+                <a:spcPct val="100000"/>
+              </a:lnSpc>
+              <a:buNone/>
+            </a:pPr>
+            <a:r>
+              <a:rPr lang="en-US" sz="1150" dirty="0">
+                <a:solidFill>
+                  <a:srgbClr val="8A7A6D"/>
+                </a:solidFill>
+                <a:latin typeface="Malgun Gothic" pitchFamily="34" charset="0"/>
+                <a:ea typeface="Malgun Gothic" pitchFamily="34" charset="-122"/>
+                <a:cs typeface="Malgun Gothic" pitchFamily="34" charset="-120"/>
+              </a:rPr>
+              <a:t>0 Pi · 평생 무료</a:t>
+            </a:r>
+            <a:endParaRPr lang="en-US" sz="1150" dirty="0"/>
+          </a:p>
+        </p:txBody>
+      </p:sp>
+      <p:sp>
+        <p:nvSpPr>
+          <p:cNvPr id="11" name="Text 9"/>
+          <p:cNvSpPr/>
+          <p:nvPr/>
+        </p:nvSpPr>
+        <p:spPr>
+          <a:xfrm>
+            <a:off x="914400" y="3657600"/>
+            <a:ext cx="2843784" cy="1371600"/>
           </a:xfrm>
           <a:prstGeom prst="rect">
             <a:avLst/>
@@ -5754,14 +6031,15 @@
           <a:bodyPr wrap="square" lIns="0" tIns="0" rIns="0" bIns="0" rtlCol="0" anchor="t"/>
           <a:lstStyle/>
           <a:p>
-            <a:pPr indent="0" marL="0">
-              <a:lnSpc>
-                <a:spcPct val="110000"/>
-              </a:lnSpc>
-              <a:buNone/>
-            </a:pPr>
-            <a:r>
-              <a:rPr lang="en-US" sz="1500" b="1" dirty="0">
+            <a:pPr marL="342900" indent="-342900">
+              <a:spcAft>
+                <a:spcPts val="600"/>
+              </a:spcAft>
+              <a:buSzPct val="100000"/>
+              <a:buChar char="•"/>
+            </a:pPr>
+            <a:r>
+              <a:rPr lang="en-US" sz="1250" dirty="0">
                 <a:solidFill>
                   <a:srgbClr val="2B2018"/>
                 </a:solidFill>
@@ -5769,85 +6047,64 @@
                 <a:ea typeface="Malgun Gothic" pitchFamily="34" charset="-122"/>
                 <a:cs typeface="Malgun Gothic" pitchFamily="34" charset="-120"/>
               </a:rPr>
-              <a:t>카페(채팅)를 더 넓게 쓰는 이용권
-</a:t>
-            </a:r>
-            <a:endParaRPr lang="en-US" sz="1500" dirty="0"/>
-          </a:p>
-          <a:p>
-            <a:pPr indent="0" marL="0">
-              <a:lnSpc>
-                <a:spcPct val="110000"/>
-              </a:lnSpc>
-              <a:buNone/>
-            </a:pPr>
-            <a:r>
-              <a:rPr lang="en-US" sz="1400" dirty="0">
-                <a:solidFill>
-                  <a:srgbClr val="8A7A6D"/>
-                </a:solidFill>
-                <a:latin typeface="Malgun Gothic" pitchFamily="34" charset="0"/>
-                <a:ea typeface="Malgun Gothic" pitchFamily="34" charset="-122"/>
-                <a:cs typeface="Malgun Gothic" pitchFamily="34" charset="-120"/>
-              </a:rPr>
-              <a:t>• 더 큰 방, 더 많은 인원
-</a:t>
-            </a:r>
-            <a:endParaRPr lang="en-US" sz="1500" dirty="0"/>
-          </a:p>
-          <a:p>
-            <a:pPr indent="0" marL="0">
-              <a:lnSpc>
-                <a:spcPct val="110000"/>
-              </a:lnSpc>
-              <a:buNone/>
-            </a:pPr>
-            <a:r>
-              <a:rPr lang="en-US" sz="1400" dirty="0">
-                <a:solidFill>
-                  <a:srgbClr val="8A7A6D"/>
-                </a:solidFill>
-                <a:latin typeface="Malgun Gothic" pitchFamily="34" charset="0"/>
-                <a:ea typeface="Malgun Gothic" pitchFamily="34" charset="-122"/>
-                <a:cs typeface="Malgun Gothic" pitchFamily="34" charset="-120"/>
-              </a:rPr>
-              <a:t>• 고급 기능(분석·봇 등)
-</a:t>
-            </a:r>
-            <a:endParaRPr lang="en-US" sz="1500" dirty="0"/>
-          </a:p>
-          <a:p>
-            <a:pPr indent="0" marL="0">
-              <a:lnSpc>
-                <a:spcPct val="110000"/>
-              </a:lnSpc>
-              <a:buNone/>
-            </a:pPr>
-            <a:r>
-              <a:rPr lang="en-US" sz="1400" dirty="0">
-                <a:solidFill>
-                  <a:srgbClr val="8A7A6D"/>
-                </a:solidFill>
-                <a:latin typeface="Malgun Gothic" pitchFamily="34" charset="0"/>
-                <a:ea typeface="Malgun Gothic" pitchFamily="34" charset="-122"/>
-                <a:cs typeface="Malgun Gothic" pitchFamily="34" charset="-120"/>
-              </a:rPr>
-              <a:t>• 음성 채팅 지원</a:t>
-            </a:r>
-            <a:endParaRPr lang="en-US" sz="1500" dirty="0"/>
-          </a:p>
-        </p:txBody>
-      </p:sp>
-      <p:sp>
-        <p:nvSpPr>
-          <p:cNvPr id="10" name="Shape 8"/>
-          <p:cNvSpPr/>
-          <p:nvPr/>
-        </p:nvSpPr>
-        <p:spPr>
-          <a:xfrm>
-            <a:off x="6190488" y="1874520"/>
-            <a:ext cx="5449824" cy="3383280"/>
+              <a:t>기본 테마 6개</a:t>
+            </a:r>
+            <a:endParaRPr lang="en-US" sz="1250" dirty="0"/>
+          </a:p>
+          <a:p>
+            <a:pPr marL="342900" indent="-342900">
+              <a:spcAft>
+                <a:spcPts val="600"/>
+              </a:spcAft>
+              <a:buSzPct val="100000"/>
+              <a:buChar char="•"/>
+            </a:pPr>
+            <a:r>
+              <a:rPr lang="en-US" sz="1250" dirty="0">
+                <a:solidFill>
+                  <a:srgbClr val="2B2018"/>
+                </a:solidFill>
+                <a:latin typeface="Malgun Gothic" pitchFamily="34" charset="0"/>
+                <a:ea typeface="Malgun Gothic" pitchFamily="34" charset="-122"/>
+                <a:cs typeface="Malgun Gothic" pitchFamily="34" charset="-120"/>
+              </a:rPr>
+              <a:t>1:1 채팅 무제한</a:t>
+            </a:r>
+            <a:endParaRPr lang="en-US" sz="1250" dirty="0"/>
+          </a:p>
+          <a:p>
+            <a:pPr marL="342900" indent="-342900">
+              <a:spcAft>
+                <a:spcPts val="600"/>
+              </a:spcAft>
+              <a:buSzPct val="100000"/>
+              <a:buChar char="•"/>
+            </a:pPr>
+            <a:r>
+              <a:rPr lang="en-US" sz="1250" dirty="0">
+                <a:solidFill>
+                  <a:srgbClr val="2B2018"/>
+                </a:solidFill>
+                <a:latin typeface="Malgun Gothic" pitchFamily="34" charset="0"/>
+                <a:ea typeface="Malgun Gothic" pitchFamily="34" charset="-122"/>
+                <a:cs typeface="Malgun Gothic" pitchFamily="34" charset="-120"/>
+              </a:rPr>
+              <a:t>커피빈 받기</a:t>
+            </a:r>
+            <a:endParaRPr lang="en-US" sz="1250" dirty="0"/>
+          </a:p>
+        </p:txBody>
+      </p:sp>
+      <p:sp>
+        <p:nvSpPr>
+          <p:cNvPr id="12" name="Shape 10"/>
+          <p:cNvSpPr/>
+          <p:nvPr/>
+        </p:nvSpPr>
+        <p:spPr>
+          <a:xfrm>
+            <a:off x="4352544" y="1783080"/>
+            <a:ext cx="3483864" cy="3337560"/>
           </a:xfrm>
           <a:prstGeom prst="rect">
             <a:avLst/>
@@ -5872,14 +6129,380 @@
       </p:sp>
       <p:sp>
         <p:nvSpPr>
-          <p:cNvPr id="11" name="Shape 9"/>
-          <p:cNvSpPr/>
-          <p:nvPr/>
-        </p:nvSpPr>
-        <p:spPr>
-          <a:xfrm>
-            <a:off x="6190488" y="1874520"/>
-            <a:ext cx="5449824" cy="640080"/>
+          <p:cNvPr id="13" name="Shape 11"/>
+          <p:cNvSpPr/>
+          <p:nvPr/>
+        </p:nvSpPr>
+        <p:spPr>
+          <a:xfrm>
+            <a:off x="4352544" y="1783080"/>
+            <a:ext cx="3483864" cy="548640"/>
+          </a:xfrm>
+          <a:prstGeom prst="rect">
+            <a:avLst/>
+          </a:prstGeom>
+          <a:solidFill>
+            <a:srgbClr val="2E7D6F"/>
+          </a:solidFill>
+          <a:ln/>
+        </p:spPr>
+      </p:sp>
+      <p:sp>
+        <p:nvSpPr>
+          <p:cNvPr id="14" name="Text 12"/>
+          <p:cNvSpPr/>
+          <p:nvPr/>
+        </p:nvSpPr>
+        <p:spPr>
+          <a:xfrm>
+            <a:off x="4352544" y="1783080"/>
+            <a:ext cx="3483864" cy="548640"/>
+          </a:xfrm>
+          <a:prstGeom prst="rect">
+            <a:avLst/>
+          </a:prstGeom>
+          <a:noFill/>
+          <a:ln/>
+        </p:spPr>
+        <p:txBody>
+          <a:bodyPr wrap="square" lIns="0" tIns="0" rIns="0" bIns="0" rtlCol="0" anchor="ctr"/>
+          <a:lstStyle/>
+          <a:p>
+            <a:pPr algn="ctr" indent="0" marL="0">
+              <a:buNone/>
+            </a:pPr>
+            <a:r>
+              <a:rPr lang="en-US" sz="1600" b="1" dirty="0">
+                <a:solidFill>
+                  <a:srgbClr val="FFFFFF"/>
+                </a:solidFill>
+                <a:latin typeface="Malgun Gothic" pitchFamily="34" charset="0"/>
+                <a:ea typeface="Malgun Gothic" pitchFamily="34" charset="-122"/>
+                <a:cs typeface="Malgun Gothic" pitchFamily="34" charset="-120"/>
+              </a:rPr>
+              <a:t>Pi Creator</a:t>
+            </a:r>
+            <a:endParaRPr lang="en-US" sz="1600" dirty="0"/>
+          </a:p>
+        </p:txBody>
+      </p:sp>
+      <p:sp>
+        <p:nvSpPr>
+          <p:cNvPr id="15" name="Text 13"/>
+          <p:cNvSpPr/>
+          <p:nvPr/>
+        </p:nvSpPr>
+        <p:spPr>
+          <a:xfrm>
+            <a:off x="4352544" y="2468880"/>
+            <a:ext cx="3483864" cy="548640"/>
+          </a:xfrm>
+          <a:prstGeom prst="rect">
+            <a:avLst/>
+          </a:prstGeom>
+          <a:noFill/>
+          <a:ln/>
+        </p:spPr>
+        <p:txBody>
+          <a:bodyPr wrap="square" lIns="0" tIns="0" rIns="0" bIns="0" rtlCol="0" anchor="ctr"/>
+          <a:lstStyle/>
+          <a:p>
+            <a:pPr algn="ctr" indent="0" marL="0">
+              <a:buNone/>
+            </a:pPr>
+            <a:r>
+              <a:rPr lang="en-US" sz="3000" b="1" dirty="0">
+                <a:solidFill>
+                  <a:srgbClr val="3B2A20"/>
+                </a:solidFill>
+                <a:latin typeface="Malgun Gothic" pitchFamily="34" charset="0"/>
+                <a:ea typeface="Malgun Gothic" pitchFamily="34" charset="-122"/>
+                <a:cs typeface="Malgun Gothic" pitchFamily="34" charset="-120"/>
+              </a:rPr>
+              <a:t>1 Pi</a:t>
+            </a:r>
+            <a:endParaRPr lang="en-US" sz="3000" dirty="0"/>
+          </a:p>
+        </p:txBody>
+      </p:sp>
+      <p:sp>
+        <p:nvSpPr>
+          <p:cNvPr id="16" name="Text 14"/>
+          <p:cNvSpPr/>
+          <p:nvPr/>
+        </p:nvSpPr>
+        <p:spPr>
+          <a:xfrm>
+            <a:off x="4535424" y="3044952"/>
+            <a:ext cx="3118104" cy="457200"/>
+          </a:xfrm>
+          <a:prstGeom prst="rect">
+            <a:avLst/>
+          </a:prstGeom>
+          <a:noFill/>
+          <a:ln/>
+        </p:spPr>
+        <p:txBody>
+          <a:bodyPr wrap="square" lIns="0" tIns="0" rIns="0" bIns="0" rtlCol="0" anchor="ctr"/>
+          <a:lstStyle/>
+          <a:p>
+            <a:pPr algn="ctr" indent="0" marL="0">
+              <a:lnSpc>
+                <a:spcPct val="100000"/>
+              </a:lnSpc>
+              <a:buNone/>
+            </a:pPr>
+            <a:r>
+              <a:rPr lang="en-US" sz="1150" dirty="0">
+                <a:solidFill>
+                  <a:srgbClr val="8A7A6D"/>
+                </a:solidFill>
+                <a:latin typeface="Malgun Gothic" pitchFamily="34" charset="0"/>
+                <a:ea typeface="Malgun Gothic" pitchFamily="34" charset="-122"/>
+                <a:cs typeface="Malgun Gothic" pitchFamily="34" charset="-120"/>
+              </a:rPr>
+              <a:t>월간 이용권</a:t>
+            </a:r>
+            <a:endParaRPr lang="en-US" sz="1150" dirty="0"/>
+          </a:p>
+          <a:p>
+            <a:pPr algn="ctr" indent="0" marL="0">
+              <a:lnSpc>
+                <a:spcPct val="100000"/>
+              </a:lnSpc>
+              <a:buNone/>
+            </a:pPr>
+            <a:r>
+              <a:rPr lang="en-US" sz="1150" dirty="0">
+                <a:solidFill>
+                  <a:srgbClr val="8A7A6D"/>
+                </a:solidFill>
+                <a:latin typeface="Malgun Gothic" pitchFamily="34" charset="0"/>
+                <a:ea typeface="Malgun Gothic" pitchFamily="34" charset="-122"/>
+                <a:cs typeface="Malgun Gothic" pitchFamily="34" charset="-120"/>
+              </a:rPr>
+              <a:t>연간 10 Pi (2개월 무료)</a:t>
+            </a:r>
+            <a:endParaRPr lang="en-US" sz="1150" dirty="0"/>
+          </a:p>
+        </p:txBody>
+      </p:sp>
+      <p:sp>
+        <p:nvSpPr>
+          <p:cNvPr id="17" name="Text 15"/>
+          <p:cNvSpPr/>
+          <p:nvPr/>
+        </p:nvSpPr>
+        <p:spPr>
+          <a:xfrm>
+            <a:off x="4718304" y="3657600"/>
+            <a:ext cx="2843784" cy="1371600"/>
+          </a:xfrm>
+          <a:prstGeom prst="rect">
+            <a:avLst/>
+          </a:prstGeom>
+          <a:noFill/>
+          <a:ln/>
+        </p:spPr>
+        <p:txBody>
+          <a:bodyPr wrap="square" lIns="0" tIns="0" rIns="0" bIns="0" rtlCol="0" anchor="t"/>
+          <a:lstStyle/>
+          <a:p>
+            <a:pPr marL="342900" indent="-342900">
+              <a:spcAft>
+                <a:spcPts val="600"/>
+              </a:spcAft>
+              <a:buSzPct val="100000"/>
+              <a:buChar char="•"/>
+            </a:pPr>
+            <a:r>
+              <a:rPr lang="en-US" sz="1250" dirty="0">
+                <a:solidFill>
+                  <a:srgbClr val="2B2018"/>
+                </a:solidFill>
+                <a:latin typeface="Malgun Gothic" pitchFamily="34" charset="0"/>
+                <a:ea typeface="Malgun Gothic" pitchFamily="34" charset="-122"/>
+                <a:cs typeface="Malgun Gothic" pitchFamily="34" charset="-120"/>
+              </a:rPr>
+              <a:t>전체 테마 사용</a:t>
+            </a:r>
+            <a:endParaRPr lang="en-US" sz="1250" dirty="0"/>
+          </a:p>
+          <a:p>
+            <a:pPr marL="342900" indent="-342900">
+              <a:spcAft>
+                <a:spcPts val="600"/>
+              </a:spcAft>
+              <a:buSzPct val="100000"/>
+              <a:buChar char="•"/>
+            </a:pPr>
+            <a:r>
+              <a:rPr lang="en-US" sz="1250" dirty="0">
+                <a:solidFill>
+                  <a:srgbClr val="2B2018"/>
+                </a:solidFill>
+                <a:latin typeface="Malgun Gothic" pitchFamily="34" charset="0"/>
+                <a:ea typeface="Malgun Gothic" pitchFamily="34" charset="-122"/>
+                <a:cs typeface="Malgun Gothic" pitchFamily="34" charset="-120"/>
+              </a:rPr>
+              <a:t>그룹방 월 3개</a:t>
+            </a:r>
+            <a:endParaRPr lang="en-US" sz="1250" dirty="0"/>
+          </a:p>
+          <a:p>
+            <a:pPr marL="342900" indent="-342900">
+              <a:spcAft>
+                <a:spcPts val="600"/>
+              </a:spcAft>
+              <a:buSzPct val="100000"/>
+              <a:buChar char="•"/>
+            </a:pPr>
+            <a:r>
+              <a:rPr lang="en-US" sz="1250" dirty="0">
+                <a:solidFill>
+                  <a:srgbClr val="2B2018"/>
+                </a:solidFill>
+                <a:latin typeface="Malgun Gothic" pitchFamily="34" charset="0"/>
+                <a:ea typeface="Malgun Gothic" pitchFamily="34" charset="-122"/>
+                <a:cs typeface="Malgun Gothic" pitchFamily="34" charset="-120"/>
+              </a:rPr>
+              <a:t>AI 비서 월 10회</a:t>
+            </a:r>
+            <a:endParaRPr lang="en-US" sz="1250" dirty="0"/>
+          </a:p>
+          <a:p>
+            <a:pPr marL="342900" indent="-342900">
+              <a:spcAft>
+                <a:spcPts val="600"/>
+              </a:spcAft>
+              <a:buSzPct val="100000"/>
+              <a:buChar char="•"/>
+            </a:pPr>
+            <a:r>
+              <a:rPr lang="en-US" sz="1250" dirty="0">
+                <a:solidFill>
+                  <a:srgbClr val="2B2018"/>
+                </a:solidFill>
+                <a:latin typeface="Malgun Gothic" pitchFamily="34" charset="0"/>
+                <a:ea typeface="Malgun Gothic" pitchFamily="34" charset="-122"/>
+                <a:cs typeface="Malgun Gothic" pitchFamily="34" charset="-120"/>
+              </a:rPr>
+              <a:t>커피빈 보내기</a:t>
+            </a:r>
+            <a:endParaRPr lang="en-US" sz="1250" dirty="0"/>
+          </a:p>
+        </p:txBody>
+      </p:sp>
+      <p:sp>
+        <p:nvSpPr>
+          <p:cNvPr id="18" name="Shape 16"/>
+          <p:cNvSpPr/>
+          <p:nvPr/>
+        </p:nvSpPr>
+        <p:spPr>
+          <a:xfrm>
+            <a:off x="6601968" y="1618488"/>
+            <a:ext cx="1097280" cy="384048"/>
+          </a:xfrm>
+          <a:prstGeom prst="roundRect">
+            <a:avLst>
+              <a:gd name="adj" fmla="val 19048"/>
+            </a:avLst>
+          </a:prstGeom>
+          <a:solidFill>
+            <a:srgbClr val="F4A52A"/>
+          </a:solidFill>
+          <a:ln/>
+          <a:effectLst>
+            <a:outerShdw sx="100000" sy="100000" kx="0" ky="0" algn="bl" rotWithShape="0" blurRad="101600" dist="38100" dir="8100000">
+              <a:srgbClr val="000000">
+                <a:alpha val="12000"/>
+              </a:srgbClr>
+            </a:outerShdw>
+          </a:effectLst>
+        </p:spPr>
+      </p:sp>
+      <p:sp>
+        <p:nvSpPr>
+          <p:cNvPr id="19" name="Text 17"/>
+          <p:cNvSpPr/>
+          <p:nvPr/>
+        </p:nvSpPr>
+        <p:spPr>
+          <a:xfrm>
+            <a:off x="6601968" y="1618488"/>
+            <a:ext cx="1097280" cy="384048"/>
+          </a:xfrm>
+          <a:prstGeom prst="rect">
+            <a:avLst/>
+          </a:prstGeom>
+          <a:noFill/>
+          <a:ln/>
+        </p:spPr>
+        <p:txBody>
+          <a:bodyPr wrap="square" lIns="0" tIns="0" rIns="0" bIns="0" rtlCol="0" anchor="ctr"/>
+          <a:lstStyle/>
+          <a:p>
+            <a:pPr algn="ctr" indent="0" marL="0">
+              <a:buNone/>
+            </a:pPr>
+            <a:r>
+              <a:rPr lang="en-US" sz="1100" b="1" dirty="0">
+                <a:solidFill>
+                  <a:srgbClr val="FFFFFF"/>
+                </a:solidFill>
+                <a:latin typeface="Malgun Gothic" pitchFamily="34" charset="0"/>
+                <a:ea typeface="Malgun Gothic" pitchFamily="34" charset="-122"/>
+                <a:cs typeface="Malgun Gothic" pitchFamily="34" charset="-120"/>
+              </a:rPr>
+              <a:t>⭐ 인기</a:t>
+            </a:r>
+            <a:endParaRPr lang="en-US" sz="1100" dirty="0"/>
+          </a:p>
+        </p:txBody>
+      </p:sp>
+      <p:sp>
+        <p:nvSpPr>
+          <p:cNvPr id="20" name="Shape 18"/>
+          <p:cNvSpPr/>
+          <p:nvPr/>
+        </p:nvSpPr>
+        <p:spPr>
+          <a:xfrm>
+            <a:off x="8156448" y="1783080"/>
+            <a:ext cx="3483864" cy="3337560"/>
+          </a:xfrm>
+          <a:prstGeom prst="rect">
+            <a:avLst/>
+          </a:prstGeom>
+          <a:solidFill>
+            <a:srgbClr val="FFFFFF"/>
+          </a:solidFill>
+          <a:ln w="12700">
+            <a:solidFill>
+              <a:srgbClr val="ECE0D2"/>
+            </a:solidFill>
+            <a:prstDash val="solid"/>
+          </a:ln>
+          <a:effectLst>
+            <a:outerShdw sx="100000" sy="100000" kx="0" ky="0" algn="bl" rotWithShape="0" blurRad="101600" dist="38100" dir="8100000">
+              <a:srgbClr val="000000">
+                <a:alpha val="12000"/>
+              </a:srgbClr>
+            </a:outerShdw>
+          </a:effectLst>
+        </p:spPr>
+      </p:sp>
+      <p:sp>
+        <p:nvSpPr>
+          <p:cNvPr id="21" name="Shape 19"/>
+          <p:cNvSpPr/>
+          <p:nvPr/>
+        </p:nvSpPr>
+        <p:spPr>
+          <a:xfrm>
+            <a:off x="8156448" y="1783080"/>
+            <a:ext cx="3483864" cy="548640"/>
           </a:xfrm>
           <a:prstGeom prst="rect">
             <a:avLst/>
@@ -5892,14 +6515,14 @@
       </p:sp>
       <p:sp>
         <p:nvSpPr>
-          <p:cNvPr id="12" name="Text 10"/>
-          <p:cNvSpPr/>
-          <p:nvPr/>
-        </p:nvSpPr>
-        <p:spPr>
-          <a:xfrm>
-            <a:off x="6190488" y="1874520"/>
-            <a:ext cx="5449824" cy="640080"/>
+          <p:cNvPr id="22" name="Text 20"/>
+          <p:cNvSpPr/>
+          <p:nvPr/>
+        </p:nvSpPr>
+        <p:spPr>
+          <a:xfrm>
+            <a:off x="8156448" y="1783080"/>
+            <a:ext cx="3483864" cy="548640"/>
           </a:xfrm>
           <a:prstGeom prst="rect">
             <a:avLst/>
@@ -5915,7 +6538,7 @@
               <a:buNone/>
             </a:pPr>
             <a:r>
-              <a:rPr lang="en-US" sz="1800" b="1" dirty="0">
+              <a:rPr lang="en-US" sz="1600" b="1" dirty="0">
                 <a:solidFill>
                   <a:srgbClr val="FFFFFF"/>
                 </a:solidFill>
@@ -5923,22 +6546,123 @@
                 <a:ea typeface="Malgun Gothic" pitchFamily="34" charset="-122"/>
                 <a:cs typeface="Malgun Gothic" pitchFamily="34" charset="-120"/>
               </a:rPr>
-              <a:t>🏪 PiStore 용(판매 신뢰)</a:t>
-            </a:r>
-            <a:endParaRPr lang="en-US" sz="1800" dirty="0"/>
-          </a:p>
-        </p:txBody>
-      </p:sp>
-      <p:sp>
-        <p:nvSpPr>
-          <p:cNvPr id="13" name="Text 11"/>
-          <p:cNvSpPr/>
-          <p:nvPr/>
-        </p:nvSpPr>
-        <p:spPr>
-          <a:xfrm>
-            <a:off x="6510528" y="2743200"/>
-            <a:ext cx="4846320" cy="2377440"/>
+              <a:t>Pi Host</a:t>
+            </a:r>
+            <a:endParaRPr lang="en-US" sz="1600" dirty="0"/>
+          </a:p>
+        </p:txBody>
+      </p:sp>
+      <p:sp>
+        <p:nvSpPr>
+          <p:cNvPr id="23" name="Text 21"/>
+          <p:cNvSpPr/>
+          <p:nvPr/>
+        </p:nvSpPr>
+        <p:spPr>
+          <a:xfrm>
+            <a:off x="8156448" y="2468880"/>
+            <a:ext cx="3483864" cy="548640"/>
+          </a:xfrm>
+          <a:prstGeom prst="rect">
+            <a:avLst/>
+          </a:prstGeom>
+          <a:noFill/>
+          <a:ln/>
+        </p:spPr>
+        <p:txBody>
+          <a:bodyPr wrap="square" lIns="0" tIns="0" rIns="0" bIns="0" rtlCol="0" anchor="ctr"/>
+          <a:lstStyle/>
+          <a:p>
+            <a:pPr algn="ctr" indent="0" marL="0">
+              <a:buNone/>
+            </a:pPr>
+            <a:r>
+              <a:rPr lang="en-US" sz="3000" b="1" dirty="0">
+                <a:solidFill>
+                  <a:srgbClr val="3B2A20"/>
+                </a:solidFill>
+                <a:latin typeface="Malgun Gothic" pitchFamily="34" charset="0"/>
+                <a:ea typeface="Malgun Gothic" pitchFamily="34" charset="-122"/>
+                <a:cs typeface="Malgun Gothic" pitchFamily="34" charset="-120"/>
+              </a:rPr>
+              <a:t>5 Pi</a:t>
+            </a:r>
+            <a:endParaRPr lang="en-US" sz="3000" dirty="0"/>
+          </a:p>
+        </p:txBody>
+      </p:sp>
+      <p:sp>
+        <p:nvSpPr>
+          <p:cNvPr id="24" name="Text 22"/>
+          <p:cNvSpPr/>
+          <p:nvPr/>
+        </p:nvSpPr>
+        <p:spPr>
+          <a:xfrm>
+            <a:off x="8339328" y="3044952"/>
+            <a:ext cx="3118104" cy="457200"/>
+          </a:xfrm>
+          <a:prstGeom prst="rect">
+            <a:avLst/>
+          </a:prstGeom>
+          <a:noFill/>
+          <a:ln/>
+        </p:spPr>
+        <p:txBody>
+          <a:bodyPr wrap="square" lIns="0" tIns="0" rIns="0" bIns="0" rtlCol="0" anchor="ctr"/>
+          <a:lstStyle/>
+          <a:p>
+            <a:pPr algn="ctr" indent="0" marL="0">
+              <a:lnSpc>
+                <a:spcPct val="100000"/>
+              </a:lnSpc>
+              <a:buNone/>
+            </a:pPr>
+            <a:r>
+              <a:rPr lang="en-US" sz="1150" dirty="0">
+                <a:solidFill>
+                  <a:srgbClr val="8A7A6D"/>
+                </a:solidFill>
+                <a:latin typeface="Malgun Gothic" pitchFamily="34" charset="0"/>
+                <a:ea typeface="Malgun Gothic" pitchFamily="34" charset="-122"/>
+                <a:cs typeface="Malgun Gothic" pitchFamily="34" charset="-120"/>
+              </a:rPr>
+              <a:t>월간 이용권</a:t>
+            </a:r>
+            <a:endParaRPr lang="en-US" sz="1150" dirty="0"/>
+          </a:p>
+          <a:p>
+            <a:pPr algn="ctr" indent="0" marL="0">
+              <a:lnSpc>
+                <a:spcPct val="100000"/>
+              </a:lnSpc>
+              <a:buNone/>
+            </a:pPr>
+            <a:r>
+              <a:rPr lang="en-US" sz="1150" dirty="0">
+                <a:solidFill>
+                  <a:srgbClr val="8A7A6D"/>
+                </a:solidFill>
+                <a:latin typeface="Malgun Gothic" pitchFamily="34" charset="0"/>
+                <a:ea typeface="Malgun Gothic" pitchFamily="34" charset="-122"/>
+                <a:cs typeface="Malgun Gothic" pitchFamily="34" charset="-120"/>
+              </a:rPr>
+              <a:t>연간 50 Pi (2개월 무료)</a:t>
+            </a:r>
+            <a:endParaRPr lang="en-US" sz="1150" dirty="0"/>
+          </a:p>
+        </p:txBody>
+      </p:sp>
+      <p:sp>
+        <p:nvSpPr>
+          <p:cNvPr id="25" name="Text 23"/>
+          <p:cNvSpPr/>
+          <p:nvPr/>
+        </p:nvSpPr>
+        <p:spPr>
+          <a:xfrm>
+            <a:off x="8522208" y="3657600"/>
+            <a:ext cx="2843784" cy="1371600"/>
           </a:xfrm>
           <a:prstGeom prst="rect">
             <a:avLst/>
@@ -5950,14 +6674,15 @@
           <a:bodyPr wrap="square" lIns="0" tIns="0" rIns="0" bIns="0" rtlCol="0" anchor="t"/>
           <a:lstStyle/>
           <a:p>
-            <a:pPr indent="0" marL="0">
-              <a:lnSpc>
-                <a:spcPct val="110000"/>
-              </a:lnSpc>
-              <a:buNone/>
-            </a:pPr>
-            <a:r>
-              <a:rPr lang="en-US" sz="1500" b="1" dirty="0">
+            <a:pPr marL="342900" indent="-342900">
+              <a:spcAft>
+                <a:spcPts val="600"/>
+              </a:spcAft>
+              <a:buSzPct val="100000"/>
+              <a:buChar char="•"/>
+            </a:pPr>
+            <a:r>
+              <a:rPr lang="en-US" sz="1250" dirty="0">
                 <a:solidFill>
                   <a:srgbClr val="2B2018"/>
                 </a:solidFill>
@@ -5965,78 +6690,78 @@
                 <a:ea typeface="Malgun Gothic" pitchFamily="34" charset="-122"/>
                 <a:cs typeface="Malgun Gothic" pitchFamily="34" charset="-120"/>
               </a:rPr>
-              <a:t>안전하게 파는 사람을 위한 보증
-</a:t>
-            </a:r>
-            <a:endParaRPr lang="en-US" sz="1500" dirty="0"/>
-          </a:p>
-          <a:p>
-            <a:pPr indent="0" marL="0">
-              <a:lnSpc>
-                <a:spcPct val="110000"/>
-              </a:lnSpc>
-              <a:buNone/>
-            </a:pPr>
-            <a:r>
-              <a:rPr lang="en-US" sz="1400" dirty="0">
-                <a:solidFill>
-                  <a:srgbClr val="8A7A6D"/>
-                </a:solidFill>
-                <a:latin typeface="Malgun Gothic" pitchFamily="34" charset="0"/>
-                <a:ea typeface="Malgun Gothic" pitchFamily="34" charset="-122"/>
-                <a:cs typeface="Malgun Gothic" pitchFamily="34" charset="-120"/>
-              </a:rPr>
-              <a:t>• 판매 보증금으로 신뢰 표시
-</a:t>
-            </a:r>
-            <a:endParaRPr lang="en-US" sz="1500" dirty="0"/>
-          </a:p>
-          <a:p>
-            <a:pPr indent="0" marL="0">
-              <a:lnSpc>
-                <a:spcPct val="110000"/>
-              </a:lnSpc>
-              <a:buNone/>
-            </a:pPr>
-            <a:r>
-              <a:rPr lang="en-US" sz="1400" dirty="0">
-                <a:solidFill>
-                  <a:srgbClr val="8A7A6D"/>
-                </a:solidFill>
-                <a:latin typeface="Malgun Gothic" pitchFamily="34" charset="0"/>
-                <a:ea typeface="Malgun Gothic" pitchFamily="34" charset="-122"/>
-                <a:cs typeface="Malgun Gothic" pitchFamily="34" charset="-120"/>
-              </a:rPr>
-              <a:t>• 손님이 안심하고 주문
-</a:t>
-            </a:r>
-            <a:endParaRPr lang="en-US" sz="1500" dirty="0"/>
-          </a:p>
-          <a:p>
-            <a:pPr indent="0" marL="0">
-              <a:lnSpc>
-                <a:spcPct val="110000"/>
-              </a:lnSpc>
-              <a:buNone/>
-            </a:pPr>
-            <a:r>
-              <a:rPr lang="en-US" sz="1400" dirty="0">
-                <a:solidFill>
-                  <a:srgbClr val="8A7A6D"/>
-                </a:solidFill>
-                <a:latin typeface="Malgun Gothic" pitchFamily="34" charset="0"/>
-                <a:ea typeface="Malgun Gothic" pitchFamily="34" charset="-122"/>
-                <a:cs typeface="Malgun Gothic" pitchFamily="34" charset="-120"/>
-              </a:rPr>
-              <a:t>• 약속을 어기면 보증금에서 차감</a:t>
-            </a:r>
-            <a:endParaRPr lang="en-US" sz="1500" dirty="0"/>
-          </a:p>
-        </p:txBody>
-      </p:sp>
-      <p:sp>
-        <p:nvSpPr>
-          <p:cNvPr id="14" name="Shape 12"/>
+              <a:t>무제한 그룹방</a:t>
+            </a:r>
+            <a:endParaRPr lang="en-US" sz="1250" dirty="0"/>
+          </a:p>
+          <a:p>
+            <a:pPr marL="342900" indent="-342900">
+              <a:spcAft>
+                <a:spcPts val="600"/>
+              </a:spcAft>
+              <a:buSzPct val="100000"/>
+              <a:buChar char="•"/>
+            </a:pPr>
+            <a:r>
+              <a:rPr lang="en-US" sz="1250" dirty="0">
+                <a:solidFill>
+                  <a:srgbClr val="2B2018"/>
+                </a:solidFill>
+                <a:latin typeface="Malgun Gothic" pitchFamily="34" charset="0"/>
+                <a:ea typeface="Malgun Gothic" pitchFamily="34" charset="-122"/>
+                <a:cs typeface="Malgun Gothic" pitchFamily="34" charset="-120"/>
+              </a:rPr>
+              <a:t>이벤트 방 개설</a:t>
+            </a:r>
+            <a:endParaRPr lang="en-US" sz="1250" dirty="0"/>
+          </a:p>
+          <a:p>
+            <a:pPr marL="342900" indent="-342900">
+              <a:spcAft>
+                <a:spcPts val="600"/>
+              </a:spcAft>
+              <a:buSzPct val="100000"/>
+              <a:buChar char="•"/>
+            </a:pPr>
+            <a:r>
+              <a:rPr lang="en-US" sz="1250" dirty="0">
+                <a:solidFill>
+                  <a:srgbClr val="2B2018"/>
+                </a:solidFill>
+                <a:latin typeface="Malgun Gothic" pitchFamily="34" charset="0"/>
+                <a:ea typeface="Malgun Gothic" pitchFamily="34" charset="-122"/>
+                <a:cs typeface="Malgun Gothic" pitchFamily="34" charset="-120"/>
+              </a:rPr>
+              <a:t>방문 분석 보기</a:t>
+            </a:r>
+            <a:endParaRPr lang="en-US" sz="1250" dirty="0"/>
+          </a:p>
+          <a:p>
+            <a:pPr marL="342900" indent="-342900">
+              <a:spcAft>
+                <a:spcPts val="600"/>
+              </a:spcAft>
+              <a:buSzPct val="100000"/>
+              <a:buChar char="•"/>
+            </a:pPr>
+            <a:r>
+              <a:rPr lang="en-US" sz="1250" dirty="0">
+                <a:solidFill>
+                  <a:srgbClr val="2B2018"/>
+                </a:solidFill>
+                <a:latin typeface="Malgun Gothic" pitchFamily="34" charset="0"/>
+                <a:ea typeface="Malgun Gothic" pitchFamily="34" charset="-122"/>
+                <a:cs typeface="Malgun Gothic" pitchFamily="34" charset="-120"/>
+              </a:rPr>
+              <a:t>자동 봇 연결</a:t>
+            </a:r>
+            <a:endParaRPr lang="en-US" sz="1250" dirty="0"/>
+          </a:p>
+        </p:txBody>
+      </p:sp>
+      <p:sp>
+        <p:nvSpPr>
+          <p:cNvPr id="26" name="Shape 24"/>
           <p:cNvSpPr/>
           <p:nvPr/>
         </p:nvSpPr>
@@ -6063,7 +6788,7 @@
       </p:sp>
       <p:sp>
         <p:nvSpPr>
-          <p:cNvPr id="15" name="Text 13"/>
+          <p:cNvPr id="27" name="Text 25"/>
           <p:cNvSpPr/>
           <p:nvPr/>
         </p:nvSpPr>
@@ -6108,7 +6833,7 @@
                 <a:ea typeface="Malgun Gothic" pitchFamily="34" charset="-122"/>
                 <a:cs typeface="Malgun Gothic" pitchFamily="34" charset="-120"/>
               </a:rPr>
-              <a:t>카페용 = 놀이공원 자유이용권, 가게용 = 장사하는 분의 "믿고 맡기는 보증금"이에요.</a:t>
+              <a:t>PiStore(판매)는 구독이 아니라 “판매 보증금 1 Pi” 예치예요 — 안전거래용, 약속 어기면 차감됩니다.</a:t>
             </a:r>
             <a:endParaRPr lang="en-US" sz="1400" dirty="0"/>
           </a:p>
@@ -6116,7 +6841,7 @@
       </p:sp>
       <p:sp>
         <p:nvSpPr>
-          <p:cNvPr id="16" name="Text 14"/>
+          <p:cNvPr id="28" name="Text 26"/>
           <p:cNvSpPr/>
           <p:nvPr/>
         </p:nvSpPr>
@@ -6169,7 +6894,7 @@
       </p:sp>
       <p:sp>
         <p:nvSpPr>
-          <p:cNvPr id="17" name="Text 15"/>
+          <p:cNvPr id="29" name="Text 27"/>
           <p:cNvSpPr/>
           <p:nvPr/>
         </p:nvSpPr>
@@ -6376,7 +7101,7 @@
                 <a:ea typeface="Malgun Gothic" pitchFamily="34" charset="-122"/>
                 <a:cs typeface="Malgun Gothic" pitchFamily="34" charset="-120"/>
               </a:rPr>
-              <a:t>가까운 카페를 찾아 들어가고, 다른 나라 사람과 대화해도 내 말로 자동 번역돼요.</a:t>
+              <a:t>전 세계 어디를 가도 카페엔 내 친구가 있고, 자동 통역이 되니 어느 나라 사람과도 두렵지 않아요.</a:t>
             </a:r>
             <a:endParaRPr lang="en-US" sz="1600" dirty="0"/>
           </a:p>
@@ -7207,7 +7932,7 @@
                 <a:ea typeface="Malgun Gothic" pitchFamily="34" charset="-122"/>
                 <a:cs typeface="Malgun Gothic" pitchFamily="34" charset="-120"/>
               </a:rPr>
-              <a:t>📦  중고장터 — 누구나 쉽게</a:t>
+              <a:t>📦  중고장터 — 안전한 P2P 거래</a:t>
             </a:r>
             <a:endParaRPr lang="en-US" sz="3200" dirty="0"/>
           </a:p>
@@ -7246,7 +7971,7 @@
                 <a:ea typeface="Malgun Gothic" pitchFamily="34" charset="-122"/>
                 <a:cs typeface="Malgun Gothic" pitchFamily="34" charset="-120"/>
               </a:rPr>
-              <a:t>가게가 없어도 괜찮아요. 사진 한 장이면 가까운 사람과 바로 사고팔 수 있어요.</a:t>
+              <a:t>에스크로(안전 보관) 서비스로 결제가 보호돼요. 가게가 없어도 누구나 가까운 사람과 안심 거래!</a:t>
             </a:r>
             <a:endParaRPr lang="en-US" sz="1600" dirty="0"/>
           </a:p>
@@ -7848,7 +8573,7 @@
                 <a:ea typeface="Malgun Gothic" pitchFamily="34" charset="-122"/>
                 <a:cs typeface="Malgun Gothic" pitchFamily="34" charset="-120"/>
               </a:rPr>
-              <a:t>"가게 없는 사장님"도 OK. 동네 중고거래를 전 세계로 넓힌 셈이에요.</a:t>
+              <a:t>에스크로 = 플랫폼이 결제한 Pi를 잠시 안전하게 맡아두는 금고. 거래가 끝나야 판매자에게 전달돼요.</a:t>
             </a:r>
             <a:endParaRPr lang="en-US" sz="1400" dirty="0"/>
           </a:p>
@@ -8077,7 +8802,7 @@
                 <a:ea typeface="Malgun Gothic" pitchFamily="34" charset="-122"/>
                 <a:cs typeface="Malgun Gothic" pitchFamily="34" charset="-120"/>
               </a:rPr>
-              <a:t>🏪  내 가게(PiStore) 만들기 — O2O</a:t>
+              <a:t>🏪  내 O2O 매장, 10분 만에!</a:t>
             </a:r>
             <a:endParaRPr lang="en-US" sz="3200" dirty="0"/>
           </a:p>
@@ -8116,7 +8841,7 @@
                 <a:ea typeface="Malgun Gothic" pitchFamily="34" charset="-122"/>
                 <a:cs typeface="Malgun Gothic" pitchFamily="34" charset="-120"/>
               </a:rPr>
-              <a:t>지도에 내 가게를 등록하고 메뉴를 올리면, 손님 주문이 알림으로 와요.</a:t>
+              <a:t>싸이렌오더(스타벅스) 부럽지 않은 내 매장 — 등록·메뉴·주문·픽업까지 따라만 하면 10분이면 끝.</a:t>
             </a:r>
             <a:endParaRPr lang="en-US" sz="1600" dirty="0"/>
           </a:p>
@@ -9094,7 +9819,7 @@
                 <a:ea typeface="Malgun Gothic" pitchFamily="34" charset="-122"/>
                 <a:cs typeface="Malgun Gothic" pitchFamily="34" charset="-120"/>
               </a:rPr>
-              <a:t>당근마켓보다 막강하고, 스타벅스보다 유연한 O2O</a:t>
+              <a:t>막강한 글로벌 “당근”  ·  업종을 가리지 않는 유연한 “싸이렌오더”</a:t>
             </a:r>
             <a:endParaRPr lang="en-US" sz="1600" dirty="0"/>
           </a:p>
@@ -9185,7 +9910,7 @@
                 <a:ea typeface="Malgun Gothic" pitchFamily="34" charset="-122"/>
                 <a:cs typeface="Malgun Gothic" pitchFamily="34" charset="-120"/>
               </a:rPr>
-              <a:t>🥕 당근마켓보다 막강</a:t>
+              <a:t>🥕 막강한 글로벌 “당근”</a:t>
             </a:r>
             <a:endParaRPr lang="en-US" sz="1800" dirty="0"/>
           </a:p>
@@ -9402,7 +10127,7 @@
                 <a:ea typeface="Malgun Gothic" pitchFamily="34" charset="-122"/>
                 <a:cs typeface="Malgun Gothic" pitchFamily="34" charset="-120"/>
               </a:rPr>
-              <a:t>☕ 스타벅스보다 유연</a:t>
+              <a:t>☕ 유연한 “싸이렌오더”</a:t>
             </a:r>
             <a:endParaRPr lang="en-US" sz="1800" dirty="0"/>
           </a:p>
@@ -9444,7 +10169,7 @@
                 <a:ea typeface="Malgun Gothic" pitchFamily="34" charset="-122"/>
                 <a:cs typeface="Malgun Gothic" pitchFamily="34" charset="-120"/>
               </a:rPr>
-              <a:t>누구나 사장님이 될 수 있어요
+              <a:t>업종 안 가리고 누구나 사장님
 </a:t>
             </a:r>
             <a:endParaRPr lang="en-US" sz="1500" dirty="0"/>

--- a/docs/Cafe.pi_쉬운_사용자매뉴얼.pptx
+++ b/docs/Cafe.pi_쉬운_사용자매뉴얼.pptx
@@ -3048,7 +3048,7 @@
                 <a:ea typeface="Malgun Gothic" pitchFamily="34" charset="-122"/>
                 <a:cs typeface="Malgun Gothic" pitchFamily="34" charset="-120"/>
               </a:rPr>
-              <a:t>카페용·가게용 이용권 구분</a:t>
+              <a:t>카페용·매장용 이용권 구분</a:t>
             </a:r>
             <a:endParaRPr lang="en-US" sz="1700" dirty="0"/>
           </a:p>
@@ -3628,7 +3628,7 @@
                 <a:ea typeface="Malgun Gothic" pitchFamily="34" charset="-122"/>
                 <a:cs typeface="Malgun Gothic" pitchFamily="34" charset="-120"/>
               </a:rPr>
-              <a:t>당근·스타벅스보다 강한 점</a:t>
+              <a:t>당근·싸이렌오더보다 강한 점</a:t>
             </a:r>
             <a:endParaRPr lang="en-US" sz="1700" dirty="0"/>
           </a:p>
@@ -3833,7 +3833,7 @@
         <p:spPr>
           <a:xfrm>
             <a:off x="1645920" y="502920"/>
-            <a:ext cx="10058400" cy="640080"/>
+            <a:ext cx="10241280" cy="640080"/>
           </a:xfrm>
           <a:prstGeom prst="rect">
             <a:avLst/>
@@ -3872,7 +3872,7 @@
         <p:spPr>
           <a:xfrm>
             <a:off x="1664208" y="1143000"/>
-            <a:ext cx="10058400" cy="411480"/>
+            <a:ext cx="10241280" cy="411480"/>
           </a:xfrm>
           <a:prstGeom prst="rect">
             <a:avLst/>
@@ -4257,9 +4257,6 @@
           <a:lstStyle/>
           <a:p>
             <a:pPr algn="ctr" indent="0" marL="0">
-              <a:lnSpc>
-                <a:spcPct val="100000"/>
-              </a:lnSpc>
               <a:buNone/>
             </a:pPr>
             <a:r>
@@ -4277,9 +4274,6 @@
           </a:p>
           <a:p>
             <a:pPr algn="ctr" indent="0" marL="0">
-              <a:lnSpc>
-                <a:spcPct val="100000"/>
-              </a:lnSpc>
               <a:buNone/>
             </a:pPr>
             <a:r>
@@ -4672,7 +4666,7 @@
               <a:buNone/>
             </a:pPr>
             <a:r>
-              <a:rPr lang="en-US" sz="1400" b="1" dirty="0">
+              <a:rPr lang="en-US" sz="1350" b="1" dirty="0">
                 <a:solidFill>
                   <a:srgbClr val="B9740A"/>
                 </a:solidFill>
@@ -4686,7 +4680,7 @@
               <a:buNone/>
             </a:pPr>
             <a:r>
-              <a:rPr lang="en-US" sz="1400" dirty="0">
+              <a:rPr lang="en-US" sz="1350" dirty="0">
                 <a:solidFill>
                   <a:srgbClr val="2B2018"/>
                 </a:solidFill>
@@ -4696,7 +4690,7 @@
               </a:rPr>
               <a:t>Pi 브라우저는 보안상 정보를 저장 못 해서, 6자리 코드(또는 링크)로 두 브라우저를 안전하게 이어줘요.</a:t>
             </a:r>
-            <a:endParaRPr lang="en-US" sz="1400" dirty="0"/>
+            <a:endParaRPr lang="en-US" sz="1350" dirty="0"/>
           </a:p>
         </p:txBody>
       </p:sp>
@@ -4899,7 +4893,7 @@
         <p:spPr>
           <a:xfrm>
             <a:off x="1645920" y="502920"/>
-            <a:ext cx="10058400" cy="640080"/>
+            <a:ext cx="10241280" cy="640080"/>
           </a:xfrm>
           <a:prstGeom prst="rect">
             <a:avLst/>
@@ -4938,7 +4932,7 @@
         <p:spPr>
           <a:xfrm>
             <a:off x="1664208" y="1143000"/>
-            <a:ext cx="10058400" cy="411480"/>
+            <a:ext cx="10241280" cy="411480"/>
           </a:xfrm>
           <a:prstGeom prst="rect">
             <a:avLst/>
@@ -5289,7 +5283,7 @@
                 <a:ea typeface="Malgun Gothic" pitchFamily="34" charset="-122"/>
                 <a:cs typeface="Malgun Gothic" pitchFamily="34" charset="-120"/>
               </a:rPr>
-              <a:t>Bean 충전(결제)하기
+              <a:t>Bean 충전(적립)하기
 </a:t>
             </a:r>
             <a:endParaRPr lang="en-US" sz="1700" dirty="0"/>
@@ -5542,7 +5536,7 @@
               <a:buNone/>
             </a:pPr>
             <a:r>
-              <a:rPr lang="en-US" sz="1400" b="1" dirty="0">
+              <a:rPr lang="en-US" sz="1350" b="1" dirty="0">
                 <a:solidFill>
                   <a:srgbClr val="B9740A"/>
                 </a:solidFill>
@@ -5556,7 +5550,7 @@
               <a:buNone/>
             </a:pPr>
             <a:r>
-              <a:rPr lang="en-US" sz="1400" dirty="0">
+              <a:rPr lang="en-US" sz="1350" dirty="0">
                 <a:solidFill>
                   <a:srgbClr val="2B2018"/>
                 </a:solidFill>
@@ -5566,7 +5560,7 @@
               </a:rPr>
               <a:t>커피 한 잔 대접하듯, 앱 안에서 "커피빈(Bean)"으로 따뜻한 마음을 건네는 거예요. ☕</a:t>
             </a:r>
-            <a:endParaRPr lang="en-US" sz="1400" dirty="0"/>
+            <a:endParaRPr lang="en-US" sz="1350" dirty="0"/>
           </a:p>
         </p:txBody>
       </p:sp>
@@ -5769,7 +5763,7 @@
         <p:spPr>
           <a:xfrm>
             <a:off x="1645920" y="502920"/>
-            <a:ext cx="10058400" cy="640080"/>
+            <a:ext cx="10241280" cy="640080"/>
           </a:xfrm>
           <a:prstGeom prst="rect">
             <a:avLst/>
@@ -5793,7 +5787,7 @@
                 <a:ea typeface="Malgun Gothic" pitchFamily="34" charset="-122"/>
                 <a:cs typeface="Malgun Gothic" pitchFamily="34" charset="-120"/>
               </a:rPr>
-              <a:t>🎫  PiCafe 구독(이용권) 요금제</a:t>
+              <a:t>🎫  구독(이용권) 요금제 — 카페 &amp; 매장</a:t>
             </a:r>
             <a:endParaRPr lang="en-US" sz="3200" dirty="0"/>
           </a:p>
@@ -5808,7 +5802,7 @@
         <p:spPr>
           <a:xfrm>
             <a:off x="1664208" y="1143000"/>
-            <a:ext cx="10058400" cy="411480"/>
+            <a:ext cx="10241280" cy="411480"/>
           </a:xfrm>
           <a:prstGeom prst="rect">
             <a:avLst/>
@@ -5832,7 +5826,7 @@
                 <a:ea typeface="Malgun Gothic" pitchFamily="34" charset="-122"/>
                 <a:cs typeface="Malgun Gothic" pitchFamily="34" charset="-120"/>
               </a:rPr>
-              <a:t>카페를 더 넓게 쓰는 이용권. 무료부터 시작하고, 필요하면 올리세요.</a:t>
+              <a:t>필요한 만큼 기능을 넓히는 이용권. 무료로 시작하세요.</a:t>
             </a:r>
             <a:endParaRPr lang="en-US" sz="1600" dirty="0"/>
           </a:p>
@@ -5846,8 +5840,8 @@
         </p:nvSpPr>
         <p:spPr>
           <a:xfrm>
-            <a:off x="548640" y="1783080"/>
-            <a:ext cx="3483864" cy="3337560"/>
+            <a:off x="411480" y="1783080"/>
+            <a:ext cx="2660904" cy="2971800"/>
           </a:xfrm>
           <a:prstGeom prst="rect">
             <a:avLst/>
@@ -5878,8 +5872,8 @@
         </p:nvSpPr>
         <p:spPr>
           <a:xfrm>
-            <a:off x="548640" y="1783080"/>
-            <a:ext cx="3483864" cy="548640"/>
+            <a:off x="411480" y="1783080"/>
+            <a:ext cx="2660904" cy="530352"/>
           </a:xfrm>
           <a:prstGeom prst="rect">
             <a:avLst/>
@@ -5898,8 +5892,8 @@
         </p:nvSpPr>
         <p:spPr>
           <a:xfrm>
-            <a:off x="548640" y="1783080"/>
-            <a:ext cx="3483864" cy="548640"/>
+            <a:off x="457200" y="1783080"/>
+            <a:ext cx="2569464" cy="530352"/>
           </a:xfrm>
           <a:prstGeom prst="rect">
             <a:avLst/>
@@ -5915,7 +5909,7 @@
               <a:buNone/>
             </a:pPr>
             <a:r>
-              <a:rPr lang="en-US" sz="1600" b="1" dirty="0">
+              <a:rPr lang="en-US" sz="1400" b="1" dirty="0">
                 <a:solidFill>
                   <a:srgbClr val="FFFFFF"/>
                 </a:solidFill>
@@ -5925,7 +5919,7 @@
               </a:rPr>
               <a:t>Pi Explorer</a:t>
             </a:r>
-            <a:endParaRPr lang="en-US" sz="1600" dirty="0"/>
+            <a:endParaRPr lang="en-US" sz="1400" dirty="0"/>
           </a:p>
         </p:txBody>
       </p:sp>
@@ -5937,8 +5931,8 @@
         </p:nvSpPr>
         <p:spPr>
           <a:xfrm>
-            <a:off x="548640" y="2468880"/>
-            <a:ext cx="3483864" cy="548640"/>
+            <a:off x="411480" y="2441448"/>
+            <a:ext cx="2660904" cy="502920"/>
           </a:xfrm>
           <a:prstGeom prst="rect">
             <a:avLst/>
@@ -5954,7 +5948,7 @@
               <a:buNone/>
             </a:pPr>
             <a:r>
-              <a:rPr lang="en-US" sz="3000" b="1" dirty="0">
+              <a:rPr lang="en-US" sz="2500" b="1" dirty="0">
                 <a:solidFill>
                   <a:srgbClr val="3B2A20"/>
                 </a:solidFill>
@@ -5964,7 +5958,7 @@
               </a:rPr>
               <a:t>무료</a:t>
             </a:r>
-            <a:endParaRPr lang="en-US" sz="3000" dirty="0"/>
+            <a:endParaRPr lang="en-US" sz="2500" dirty="0"/>
           </a:p>
         </p:txBody>
       </p:sp>
@@ -5976,8 +5970,8 @@
         </p:nvSpPr>
         <p:spPr>
           <a:xfrm>
-            <a:off x="731520" y="3044952"/>
-            <a:ext cx="3118104" cy="457200"/>
+            <a:off x="521208" y="2971800"/>
+            <a:ext cx="2441448" cy="420624"/>
           </a:xfrm>
           <a:prstGeom prst="rect">
             <a:avLst/>
@@ -5996,7 +5990,7 @@
               <a:buNone/>
             </a:pPr>
             <a:r>
-              <a:rPr lang="en-US" sz="1150" dirty="0">
+              <a:rPr lang="en-US" sz="1050" dirty="0">
                 <a:solidFill>
                   <a:srgbClr val="8A7A6D"/>
                 </a:solidFill>
@@ -6004,9 +5998,9 @@
                 <a:ea typeface="Malgun Gothic" pitchFamily="34" charset="-122"/>
                 <a:cs typeface="Malgun Gothic" pitchFamily="34" charset="-120"/>
               </a:rPr>
-              <a:t>0 Pi · 평생 무료</a:t>
-            </a:r>
-            <a:endParaRPr lang="en-US" sz="1150" dirty="0"/>
+              <a:t>평생 무료</a:t>
+            </a:r>
+            <a:endParaRPr lang="en-US" sz="1050" dirty="0"/>
           </a:p>
         </p:txBody>
       </p:sp>
@@ -6018,8 +6012,8 @@
         </p:nvSpPr>
         <p:spPr>
           <a:xfrm>
-            <a:off x="914400" y="3657600"/>
-            <a:ext cx="2843784" cy="1371600"/>
+            <a:off x="704088" y="3465576"/>
+            <a:ext cx="2203704" cy="1188720"/>
           </a:xfrm>
           <a:prstGeom prst="rect">
             <a:avLst/>
@@ -6033,13 +6027,13 @@
           <a:p>
             <a:pPr marL="342900" indent="-342900">
               <a:spcAft>
-                <a:spcPts val="600"/>
+                <a:spcPts val="500"/>
               </a:spcAft>
               <a:buSzPct val="100000"/>
               <a:buChar char="•"/>
             </a:pPr>
             <a:r>
-              <a:rPr lang="en-US" sz="1250" dirty="0">
+              <a:rPr lang="en-US" sz="1100" dirty="0">
                 <a:solidFill>
                   <a:srgbClr val="2B2018"/>
                 </a:solidFill>
@@ -6049,18 +6043,18 @@
               </a:rPr>
               <a:t>기본 테마 6개</a:t>
             </a:r>
-            <a:endParaRPr lang="en-US" sz="1250" dirty="0"/>
+            <a:endParaRPr lang="en-US" sz="1100" dirty="0"/>
           </a:p>
           <a:p>
             <a:pPr marL="342900" indent="-342900">
               <a:spcAft>
-                <a:spcPts val="600"/>
+                <a:spcPts val="500"/>
               </a:spcAft>
               <a:buSzPct val="100000"/>
               <a:buChar char="•"/>
             </a:pPr>
             <a:r>
-              <a:rPr lang="en-US" sz="1250" dirty="0">
+              <a:rPr lang="en-US" sz="1100" dirty="0">
                 <a:solidFill>
                   <a:srgbClr val="2B2018"/>
                 </a:solidFill>
@@ -6068,20 +6062,20 @@
                 <a:ea typeface="Malgun Gothic" pitchFamily="34" charset="-122"/>
                 <a:cs typeface="Malgun Gothic" pitchFamily="34" charset="-120"/>
               </a:rPr>
-              <a:t>1:1 채팅 무제한</a:t>
-            </a:r>
-            <a:endParaRPr lang="en-US" sz="1250" dirty="0"/>
+              <a:t>1:1 채팅</a:t>
+            </a:r>
+            <a:endParaRPr lang="en-US" sz="1100" dirty="0"/>
           </a:p>
           <a:p>
             <a:pPr marL="342900" indent="-342900">
               <a:spcAft>
-                <a:spcPts val="600"/>
+                <a:spcPts val="500"/>
               </a:spcAft>
               <a:buSzPct val="100000"/>
               <a:buChar char="•"/>
             </a:pPr>
             <a:r>
-              <a:rPr lang="en-US" sz="1250" dirty="0">
+              <a:rPr lang="en-US" sz="1100" dirty="0">
                 <a:solidFill>
                   <a:srgbClr val="2B2018"/>
                 </a:solidFill>
@@ -6089,9 +6083,9 @@
                 <a:ea typeface="Malgun Gothic" pitchFamily="34" charset="-122"/>
                 <a:cs typeface="Malgun Gothic" pitchFamily="34" charset="-120"/>
               </a:rPr>
-              <a:t>커피빈 받기</a:t>
-            </a:r>
-            <a:endParaRPr lang="en-US" sz="1250" dirty="0"/>
+              <a:t>Bean 받기</a:t>
+            </a:r>
+            <a:endParaRPr lang="en-US" sz="1100" dirty="0"/>
           </a:p>
         </p:txBody>
       </p:sp>
@@ -6103,8 +6097,8 @@
         </p:nvSpPr>
         <p:spPr>
           <a:xfrm>
-            <a:off x="4352544" y="1783080"/>
-            <a:ext cx="3483864" cy="3337560"/>
+            <a:off x="3300984" y="1783080"/>
+            <a:ext cx="2660904" cy="2971800"/>
           </a:xfrm>
           <a:prstGeom prst="rect">
             <a:avLst/>
@@ -6135,8 +6129,8 @@
         </p:nvSpPr>
         <p:spPr>
           <a:xfrm>
-            <a:off x="4352544" y="1783080"/>
-            <a:ext cx="3483864" cy="548640"/>
+            <a:off x="3300984" y="1783080"/>
+            <a:ext cx="2660904" cy="530352"/>
           </a:xfrm>
           <a:prstGeom prst="rect">
             <a:avLst/>
@@ -6155,8 +6149,8 @@
         </p:nvSpPr>
         <p:spPr>
           <a:xfrm>
-            <a:off x="4352544" y="1783080"/>
-            <a:ext cx="3483864" cy="548640"/>
+            <a:off x="3346704" y="1783080"/>
+            <a:ext cx="2569464" cy="530352"/>
           </a:xfrm>
           <a:prstGeom prst="rect">
             <a:avLst/>
@@ -6172,7 +6166,7 @@
               <a:buNone/>
             </a:pPr>
             <a:r>
-              <a:rPr lang="en-US" sz="1600" b="1" dirty="0">
+              <a:rPr lang="en-US" sz="1400" b="1" dirty="0">
                 <a:solidFill>
                   <a:srgbClr val="FFFFFF"/>
                 </a:solidFill>
@@ -6182,7 +6176,7 @@
               </a:rPr>
               <a:t>Pi Creator</a:t>
             </a:r>
-            <a:endParaRPr lang="en-US" sz="1600" dirty="0"/>
+            <a:endParaRPr lang="en-US" sz="1400" dirty="0"/>
           </a:p>
         </p:txBody>
       </p:sp>
@@ -6194,8 +6188,8 @@
         </p:nvSpPr>
         <p:spPr>
           <a:xfrm>
-            <a:off x="4352544" y="2468880"/>
-            <a:ext cx="3483864" cy="548640"/>
+            <a:off x="3300984" y="2441448"/>
+            <a:ext cx="2660904" cy="502920"/>
           </a:xfrm>
           <a:prstGeom prst="rect">
             <a:avLst/>
@@ -6211,7 +6205,7 @@
               <a:buNone/>
             </a:pPr>
             <a:r>
-              <a:rPr lang="en-US" sz="3000" b="1" dirty="0">
+              <a:rPr lang="en-US" sz="2500" b="1" dirty="0">
                 <a:solidFill>
                   <a:srgbClr val="3B2A20"/>
                 </a:solidFill>
@@ -6221,7 +6215,7 @@
               </a:rPr>
               <a:t>1 Pi</a:t>
             </a:r>
-            <a:endParaRPr lang="en-US" sz="3000" dirty="0"/>
+            <a:endParaRPr lang="en-US" sz="2500" dirty="0"/>
           </a:p>
         </p:txBody>
       </p:sp>
@@ -6233,8 +6227,8 @@
         </p:nvSpPr>
         <p:spPr>
           <a:xfrm>
-            <a:off x="4535424" y="3044952"/>
-            <a:ext cx="3118104" cy="457200"/>
+            <a:off x="3410712" y="2971800"/>
+            <a:ext cx="2441448" cy="420624"/>
           </a:xfrm>
           <a:prstGeom prst="rect">
             <a:avLst/>
@@ -6253,7 +6247,7 @@
               <a:buNone/>
             </a:pPr>
             <a:r>
-              <a:rPr lang="en-US" sz="1150" dirty="0">
+              <a:rPr lang="en-US" sz="1050" dirty="0">
                 <a:solidFill>
                   <a:srgbClr val="8A7A6D"/>
                 </a:solidFill>
@@ -6261,29 +6255,9 @@
                 <a:ea typeface="Malgun Gothic" pitchFamily="34" charset="-122"/>
                 <a:cs typeface="Malgun Gothic" pitchFamily="34" charset="-120"/>
               </a:rPr>
-              <a:t>월간 이용권</a:t>
-            </a:r>
-            <a:endParaRPr lang="en-US" sz="1150" dirty="0"/>
-          </a:p>
-          <a:p>
-            <a:pPr algn="ctr" indent="0" marL="0">
-              <a:lnSpc>
-                <a:spcPct val="100000"/>
-              </a:lnSpc>
-              <a:buNone/>
-            </a:pPr>
-            <a:r>
-              <a:rPr lang="en-US" sz="1150" dirty="0">
-                <a:solidFill>
-                  <a:srgbClr val="8A7A6D"/>
-                </a:solidFill>
-                <a:latin typeface="Malgun Gothic" pitchFamily="34" charset="0"/>
-                <a:ea typeface="Malgun Gothic" pitchFamily="34" charset="-122"/>
-                <a:cs typeface="Malgun Gothic" pitchFamily="34" charset="-120"/>
-              </a:rPr>
-              <a:t>연간 10 Pi (2개월 무료)</a:t>
-            </a:r>
-            <a:endParaRPr lang="en-US" sz="1150" dirty="0"/>
+              <a:t>월간 · 연 10 Pi</a:t>
+            </a:r>
+            <a:endParaRPr lang="en-US" sz="1050" dirty="0"/>
           </a:p>
         </p:txBody>
       </p:sp>
@@ -6295,8 +6269,8 @@
         </p:nvSpPr>
         <p:spPr>
           <a:xfrm>
-            <a:off x="4718304" y="3657600"/>
-            <a:ext cx="2843784" cy="1371600"/>
+            <a:off x="3593592" y="3465576"/>
+            <a:ext cx="2203704" cy="1188720"/>
           </a:xfrm>
           <a:prstGeom prst="rect">
             <a:avLst/>
@@ -6310,13 +6284,13 @@
           <a:p>
             <a:pPr marL="342900" indent="-342900">
               <a:spcAft>
-                <a:spcPts val="600"/>
+                <a:spcPts val="500"/>
               </a:spcAft>
               <a:buSzPct val="100000"/>
               <a:buChar char="•"/>
             </a:pPr>
             <a:r>
-              <a:rPr lang="en-US" sz="1250" dirty="0">
+              <a:rPr lang="en-US" sz="1100" dirty="0">
                 <a:solidFill>
                   <a:srgbClr val="2B2018"/>
                 </a:solidFill>
@@ -6324,20 +6298,20 @@
                 <a:ea typeface="Malgun Gothic" pitchFamily="34" charset="-122"/>
                 <a:cs typeface="Malgun Gothic" pitchFamily="34" charset="-120"/>
               </a:rPr>
-              <a:t>전체 테마 사용</a:t>
-            </a:r>
-            <a:endParaRPr lang="en-US" sz="1250" dirty="0"/>
+              <a:t>전체 테마</a:t>
+            </a:r>
+            <a:endParaRPr lang="en-US" sz="1100" dirty="0"/>
           </a:p>
           <a:p>
             <a:pPr marL="342900" indent="-342900">
               <a:spcAft>
-                <a:spcPts val="600"/>
+                <a:spcPts val="500"/>
               </a:spcAft>
               <a:buSzPct val="100000"/>
               <a:buChar char="•"/>
             </a:pPr>
             <a:r>
-              <a:rPr lang="en-US" sz="1250" dirty="0">
+              <a:rPr lang="en-US" sz="1100" dirty="0">
                 <a:solidFill>
                   <a:srgbClr val="2B2018"/>
                 </a:solidFill>
@@ -6347,18 +6321,18 @@
               </a:rPr>
               <a:t>그룹방 월 3개</a:t>
             </a:r>
-            <a:endParaRPr lang="en-US" sz="1250" dirty="0"/>
+            <a:endParaRPr lang="en-US" sz="1100" dirty="0"/>
           </a:p>
           <a:p>
             <a:pPr marL="342900" indent="-342900">
               <a:spcAft>
-                <a:spcPts val="600"/>
+                <a:spcPts val="500"/>
               </a:spcAft>
               <a:buSzPct val="100000"/>
               <a:buChar char="•"/>
             </a:pPr>
             <a:r>
-              <a:rPr lang="en-US" sz="1250" dirty="0">
+              <a:rPr lang="en-US" sz="1100" dirty="0">
                 <a:solidFill>
                   <a:srgbClr val="2B2018"/>
                 </a:solidFill>
@@ -6368,28 +6342,7 @@
               </a:rPr>
               <a:t>AI 비서 월 10회</a:t>
             </a:r>
-            <a:endParaRPr lang="en-US" sz="1250" dirty="0"/>
-          </a:p>
-          <a:p>
-            <a:pPr marL="342900" indent="-342900">
-              <a:spcAft>
-                <a:spcPts val="600"/>
-              </a:spcAft>
-              <a:buSzPct val="100000"/>
-              <a:buChar char="•"/>
-            </a:pPr>
-            <a:r>
-              <a:rPr lang="en-US" sz="1250" dirty="0">
-                <a:solidFill>
-                  <a:srgbClr val="2B2018"/>
-                </a:solidFill>
-                <a:latin typeface="Malgun Gothic" pitchFamily="34" charset="0"/>
-                <a:ea typeface="Malgun Gothic" pitchFamily="34" charset="-122"/>
-                <a:cs typeface="Malgun Gothic" pitchFamily="34" charset="-120"/>
-              </a:rPr>
-              <a:t>커피빈 보내기</a:t>
-            </a:r>
-            <a:endParaRPr lang="en-US" sz="1250" dirty="0"/>
+            <a:endParaRPr lang="en-US" sz="1100" dirty="0"/>
           </a:p>
         </p:txBody>
       </p:sp>
@@ -6401,12 +6354,12 @@
         </p:nvSpPr>
         <p:spPr>
           <a:xfrm>
-            <a:off x="6601968" y="1618488"/>
-            <a:ext cx="1097280" cy="384048"/>
+            <a:off x="5001768" y="1636776"/>
+            <a:ext cx="868680" cy="347472"/>
           </a:xfrm>
           <a:prstGeom prst="roundRect">
             <a:avLst>
-              <a:gd name="adj" fmla="val 19048"/>
+              <a:gd name="adj" fmla="val 21053"/>
             </a:avLst>
           </a:prstGeom>
           <a:solidFill>
@@ -6430,8 +6383,8 @@
         </p:nvSpPr>
         <p:spPr>
           <a:xfrm>
-            <a:off x="6601968" y="1618488"/>
-            <a:ext cx="1097280" cy="384048"/>
+            <a:off x="5001768" y="1636776"/>
+            <a:ext cx="868680" cy="347472"/>
           </a:xfrm>
           <a:prstGeom prst="rect">
             <a:avLst/>
@@ -6447,7 +6400,7 @@
               <a:buNone/>
             </a:pPr>
             <a:r>
-              <a:rPr lang="en-US" sz="1100" b="1" dirty="0">
+              <a:rPr lang="en-US" sz="1000" b="1" dirty="0">
                 <a:solidFill>
                   <a:srgbClr val="FFFFFF"/>
                 </a:solidFill>
@@ -6457,7 +6410,7 @@
               </a:rPr>
               <a:t>⭐ 인기</a:t>
             </a:r>
-            <a:endParaRPr lang="en-US" sz="1100" dirty="0"/>
+            <a:endParaRPr lang="en-US" sz="1000" dirty="0"/>
           </a:p>
         </p:txBody>
       </p:sp>
@@ -6469,8 +6422,8 @@
         </p:nvSpPr>
         <p:spPr>
           <a:xfrm>
-            <a:off x="8156448" y="1783080"/>
-            <a:ext cx="3483864" cy="3337560"/>
+            <a:off x="6190488" y="1783080"/>
+            <a:ext cx="2660904" cy="2971800"/>
           </a:xfrm>
           <a:prstGeom prst="rect">
             <a:avLst/>
@@ -6501,8 +6454,8 @@
         </p:nvSpPr>
         <p:spPr>
           <a:xfrm>
-            <a:off x="8156448" y="1783080"/>
-            <a:ext cx="3483864" cy="548640"/>
+            <a:off x="6190488" y="1783080"/>
+            <a:ext cx="2660904" cy="530352"/>
           </a:xfrm>
           <a:prstGeom prst="rect">
             <a:avLst/>
@@ -6521,8 +6474,8 @@
         </p:nvSpPr>
         <p:spPr>
           <a:xfrm>
-            <a:off x="8156448" y="1783080"/>
-            <a:ext cx="3483864" cy="548640"/>
+            <a:off x="6236208" y="1783080"/>
+            <a:ext cx="2569464" cy="530352"/>
           </a:xfrm>
           <a:prstGeom prst="rect">
             <a:avLst/>
@@ -6538,7 +6491,7 @@
               <a:buNone/>
             </a:pPr>
             <a:r>
-              <a:rPr lang="en-US" sz="1600" b="1" dirty="0">
+              <a:rPr lang="en-US" sz="1400" b="1" dirty="0">
                 <a:solidFill>
                   <a:srgbClr val="FFFFFF"/>
                 </a:solidFill>
@@ -6548,7 +6501,7 @@
               </a:rPr>
               <a:t>Pi Host</a:t>
             </a:r>
-            <a:endParaRPr lang="en-US" sz="1600" dirty="0"/>
+            <a:endParaRPr lang="en-US" sz="1400" dirty="0"/>
           </a:p>
         </p:txBody>
       </p:sp>
@@ -6560,8 +6513,8 @@
         </p:nvSpPr>
         <p:spPr>
           <a:xfrm>
-            <a:off x="8156448" y="2468880"/>
-            <a:ext cx="3483864" cy="548640"/>
+            <a:off x="6190488" y="2441448"/>
+            <a:ext cx="2660904" cy="502920"/>
           </a:xfrm>
           <a:prstGeom prst="rect">
             <a:avLst/>
@@ -6577,7 +6530,7 @@
               <a:buNone/>
             </a:pPr>
             <a:r>
-              <a:rPr lang="en-US" sz="3000" b="1" dirty="0">
+              <a:rPr lang="en-US" sz="2500" b="1" dirty="0">
                 <a:solidFill>
                   <a:srgbClr val="3B2A20"/>
                 </a:solidFill>
@@ -6587,7 +6540,7 @@
               </a:rPr>
               <a:t>5 Pi</a:t>
             </a:r>
-            <a:endParaRPr lang="en-US" sz="3000" dirty="0"/>
+            <a:endParaRPr lang="en-US" sz="2500" dirty="0"/>
           </a:p>
         </p:txBody>
       </p:sp>
@@ -6599,8 +6552,8 @@
         </p:nvSpPr>
         <p:spPr>
           <a:xfrm>
-            <a:off x="8339328" y="3044952"/>
-            <a:ext cx="3118104" cy="457200"/>
+            <a:off x="6300216" y="2971800"/>
+            <a:ext cx="2441448" cy="420624"/>
           </a:xfrm>
           <a:prstGeom prst="rect">
             <a:avLst/>
@@ -6619,7 +6572,7 @@
               <a:buNone/>
             </a:pPr>
             <a:r>
-              <a:rPr lang="en-US" sz="1150" dirty="0">
+              <a:rPr lang="en-US" sz="1050" dirty="0">
                 <a:solidFill>
                   <a:srgbClr val="8A7A6D"/>
                 </a:solidFill>
@@ -6627,10 +6580,247 @@
                 <a:ea typeface="Malgun Gothic" pitchFamily="34" charset="-122"/>
                 <a:cs typeface="Malgun Gothic" pitchFamily="34" charset="-120"/>
               </a:rPr>
-              <a:t>월간 이용권</a:t>
-            </a:r>
-            <a:endParaRPr lang="en-US" sz="1150" dirty="0"/>
-          </a:p>
+              <a:t>월간 · 연 50 Pi</a:t>
+            </a:r>
+            <a:endParaRPr lang="en-US" sz="1050" dirty="0"/>
+          </a:p>
+        </p:txBody>
+      </p:sp>
+      <p:sp>
+        <p:nvSpPr>
+          <p:cNvPr id="25" name="Text 23"/>
+          <p:cNvSpPr/>
+          <p:nvPr/>
+        </p:nvSpPr>
+        <p:spPr>
+          <a:xfrm>
+            <a:off x="6483096" y="3465576"/>
+            <a:ext cx="2203704" cy="1188720"/>
+          </a:xfrm>
+          <a:prstGeom prst="rect">
+            <a:avLst/>
+          </a:prstGeom>
+          <a:noFill/>
+          <a:ln/>
+        </p:spPr>
+        <p:txBody>
+          <a:bodyPr wrap="square" lIns="0" tIns="0" rIns="0" bIns="0" rtlCol="0" anchor="t"/>
+          <a:lstStyle/>
+          <a:p>
+            <a:pPr marL="342900" indent="-342900">
+              <a:spcAft>
+                <a:spcPts val="500"/>
+              </a:spcAft>
+              <a:buSzPct val="100000"/>
+              <a:buChar char="•"/>
+            </a:pPr>
+            <a:r>
+              <a:rPr lang="en-US" sz="1100" dirty="0">
+                <a:solidFill>
+                  <a:srgbClr val="2B2018"/>
+                </a:solidFill>
+                <a:latin typeface="Malgun Gothic" pitchFamily="34" charset="0"/>
+                <a:ea typeface="Malgun Gothic" pitchFamily="34" charset="-122"/>
+                <a:cs typeface="Malgun Gothic" pitchFamily="34" charset="-120"/>
+              </a:rPr>
+              <a:t>무제한 그룹방</a:t>
+            </a:r>
+            <a:endParaRPr lang="en-US" sz="1100" dirty="0"/>
+          </a:p>
+          <a:p>
+            <a:pPr marL="342900" indent="-342900">
+              <a:spcAft>
+                <a:spcPts val="500"/>
+              </a:spcAft>
+              <a:buSzPct val="100000"/>
+              <a:buChar char="•"/>
+            </a:pPr>
+            <a:r>
+              <a:rPr lang="en-US" sz="1100" dirty="0">
+                <a:solidFill>
+                  <a:srgbClr val="2B2018"/>
+                </a:solidFill>
+                <a:latin typeface="Malgun Gothic" pitchFamily="34" charset="0"/>
+                <a:ea typeface="Malgun Gothic" pitchFamily="34" charset="-122"/>
+                <a:cs typeface="Malgun Gothic" pitchFamily="34" charset="-120"/>
+              </a:rPr>
+              <a:t>이벤트방·분석</a:t>
+            </a:r>
+            <a:endParaRPr lang="en-US" sz="1100" dirty="0"/>
+          </a:p>
+          <a:p>
+            <a:pPr marL="342900" indent="-342900">
+              <a:spcAft>
+                <a:spcPts val="500"/>
+              </a:spcAft>
+              <a:buSzPct val="100000"/>
+              <a:buChar char="•"/>
+            </a:pPr>
+            <a:r>
+              <a:rPr lang="en-US" sz="1100" dirty="0">
+                <a:solidFill>
+                  <a:srgbClr val="2B2018"/>
+                </a:solidFill>
+                <a:latin typeface="Malgun Gothic" pitchFamily="34" charset="0"/>
+                <a:ea typeface="Malgun Gothic" pitchFamily="34" charset="-122"/>
+                <a:cs typeface="Malgun Gothic" pitchFamily="34" charset="-120"/>
+              </a:rPr>
+              <a:t>자동 봇</a:t>
+            </a:r>
+            <a:endParaRPr lang="en-US" sz="1100" dirty="0"/>
+          </a:p>
+        </p:txBody>
+      </p:sp>
+      <p:sp>
+        <p:nvSpPr>
+          <p:cNvPr id="26" name="Shape 24"/>
+          <p:cNvSpPr/>
+          <p:nvPr/>
+        </p:nvSpPr>
+        <p:spPr>
+          <a:xfrm>
+            <a:off x="9079992" y="1783080"/>
+            <a:ext cx="2660904" cy="2971800"/>
+          </a:xfrm>
+          <a:prstGeom prst="rect">
+            <a:avLst/>
+          </a:prstGeom>
+          <a:solidFill>
+            <a:srgbClr val="FFFFFF"/>
+          </a:solidFill>
+          <a:ln w="12700">
+            <a:solidFill>
+              <a:srgbClr val="ECE0D2"/>
+            </a:solidFill>
+            <a:prstDash val="solid"/>
+          </a:ln>
+          <a:effectLst>
+            <a:outerShdw sx="100000" sy="100000" kx="0" ky="0" algn="bl" rotWithShape="0" blurRad="101600" dist="38100" dir="8100000">
+              <a:srgbClr val="000000">
+                <a:alpha val="12000"/>
+              </a:srgbClr>
+            </a:outerShdw>
+          </a:effectLst>
+        </p:spPr>
+      </p:sp>
+      <p:sp>
+        <p:nvSpPr>
+          <p:cNvPr id="27" name="Shape 25"/>
+          <p:cNvSpPr/>
+          <p:nvPr/>
+        </p:nvSpPr>
+        <p:spPr>
+          <a:xfrm>
+            <a:off x="9079992" y="1783080"/>
+            <a:ext cx="2660904" cy="530352"/>
+          </a:xfrm>
+          <a:prstGeom prst="rect">
+            <a:avLst/>
+          </a:prstGeom>
+          <a:solidFill>
+            <a:srgbClr val="7A4E2D"/>
+          </a:solidFill>
+          <a:ln/>
+        </p:spPr>
+      </p:sp>
+      <p:sp>
+        <p:nvSpPr>
+          <p:cNvPr id="28" name="Text 26"/>
+          <p:cNvSpPr/>
+          <p:nvPr/>
+        </p:nvSpPr>
+        <p:spPr>
+          <a:xfrm>
+            <a:off x="9125712" y="1783080"/>
+            <a:ext cx="2569464" cy="530352"/>
+          </a:xfrm>
+          <a:prstGeom prst="rect">
+            <a:avLst/>
+          </a:prstGeom>
+          <a:noFill/>
+          <a:ln/>
+        </p:spPr>
+        <p:txBody>
+          <a:bodyPr wrap="square" lIns="0" tIns="0" rIns="0" bIns="0" rtlCol="0" anchor="ctr"/>
+          <a:lstStyle/>
+          <a:p>
+            <a:pPr algn="ctr" indent="0" marL="0">
+              <a:buNone/>
+            </a:pPr>
+            <a:r>
+              <a:rPr lang="en-US" sz="1400" b="1" dirty="0">
+                <a:solidFill>
+                  <a:srgbClr val="FFFFFF"/>
+                </a:solidFill>
+                <a:latin typeface="Malgun Gothic" pitchFamily="34" charset="0"/>
+                <a:ea typeface="Malgun Gothic" pitchFamily="34" charset="-122"/>
+                <a:cs typeface="Malgun Gothic" pitchFamily="34" charset="-120"/>
+              </a:rPr>
+              <a:t>🏪 PiShop Seller</a:t>
+            </a:r>
+            <a:endParaRPr lang="en-US" sz="1400" dirty="0"/>
+          </a:p>
+        </p:txBody>
+      </p:sp>
+      <p:sp>
+        <p:nvSpPr>
+          <p:cNvPr id="29" name="Text 27"/>
+          <p:cNvSpPr/>
+          <p:nvPr/>
+        </p:nvSpPr>
+        <p:spPr>
+          <a:xfrm>
+            <a:off x="9079992" y="2441448"/>
+            <a:ext cx="2660904" cy="502920"/>
+          </a:xfrm>
+          <a:prstGeom prst="rect">
+            <a:avLst/>
+          </a:prstGeom>
+          <a:noFill/>
+          <a:ln/>
+        </p:spPr>
+        <p:txBody>
+          <a:bodyPr wrap="square" lIns="0" tIns="0" rIns="0" bIns="0" rtlCol="0" anchor="ctr"/>
+          <a:lstStyle/>
+          <a:p>
+            <a:pPr algn="ctr" indent="0" marL="0">
+              <a:buNone/>
+            </a:pPr>
+            <a:r>
+              <a:rPr lang="en-US" sz="2500" b="1" dirty="0">
+                <a:solidFill>
+                  <a:srgbClr val="3B2A20"/>
+                </a:solidFill>
+                <a:latin typeface="Malgun Gothic" pitchFamily="34" charset="0"/>
+                <a:ea typeface="Malgun Gothic" pitchFamily="34" charset="-122"/>
+                <a:cs typeface="Malgun Gothic" pitchFamily="34" charset="-120"/>
+              </a:rPr>
+              <a:t>0.5 Pi</a:t>
+            </a:r>
+            <a:endParaRPr lang="en-US" sz="2500" dirty="0"/>
+          </a:p>
+        </p:txBody>
+      </p:sp>
+      <p:sp>
+        <p:nvSpPr>
+          <p:cNvPr id="30" name="Text 28"/>
+          <p:cNvSpPr/>
+          <p:nvPr/>
+        </p:nvSpPr>
+        <p:spPr>
+          <a:xfrm>
+            <a:off x="9189720" y="2971800"/>
+            <a:ext cx="2441448" cy="420624"/>
+          </a:xfrm>
+          <a:prstGeom prst="rect">
+            <a:avLst/>
+          </a:prstGeom>
+          <a:noFill/>
+          <a:ln/>
+        </p:spPr>
+        <p:txBody>
+          <a:bodyPr wrap="square" lIns="0" tIns="0" rIns="0" bIns="0" rtlCol="0" anchor="ctr"/>
+          <a:lstStyle/>
           <a:p>
             <a:pPr algn="ctr" indent="0" marL="0">
               <a:lnSpc>
@@ -6639,7 +6829,7 @@
               <a:buNone/>
             </a:pPr>
             <a:r>
-              <a:rPr lang="en-US" sz="1150" dirty="0">
+              <a:rPr lang="en-US" sz="1050" dirty="0">
                 <a:solidFill>
                   <a:srgbClr val="8A7A6D"/>
                 </a:solidFill>
@@ -6647,22 +6837,22 @@
                 <a:ea typeface="Malgun Gothic" pitchFamily="34" charset="-122"/>
                 <a:cs typeface="Malgun Gothic" pitchFamily="34" charset="-120"/>
               </a:rPr>
-              <a:t>연간 50 Pi (2개월 무료)</a:t>
-            </a:r>
-            <a:endParaRPr lang="en-US" sz="1150" dirty="0"/>
-          </a:p>
-        </p:txBody>
-      </p:sp>
-      <p:sp>
-        <p:nvSpPr>
-          <p:cNvPr id="25" name="Text 23"/>
-          <p:cNvSpPr/>
-          <p:nvPr/>
-        </p:nvSpPr>
-        <p:spPr>
-          <a:xfrm>
-            <a:off x="8522208" y="3657600"/>
-            <a:ext cx="2843784" cy="1371600"/>
+              <a:t>월간 · 연 5 Pi (매장용)</a:t>
+            </a:r>
+            <a:endParaRPr lang="en-US" sz="1050" dirty="0"/>
+          </a:p>
+        </p:txBody>
+      </p:sp>
+      <p:sp>
+        <p:nvSpPr>
+          <p:cNvPr id="31" name="Text 29"/>
+          <p:cNvSpPr/>
+          <p:nvPr/>
+        </p:nvSpPr>
+        <p:spPr>
+          <a:xfrm>
+            <a:off x="9372600" y="3465576"/>
+            <a:ext cx="2203704" cy="1188720"/>
           </a:xfrm>
           <a:prstGeom prst="rect">
             <a:avLst/>
@@ -6676,13 +6866,13 @@
           <a:p>
             <a:pPr marL="342900" indent="-342900">
               <a:spcAft>
-                <a:spcPts val="600"/>
+                <a:spcPts val="500"/>
               </a:spcAft>
               <a:buSzPct val="100000"/>
               <a:buChar char="•"/>
             </a:pPr>
             <a:r>
-              <a:rPr lang="en-US" sz="1250" dirty="0">
+              <a:rPr lang="en-US" sz="1100" dirty="0">
                 <a:solidFill>
                   <a:srgbClr val="2B2018"/>
                 </a:solidFill>
@@ -6690,20 +6880,20 @@
                 <a:ea typeface="Malgun Gothic" pitchFamily="34" charset="-122"/>
                 <a:cs typeface="Malgun Gothic" pitchFamily="34" charset="-120"/>
               </a:rPr>
-              <a:t>무제한 그룹방</a:t>
-            </a:r>
-            <a:endParaRPr lang="en-US" sz="1250" dirty="0"/>
+              <a:t>상품 무제한</a:t>
+            </a:r>
+            <a:endParaRPr lang="en-US" sz="1100" dirty="0"/>
           </a:p>
           <a:p>
             <a:pPr marL="342900" indent="-342900">
               <a:spcAft>
-                <a:spcPts val="600"/>
+                <a:spcPts val="500"/>
               </a:spcAft>
               <a:buSzPct val="100000"/>
               <a:buChar char="•"/>
             </a:pPr>
             <a:r>
-              <a:rPr lang="en-US" sz="1250" dirty="0">
+              <a:rPr lang="en-US" sz="1100" dirty="0">
                 <a:solidFill>
                   <a:srgbClr val="2B2018"/>
                 </a:solidFill>
@@ -6711,20 +6901,20 @@
                 <a:ea typeface="Malgun Gothic" pitchFamily="34" charset="-122"/>
                 <a:cs typeface="Malgun Gothic" pitchFamily="34" charset="-120"/>
               </a:rPr>
-              <a:t>이벤트 방 개설</a:t>
-            </a:r>
-            <a:endParaRPr lang="en-US" sz="1250" dirty="0"/>
+              <a:t>매장 통계</a:t>
+            </a:r>
+            <a:endParaRPr lang="en-US" sz="1100" dirty="0"/>
           </a:p>
           <a:p>
             <a:pPr marL="342900" indent="-342900">
               <a:spcAft>
-                <a:spcPts val="600"/>
+                <a:spcPts val="500"/>
               </a:spcAft>
               <a:buSzPct val="100000"/>
               <a:buChar char="•"/>
             </a:pPr>
             <a:r>
-              <a:rPr lang="en-US" sz="1250" dirty="0">
+              <a:rPr lang="en-US" sz="1100" dirty="0">
                 <a:solidFill>
                   <a:srgbClr val="2B2018"/>
                 </a:solidFill>
@@ -6732,36 +6922,15 @@
                 <a:ea typeface="Malgun Gothic" pitchFamily="34" charset="-122"/>
                 <a:cs typeface="Malgun Gothic" pitchFamily="34" charset="-120"/>
               </a:rPr>
-              <a:t>방문 분석 보기</a:t>
-            </a:r>
-            <a:endParaRPr lang="en-US" sz="1250" dirty="0"/>
-          </a:p>
-          <a:p>
-            <a:pPr marL="342900" indent="-342900">
-              <a:spcAft>
-                <a:spcPts val="600"/>
-              </a:spcAft>
-              <a:buSzPct val="100000"/>
-              <a:buChar char="•"/>
-            </a:pPr>
-            <a:r>
-              <a:rPr lang="en-US" sz="1250" dirty="0">
-                <a:solidFill>
-                  <a:srgbClr val="2B2018"/>
-                </a:solidFill>
-                <a:latin typeface="Malgun Gothic" pitchFamily="34" charset="0"/>
-                <a:ea typeface="Malgun Gothic" pitchFamily="34" charset="-122"/>
-                <a:cs typeface="Malgun Gothic" pitchFamily="34" charset="-120"/>
-              </a:rPr>
-              <a:t>자동 봇 연결</a:t>
-            </a:r>
-            <a:endParaRPr lang="en-US" sz="1250" dirty="0"/>
-          </a:p>
-        </p:txBody>
-      </p:sp>
-      <p:sp>
-        <p:nvSpPr>
-          <p:cNvPr id="26" name="Shape 24"/>
+              <a:t>우선 노출</a:t>
+            </a:r>
+            <a:endParaRPr lang="en-US" sz="1100" dirty="0"/>
+          </a:p>
+        </p:txBody>
+      </p:sp>
+      <p:sp>
+        <p:nvSpPr>
+          <p:cNvPr id="32" name="Shape 30"/>
           <p:cNvSpPr/>
           <p:nvPr/>
         </p:nvSpPr>
@@ -6788,7 +6957,7 @@
       </p:sp>
       <p:sp>
         <p:nvSpPr>
-          <p:cNvPr id="27" name="Text 25"/>
+          <p:cNvPr id="33" name="Text 31"/>
           <p:cNvSpPr/>
           <p:nvPr/>
         </p:nvSpPr>
@@ -6811,7 +6980,7 @@
               <a:buNone/>
             </a:pPr>
             <a:r>
-              <a:rPr lang="en-US" sz="1400" b="1" dirty="0">
+              <a:rPr lang="en-US" sz="1350" b="1" dirty="0">
                 <a:solidFill>
                   <a:srgbClr val="B9740A"/>
                 </a:solidFill>
@@ -6825,7 +6994,7 @@
               <a:buNone/>
             </a:pPr>
             <a:r>
-              <a:rPr lang="en-US" sz="1400" dirty="0">
+              <a:rPr lang="en-US" sz="1350" dirty="0">
                 <a:solidFill>
                   <a:srgbClr val="2B2018"/>
                 </a:solidFill>
@@ -6833,15 +7002,15 @@
                 <a:ea typeface="Malgun Gothic" pitchFamily="34" charset="-122"/>
                 <a:cs typeface="Malgun Gothic" pitchFamily="34" charset="-120"/>
               </a:rPr>
-              <a:t>PiStore(판매)는 구독이 아니라 “판매 보증금 1 Pi” 예치예요 — 안전거래용, 약속 어기면 차감됩니다.</a:t>
-            </a:r>
-            <a:endParaRPr lang="en-US" sz="1400" dirty="0"/>
-          </a:p>
-        </p:txBody>
-      </p:sp>
-      <p:sp>
-        <p:nvSpPr>
-          <p:cNvPr id="28" name="Text 26"/>
+              <a:t>결제는 지금 Pi로 해요(앞으로 ‘Bean 적립’으로 전환 예정 · Bean은 플랫폼 사용 전용, 환금 안 됨). 매장 판매엔 보증금 1 Pi 별도(안전 거래용).</a:t>
+            </a:r>
+            <a:endParaRPr lang="en-US" sz="1350" dirty="0"/>
+          </a:p>
+        </p:txBody>
+      </p:sp>
+      <p:sp>
+        <p:nvSpPr>
+          <p:cNvPr id="34" name="Text 32"/>
           <p:cNvSpPr/>
           <p:nvPr/>
         </p:nvSpPr>
@@ -6894,7 +7063,7 @@
       </p:sp>
       <p:sp>
         <p:nvSpPr>
-          <p:cNvPr id="29" name="Text 27"/>
+          <p:cNvPr id="35" name="Text 33"/>
           <p:cNvSpPr/>
           <p:nvPr/>
         </p:nvSpPr>
@@ -7038,7 +7207,7 @@
         <p:spPr>
           <a:xfrm>
             <a:off x="1645920" y="502920"/>
-            <a:ext cx="10058400" cy="640080"/>
+            <a:ext cx="10241280" cy="640080"/>
           </a:xfrm>
           <a:prstGeom prst="rect">
             <a:avLst/>
@@ -7077,7 +7246,7 @@
         <p:spPr>
           <a:xfrm>
             <a:off x="1664208" y="1143000"/>
-            <a:ext cx="10058400" cy="411480"/>
+            <a:ext cx="10241280" cy="411480"/>
           </a:xfrm>
           <a:prstGeom prst="rect">
             <a:avLst/>
@@ -7681,7 +7850,7 @@
               <a:buNone/>
             </a:pPr>
             <a:r>
-              <a:rPr lang="en-US" sz="1400" b="1" dirty="0">
+              <a:rPr lang="en-US" sz="1350" b="1" dirty="0">
                 <a:solidFill>
                   <a:srgbClr val="B9740A"/>
                 </a:solidFill>
@@ -7695,7 +7864,7 @@
               <a:buNone/>
             </a:pPr>
             <a:r>
-              <a:rPr lang="en-US" sz="1400" dirty="0">
+              <a:rPr lang="en-US" sz="1350" dirty="0">
                 <a:solidFill>
                   <a:srgbClr val="2B2018"/>
                 </a:solidFill>
@@ -7705,7 +7874,7 @@
               </a:rPr>
               <a:t>통역사를 옆에 둔 것처럼, 어느 나라 사람과도 막힘없이 수다 떨 수 있어요. 🌍</a:t>
             </a:r>
-            <a:endParaRPr lang="en-US" sz="1400" dirty="0"/>
+            <a:endParaRPr lang="en-US" sz="1350" dirty="0"/>
           </a:p>
         </p:txBody>
       </p:sp>
@@ -7908,7 +8077,7 @@
         <p:spPr>
           <a:xfrm>
             <a:off x="1645920" y="502920"/>
-            <a:ext cx="10058400" cy="640080"/>
+            <a:ext cx="10241280" cy="640080"/>
           </a:xfrm>
           <a:prstGeom prst="rect">
             <a:avLst/>
@@ -7947,7 +8116,7 @@
         <p:spPr>
           <a:xfrm>
             <a:off x="1664208" y="1143000"/>
-            <a:ext cx="10058400" cy="411480"/>
+            <a:ext cx="10241280" cy="411480"/>
           </a:xfrm>
           <a:prstGeom prst="rect">
             <a:avLst/>
@@ -8551,7 +8720,7 @@
               <a:buNone/>
             </a:pPr>
             <a:r>
-              <a:rPr lang="en-US" sz="1400" b="1" dirty="0">
+              <a:rPr lang="en-US" sz="1350" b="1" dirty="0">
                 <a:solidFill>
                   <a:srgbClr val="B9740A"/>
                 </a:solidFill>
@@ -8565,7 +8734,7 @@
               <a:buNone/>
             </a:pPr>
             <a:r>
-              <a:rPr lang="en-US" sz="1400" dirty="0">
+              <a:rPr lang="en-US" sz="1350" dirty="0">
                 <a:solidFill>
                   <a:srgbClr val="2B2018"/>
                 </a:solidFill>
@@ -8575,7 +8744,7 @@
               </a:rPr>
               <a:t>에스크로 = 플랫폼이 결제한 Pi를 잠시 안전하게 맡아두는 금고. 거래가 끝나야 판매자에게 전달돼요.</a:t>
             </a:r>
-            <a:endParaRPr lang="en-US" sz="1400" dirty="0"/>
+            <a:endParaRPr lang="en-US" sz="1350" dirty="0"/>
           </a:p>
         </p:txBody>
       </p:sp>
@@ -8778,7 +8947,7 @@
         <p:spPr>
           <a:xfrm>
             <a:off x="1645920" y="502920"/>
-            <a:ext cx="10058400" cy="640080"/>
+            <a:ext cx="10241280" cy="640080"/>
           </a:xfrm>
           <a:prstGeom prst="rect">
             <a:avLst/>
@@ -8817,7 +8986,7 @@
         <p:spPr>
           <a:xfrm>
             <a:off x="1664208" y="1143000"/>
-            <a:ext cx="10058400" cy="411480"/>
+            <a:ext cx="10241280" cy="411480"/>
           </a:xfrm>
           <a:prstGeom prst="rect">
             <a:avLst/>
@@ -9595,7 +9764,7 @@
               <a:buNone/>
             </a:pPr>
             <a:r>
-              <a:rPr lang="en-US" sz="1400" b="1" dirty="0">
+              <a:rPr lang="en-US" sz="1350" b="1" dirty="0">
                 <a:solidFill>
                   <a:srgbClr val="B9740A"/>
                 </a:solidFill>
@@ -9609,7 +9778,7 @@
               <a:buNone/>
             </a:pPr>
             <a:r>
-              <a:rPr lang="en-US" sz="1400" dirty="0">
+              <a:rPr lang="en-US" sz="1350" dirty="0">
                 <a:solidFill>
                   <a:srgbClr val="2B2018"/>
                 </a:solidFill>
@@ -9619,7 +9788,7 @@
               </a:rPr>
               <a:t>온라인 주문(O)을 받아 매장(O)에서 건네주는 흐름이라 "O2O"라고 불러요.</a:t>
             </a:r>
-            <a:endParaRPr lang="en-US" sz="1400" dirty="0"/>
+            <a:endParaRPr lang="en-US" sz="1350" dirty="0"/>
           </a:p>
         </p:txBody>
       </p:sp>

--- a/docs/Cafe.pi_쉬운_사용자매뉴얼.pptx
+++ b/docs/Cafe.pi_쉬운_사용자매뉴얼.pptx
@@ -4,6 +4,9 @@
   <p:sldMasterIdLst>
     <p:sldMasterId id="2147483648" r:id="rId1"/>
   </p:sldMasterIdLst>
+  <p:notesMasterIdLst>
+    <p:notesMasterId r:id="rId12"/>
+  </p:notesMasterIdLst>
   <p:sldIdLst>
     <p:sldId id="256" r:id="rId2"/>
     <p:sldId id="257" r:id="rId3"/>
@@ -16,11 +19,8 @@
     <p:sldId id="264" r:id="rId10"/>
     <p:sldId id="265" r:id="rId11"/>
   </p:sldIdLst>
-  <p:notesMasterIdLst>
-    <p:notesMasterId r:id="rId12"/>
-  </p:notesMasterIdLst>
-  <p:sldSz cx="12191695" cy="6858000"/>
-  <p:notesSz cx="6858000" cy="12191695"/>
+  <p:sldSz cx="12192000" cy="6858000"/>
+  <p:notesSz cx="6858000" cy="12192000"/>
   <p:defaultTextStyle>
     <a:lvl1pPr marL="0" algn="l" defTabSz="914400" rtl="0" eaLnBrk="1" latinLnBrk="0" hangingPunct="1">
       <a:defRPr sz="1800" kern="1200">
@@ -113,6 +113,11 @@
       </a:defRPr>
     </a:lvl9pPr>
   </p:defaultTextStyle>
+  <p:extLst>
+    <p:ext uri="{EFAFB233-063F-42B5-8137-9DF3F51BA10A}">
+      <p15:sldGuideLst xmlns:p15="http://schemas.microsoft.com/office/powerpoint/2012/main"/>
+    </p:ext>
+  </p:extLst>
 </p:presentation>
 </file>
 
@@ -138,240 +143,16 @@
           <a:chExt cx="0" cy="0"/>
         </a:xfrm>
       </p:grpSpPr>
-      <p:sp>
-        <p:nvSpPr>
-          <p:cNvPr id="2" name="Header Placeholder 1"/>
-          <p:cNvSpPr>
-            <a:spLocks noGrp="1"/>
-          </p:cNvSpPr>
-          <p:nvPr>
-            <p:ph type="hdr" sz="quarter"/>
-          </p:nvPr>
-        </p:nvSpPr>
-        <p:spPr>
-          <a:xfrm>
-            <a:off x="0" y="0"/>
-            <a:ext cx="2971800" cy="458788"/>
-          </a:xfrm>
-          <a:prstGeom prst="rect">
-            <a:avLst/>
-          </a:prstGeom>
-        </p:spPr>
-        <p:txBody>
-          <a:bodyPr vert="horz" lIns="91440" tIns="45720" rIns="91440" bIns="45720" rtlCol="0"/>
-          <a:lstStyle>
-            <a:lvl1pPr algn="l">
-              <a:defRPr sz="1200"/>
-            </a:lvl1pPr>
-          </a:lstStyle>
-          <a:p>
-            <a:endParaRPr lang="en-US"/>
-          </a:p>
-        </p:txBody>
-      </p:sp>
-      <p:sp>
-        <p:nvSpPr>
-          <p:cNvPr id="3" name="Date Placeholder 2"/>
-          <p:cNvSpPr>
-            <a:spLocks noGrp="1"/>
-          </p:cNvSpPr>
-          <p:nvPr>
-            <p:ph type="dt" idx="1"/>
-          </p:nvPr>
-        </p:nvSpPr>
-        <p:spPr>
-          <a:xfrm>
-            <a:off x="3884613" y="0"/>
-            <a:ext cx="2971800" cy="458788"/>
-          </a:xfrm>
-          <a:prstGeom prst="rect">
-            <a:avLst/>
-          </a:prstGeom>
-        </p:spPr>
-        <p:txBody>
-          <a:bodyPr vert="horz" lIns="91440" tIns="45720" rIns="91440" bIns="45720" rtlCol="0"/>
-          <a:lstStyle>
-            <a:lvl1pPr algn="r">
-              <a:defRPr sz="1200"/>
-            </a:lvl1pPr>
-          </a:lstStyle>
-          <a:p>
-            <a:fld id="{5282F153-3F37-0F45-9E97-73ACFA13230C}" type="datetimeFigureOut">
-              <a:rPr lang="en-US"/>
-              <a:t>7/23/19</a:t>
-            </a:fld>
-            <a:endParaRPr lang="en-US"/>
-          </a:p>
-        </p:txBody>
-      </p:sp>
-      <p:sp>
-        <p:nvSpPr>
-          <p:cNvPr id="4" name="Slide Image Placeholder 3"/>
-          <p:cNvSpPr>
-            <a:spLocks noGrp="1" noRot="1" noChangeAspect="1"/>
-          </p:cNvSpPr>
-          <p:nvPr>
-            <p:ph type="sldImg" idx="2"/>
-          </p:nvPr>
-        </p:nvSpPr>
-        <p:spPr>
-          <a:xfrm>
-            <a:off x="685800" y="1143000"/>
-            <a:ext cx="5486400" cy="3086100"/>
-          </a:xfrm>
-          <a:prstGeom prst="rect">
-            <a:avLst/>
-          </a:prstGeom>
-          <a:noFill/>
-          <a:ln w="12700">
-            <a:solidFill>
-              <a:prstClr val="black"/>
-            </a:solidFill>
-          </a:ln>
-        </p:spPr>
-        <p:txBody>
-          <a:bodyPr vert="horz" lIns="91440" tIns="45720" rIns="91440" bIns="45720" rtlCol="0" anchor="ctr"/>
-          <a:lstStyle/>
-          <a:p>
-            <a:endParaRPr lang="en-US"/>
-          </a:p>
-        </p:txBody>
-      </p:sp>
-      <p:sp>
-        <p:nvSpPr>
-          <p:cNvPr id="5" name="Notes Placeholder 4"/>
-          <p:cNvSpPr>
-            <a:spLocks noGrp="1"/>
-          </p:cNvSpPr>
-          <p:nvPr>
-            <p:ph type="body" sz="quarter" idx="3"/>
-          </p:nvPr>
-        </p:nvSpPr>
-        <p:spPr>
-          <a:xfrm>
-            <a:off x="685800" y="4400550"/>
-            <a:ext cx="5486400" cy="3600450"/>
-          </a:xfrm>
-          <a:prstGeom prst="rect">
-            <a:avLst/>
-          </a:prstGeom>
-        </p:spPr>
-        <p:txBody>
-          <a:bodyPr vert="horz" lIns="91440" tIns="45720" rIns="91440" bIns="45720" rtlCol="0"/>
-          <a:lstStyle/>
-          <a:p>
-            <a:pPr lvl="0"/>
-            <a:r>
-              <a:rPr lang="en-US"/>
-              <a:t>Click to edit Master text styles</a:t>
-            </a:r>
-          </a:p>
-          <a:p>
-            <a:pPr lvl="1"/>
-            <a:r>
-              <a:rPr lang="en-US"/>
-              <a:t>Second level</a:t>
-            </a:r>
-          </a:p>
-          <a:p>
-            <a:pPr lvl="2"/>
-            <a:r>
-              <a:rPr lang="en-US"/>
-              <a:t>Third level</a:t>
-            </a:r>
-          </a:p>
-          <a:p>
-            <a:pPr lvl="3"/>
-            <a:r>
-              <a:rPr lang="en-US"/>
-              <a:t>Fourth level</a:t>
-            </a:r>
-          </a:p>
-          <a:p>
-            <a:pPr lvl="4"/>
-            <a:r>
-              <a:rPr lang="en-US"/>
-              <a:t>Fifth level</a:t>
-            </a:r>
-          </a:p>
-        </p:txBody>
-      </p:sp>
-      <p:sp>
-        <p:nvSpPr>
-          <p:cNvPr id="6" name="Footer Placeholder 5"/>
-          <p:cNvSpPr>
-            <a:spLocks noGrp="1"/>
-          </p:cNvSpPr>
-          <p:nvPr>
-            <p:ph type="ftr" sz="quarter" idx="4"/>
-          </p:nvPr>
-        </p:nvSpPr>
-        <p:spPr>
-          <a:xfrm>
-            <a:off x="0" y="8685213"/>
-            <a:ext cx="2971800" cy="458787"/>
-          </a:xfrm>
-          <a:prstGeom prst="rect">
-            <a:avLst/>
-          </a:prstGeom>
-        </p:spPr>
-        <p:txBody>
-          <a:bodyPr vert="horz" lIns="91440" tIns="45720" rIns="91440" bIns="45720" rtlCol="0" anchor="b"/>
-          <a:lstStyle>
-            <a:lvl1pPr algn="l">
-              <a:defRPr sz="1200"/>
-            </a:lvl1pPr>
-          </a:lstStyle>
-          <a:p>
-            <a:endParaRPr lang="en-US"/>
-          </a:p>
-        </p:txBody>
-      </p:sp>
-      <p:sp>
-        <p:nvSpPr>
-          <p:cNvPr id="7" name="Slide Number Placeholder 6"/>
-          <p:cNvSpPr>
-            <a:spLocks noGrp="1"/>
-          </p:cNvSpPr>
-          <p:nvPr>
-            <p:ph type="sldNum" sz="quarter" idx="5"/>
-          </p:nvPr>
-        </p:nvSpPr>
-        <p:spPr>
-          <a:xfrm>
-            <a:off x="3884613" y="8685213"/>
-            <a:ext cx="2971800" cy="458787"/>
-          </a:xfrm>
-          <a:prstGeom prst="rect">
-            <a:avLst/>
-          </a:prstGeom>
-        </p:spPr>
-        <p:txBody>
-          <a:bodyPr vert="horz" lIns="91440" tIns="45720" rIns="91440" bIns="45720" rtlCol="0" anchor="b"/>
-          <a:lstStyle>
-            <a:lvl1pPr algn="r">
-              <a:defRPr sz="1200"/>
-            </a:lvl1pPr>
-          </a:lstStyle>
-          <a:p>
-            <a:fld id="{CE5E9CC1-C706-0F49-92D6-E571CC5EEA8F}" type="slidenum">
-              <a:rPr lang="en-US"/>
-              <a:t>‹#›</a:t>
-            </a:fld>
-            <a:endParaRPr lang="en-US"/>
-          </a:p>
-        </p:txBody>
-      </p:sp>
     </p:spTree>
     <p:extLst>
       <p:ext uri="{BB962C8B-B14F-4D97-AF65-F5344CB8AC3E}">
-        <p14:creationId xmlns:p14="http://schemas.microsoft.com/office/powerpoint/2010/main" val="1024086991"/>
+        <p14:creationId xmlns:p14="http://schemas.microsoft.com/office/powerpoint/2010/main" val="4145592248"/>
       </p:ext>
     </p:extLst>
   </p:cSld>
   <p:clrMap bg1="lt1" tx1="dk1" bg2="lt2" tx2="dk2" accent1="accent1" accent2="accent2" accent3="accent3" accent4="accent4" accent5="accent5" accent6="accent6" hlink="hlink" folHlink="folHlink"/>
   <p:notesStyle>
-    <a:lvl1pPr marL="0" algn="l" defTabSz="914400" rtl="0" eaLnBrk="1" latinLnBrk="0" hangingPunct="1">
+    <a:lvl1pPr marL="0" algn="l" defTabSz="914400" rtl="0" eaLnBrk="1" latinLnBrk="1" hangingPunct="1">
       <a:defRPr sz="1200" kern="1200">
         <a:solidFill>
           <a:schemeClr val="tx1"/>
@@ -381,7 +162,7 @@
         <a:cs typeface="+mn-cs"/>
       </a:defRPr>
     </a:lvl1pPr>
-    <a:lvl2pPr marL="457200" algn="l" defTabSz="914400" rtl="0" eaLnBrk="1" latinLnBrk="0" hangingPunct="1">
+    <a:lvl2pPr marL="457200" algn="l" defTabSz="914400" rtl="0" eaLnBrk="1" latinLnBrk="1" hangingPunct="1">
       <a:defRPr sz="1200" kern="1200">
         <a:solidFill>
           <a:schemeClr val="tx1"/>
@@ -391,7 +172,7 @@
         <a:cs typeface="+mn-cs"/>
       </a:defRPr>
     </a:lvl2pPr>
-    <a:lvl3pPr marL="914400" algn="l" defTabSz="914400" rtl="0" eaLnBrk="1" latinLnBrk="0" hangingPunct="1">
+    <a:lvl3pPr marL="914400" algn="l" defTabSz="914400" rtl="0" eaLnBrk="1" latinLnBrk="1" hangingPunct="1">
       <a:defRPr sz="1200" kern="1200">
         <a:solidFill>
           <a:schemeClr val="tx1"/>
@@ -401,7 +182,7 @@
         <a:cs typeface="+mn-cs"/>
       </a:defRPr>
     </a:lvl3pPr>
-    <a:lvl4pPr marL="1371600" algn="l" defTabSz="914400" rtl="0" eaLnBrk="1" latinLnBrk="0" hangingPunct="1">
+    <a:lvl4pPr marL="1371600" algn="l" defTabSz="914400" rtl="0" eaLnBrk="1" latinLnBrk="1" hangingPunct="1">
       <a:defRPr sz="1200" kern="1200">
         <a:solidFill>
           <a:schemeClr val="tx1"/>
@@ -411,7 +192,7 @@
         <a:cs typeface="+mn-cs"/>
       </a:defRPr>
     </a:lvl4pPr>
-    <a:lvl5pPr marL="1828800" algn="l" defTabSz="914400" rtl="0" eaLnBrk="1" latinLnBrk="0" hangingPunct="1">
+    <a:lvl5pPr marL="1828800" algn="l" defTabSz="914400" rtl="0" eaLnBrk="1" latinLnBrk="1" hangingPunct="1">
       <a:defRPr sz="1200" kern="1200">
         <a:solidFill>
           <a:schemeClr val="tx1"/>
@@ -421,7 +202,7 @@
         <a:cs typeface="+mn-cs"/>
       </a:defRPr>
     </a:lvl5pPr>
-    <a:lvl6pPr marL="2286000" algn="l" defTabSz="914400" rtl="0" eaLnBrk="1" latinLnBrk="0" hangingPunct="1">
+    <a:lvl6pPr marL="2286000" algn="l" defTabSz="914400" rtl="0" eaLnBrk="1" latinLnBrk="1" hangingPunct="1">
       <a:defRPr sz="1200" kern="1200">
         <a:solidFill>
           <a:schemeClr val="tx1"/>
@@ -431,7 +212,7 @@
         <a:cs typeface="+mn-cs"/>
       </a:defRPr>
     </a:lvl6pPr>
-    <a:lvl7pPr marL="2743200" algn="l" defTabSz="914400" rtl="0" eaLnBrk="1" latinLnBrk="0" hangingPunct="1">
+    <a:lvl7pPr marL="2743200" algn="l" defTabSz="914400" rtl="0" eaLnBrk="1" latinLnBrk="1" hangingPunct="1">
       <a:defRPr sz="1200" kern="1200">
         <a:solidFill>
           <a:schemeClr val="tx1"/>
@@ -441,7 +222,7 @@
         <a:cs typeface="+mn-cs"/>
       </a:defRPr>
     </a:lvl7pPr>
-    <a:lvl8pPr marL="3200400" algn="l" defTabSz="914400" rtl="0" eaLnBrk="1" latinLnBrk="0" hangingPunct="1">
+    <a:lvl8pPr marL="3200400" algn="l" defTabSz="914400" rtl="0" eaLnBrk="1" latinLnBrk="1" hangingPunct="1">
       <a:defRPr sz="1200" kern="1200">
         <a:solidFill>
           <a:schemeClr val="tx1"/>
@@ -451,7 +232,7 @@
         <a:cs typeface="+mn-cs"/>
       </a:defRPr>
     </a:lvl8pPr>
-    <a:lvl9pPr marL="3657600" algn="l" defTabSz="914400" rtl="0" eaLnBrk="1" latinLnBrk="0" hangingPunct="1">
+    <a:lvl9pPr marL="3657600" algn="l" defTabSz="914400" rtl="0" eaLnBrk="1" latinLnBrk="1" hangingPunct="1">
       <a:defRPr sz="1200" kern="1200">
         <a:solidFill>
           <a:schemeClr val="tx1"/>
@@ -509,10 +290,6 @@
           <a:bodyPr/>
           <a:lstStyle/>
           <a:p>
-            <a:r>
-              <a:rPr lang="en-US" dirty="0"/>
-              <a:t/>
-            </a:r>
             <a:endParaRPr lang="en-US" dirty="0"/>
           </a:p>
         </p:txBody>
@@ -597,10 +374,6 @@
           <a:bodyPr/>
           <a:lstStyle/>
           <a:p>
-            <a:r>
-              <a:rPr lang="en-US" dirty="0"/>
-              <a:t/>
-            </a:r>
             <a:endParaRPr lang="en-US" dirty="0"/>
           </a:p>
         </p:txBody>
@@ -685,10 +458,6 @@
           <a:bodyPr/>
           <a:lstStyle/>
           <a:p>
-            <a:r>
-              <a:rPr lang="en-US" dirty="0"/>
-              <a:t/>
-            </a:r>
             <a:endParaRPr lang="en-US" dirty="0"/>
           </a:p>
         </p:txBody>
@@ -773,10 +542,6 @@
           <a:bodyPr/>
           <a:lstStyle/>
           <a:p>
-            <a:r>
-              <a:rPr lang="en-US" dirty="0"/>
-              <a:t/>
-            </a:r>
             <a:endParaRPr lang="en-US" dirty="0"/>
           </a:p>
         </p:txBody>
@@ -861,10 +626,6 @@
           <a:bodyPr/>
           <a:lstStyle/>
           <a:p>
-            <a:r>
-              <a:rPr lang="en-US" dirty="0"/>
-              <a:t/>
-            </a:r>
             <a:endParaRPr lang="en-US" dirty="0"/>
           </a:p>
         </p:txBody>
@@ -949,10 +710,6 @@
           <a:bodyPr/>
           <a:lstStyle/>
           <a:p>
-            <a:r>
-              <a:rPr lang="en-US" dirty="0"/>
-              <a:t/>
-            </a:r>
             <a:endParaRPr lang="en-US" dirty="0"/>
           </a:p>
         </p:txBody>
@@ -1037,10 +794,6 @@
           <a:bodyPr/>
           <a:lstStyle/>
           <a:p>
-            <a:r>
-              <a:rPr lang="en-US" dirty="0"/>
-              <a:t/>
-            </a:r>
             <a:endParaRPr lang="en-US" dirty="0"/>
           </a:p>
         </p:txBody>
@@ -1125,10 +878,6 @@
           <a:bodyPr/>
           <a:lstStyle/>
           <a:p>
-            <a:r>
-              <a:rPr lang="en-US" dirty="0"/>
-              <a:t/>
-            </a:r>
             <a:endParaRPr lang="en-US" dirty="0"/>
           </a:p>
         </p:txBody>
@@ -1213,10 +962,6 @@
           <a:bodyPr/>
           <a:lstStyle/>
           <a:p>
-            <a:r>
-              <a:rPr lang="en-US" dirty="0"/>
-              <a:t/>
-            </a:r>
             <a:endParaRPr lang="en-US" dirty="0"/>
           </a:p>
         </p:txBody>
@@ -1301,10 +1046,6 @@
           <a:bodyPr/>
           <a:lstStyle/>
           <a:p>
-            <a:r>
-              <a:rPr lang="en-US" dirty="0"/>
-              <a:t/>
-            </a:r>
             <a:endParaRPr lang="en-US" dirty="0"/>
           </a:p>
         </p:txBody>
@@ -1378,6 +1119,11 @@
 <file path=ppt/slideMasters/slideMaster1.xml><?xml version="1.0" encoding="utf-8"?>
 <p:sldMaster xmlns:a="http://schemas.openxmlformats.org/drawingml/2006/main" xmlns:r="http://schemas.openxmlformats.org/officeDocument/2006/relationships" xmlns:p="http://schemas.openxmlformats.org/presentationml/2006/main">
   <p:cSld>
+    <p:bg>
+      <p:bgRef idx="1001">
+        <a:schemeClr val="bg1"/>
+      </p:bgRef>
+    </p:bg>
     <p:spTree>
       <p:nvGrpSpPr>
         <p:cNvPr id="1" name=""/>
@@ -1660,6 +1406,7 @@
         <a:solidFill>
           <a:srgbClr val="3B2A20"/>
         </a:solidFill>
+        <a:effectLst/>
       </p:bgPr>
     </p:bg>
     <p:spTree>
@@ -1695,6 +1442,13 @@
           </a:solidFill>
           <a:ln/>
         </p:spPr>
+        <p:txBody>
+          <a:bodyPr/>
+          <a:lstStyle/>
+          <a:p>
+            <a:endParaRPr lang="ko-KR" altLang="en-US"/>
+          </a:p>
+        </p:txBody>
       </p:sp>
       <p:sp>
         <p:nvSpPr>
@@ -1717,6 +1471,13 @@
           </a:solidFill>
           <a:ln/>
         </p:spPr>
+        <p:txBody>
+          <a:bodyPr/>
+          <a:lstStyle/>
+          <a:p>
+            <a:endParaRPr lang="ko-KR" altLang="en-US"/>
+          </a:p>
+        </p:txBody>
       </p:sp>
       <p:sp>
         <p:nvSpPr>
@@ -1739,7 +1500,7 @@
           <a:bodyPr wrap="square" lIns="0" tIns="0" rIns="0" bIns="0" rtlCol="0" anchor="ctr"/>
           <a:lstStyle/>
           <a:p>
-            <a:pPr indent="0" marL="0">
+            <a:pPr marL="0" indent="0">
               <a:buNone/>
             </a:pPr>
             <a:r>
@@ -1775,7 +1536,7 @@
           <a:bodyPr wrap="square" lIns="0" tIns="0" rIns="0" bIns="0" rtlCol="0" anchor="ctr"/>
           <a:lstStyle/>
           <a:p>
-            <a:pPr indent="0" marL="0">
+            <a:pPr marL="0" indent="0">
               <a:buNone/>
             </a:pPr>
             <a:r>
@@ -1814,7 +1575,7 @@
           <a:bodyPr wrap="square" lIns="0" tIns="0" rIns="0" bIns="0" rtlCol="0" anchor="ctr"/>
           <a:lstStyle/>
           <a:p>
-            <a:pPr indent="0" marL="0">
+            <a:pPr marL="0" indent="0">
               <a:buNone/>
             </a:pPr>
             <a:r>
@@ -1853,7 +1614,7 @@
           <a:bodyPr wrap="square" lIns="0" tIns="0" rIns="0" bIns="0" rtlCol="0" anchor="ctr"/>
           <a:lstStyle/>
           <a:p>
-            <a:pPr indent="0" marL="0">
+            <a:pPr marL="0" indent="0">
               <a:buNone/>
             </a:pPr>
             <a:r>
@@ -1892,7 +1653,7 @@
           <a:bodyPr wrap="square" lIns="0" tIns="0" rIns="0" bIns="0" rtlCol="0" anchor="ctr"/>
           <a:lstStyle/>
           <a:p>
-            <a:pPr indent="0" marL="0">
+            <a:pPr marL="0" indent="0">
               <a:buNone/>
             </a:pPr>
             <a:r>
@@ -1926,6 +1687,7 @@
         <a:solidFill>
           <a:srgbClr val="3B2A20"/>
         </a:solidFill>
+        <a:effectLst/>
       </p:bgPr>
     </p:bg>
     <p:spTree>
@@ -1961,6 +1723,13 @@
           </a:solidFill>
           <a:ln/>
         </p:spPr>
+        <p:txBody>
+          <a:bodyPr/>
+          <a:lstStyle/>
+          <a:p>
+            <a:endParaRPr lang="ko-KR" altLang="en-US"/>
+          </a:p>
+        </p:txBody>
       </p:sp>
       <p:sp>
         <p:nvSpPr>
@@ -1983,6 +1752,13 @@
           </a:solidFill>
           <a:ln/>
         </p:spPr>
+        <p:txBody>
+          <a:bodyPr/>
+          <a:lstStyle/>
+          <a:p>
+            <a:endParaRPr lang="ko-KR" altLang="en-US"/>
+          </a:p>
+        </p:txBody>
       </p:sp>
       <p:sp>
         <p:nvSpPr>
@@ -2005,7 +1781,7 @@
           <a:bodyPr wrap="square" lIns="0" tIns="0" rIns="0" bIns="0" rtlCol="0" anchor="ctr"/>
           <a:lstStyle/>
           <a:p>
-            <a:pPr indent="0" marL="0">
+            <a:pPr marL="0" indent="0">
               <a:buNone/>
             </a:pPr>
             <a:r>
@@ -2044,7 +1820,7 @@
           <a:bodyPr wrap="square" lIns="0" tIns="0" rIns="0" bIns="0" rtlCol="0" anchor="ctr"/>
           <a:lstStyle/>
           <a:p>
-            <a:pPr indent="0" marL="0">
+            <a:pPr marL="0" indent="0">
               <a:buNone/>
             </a:pPr>
             <a:r>
@@ -2088,6 +1864,13 @@
             <a:prstDash val="solid"/>
           </a:ln>
         </p:spPr>
+        <p:txBody>
+          <a:bodyPr/>
+          <a:lstStyle/>
+          <a:p>
+            <a:endParaRPr lang="ko-KR" altLang="en-US"/>
+          </a:p>
+        </p:txBody>
       </p:sp>
       <p:sp>
         <p:nvSpPr>
@@ -2108,6 +1891,13 @@
           </a:solidFill>
           <a:ln/>
         </p:spPr>
+        <p:txBody>
+          <a:bodyPr/>
+          <a:lstStyle/>
+          <a:p>
+            <a:endParaRPr lang="ko-KR" altLang="en-US"/>
+          </a:p>
+        </p:txBody>
       </p:sp>
       <p:sp>
         <p:nvSpPr>
@@ -2130,7 +1920,7 @@
           <a:bodyPr wrap="square" lIns="0" tIns="0" rIns="0" bIns="0" rtlCol="0" anchor="ctr"/>
           <a:lstStyle/>
           <a:p>
-            <a:pPr algn="ctr" indent="0" marL="0">
+            <a:pPr marL="0" indent="0" algn="ctr">
               <a:buNone/>
             </a:pPr>
             <a:r>
@@ -2169,7 +1959,7 @@
           <a:bodyPr wrap="square" lIns="0" tIns="0" rIns="0" bIns="0" rtlCol="0" anchor="t"/>
           <a:lstStyle/>
           <a:p>
-            <a:pPr algn="ctr" indent="0" marL="0">
+            <a:pPr marL="0" indent="0" algn="ctr">
               <a:lnSpc>
                 <a:spcPct val="105000"/>
               </a:lnSpc>
@@ -2190,7 +1980,7 @@
             <a:endParaRPr lang="en-US" sz="1900" dirty="0"/>
           </a:p>
           <a:p>
-            <a:pPr algn="ctr" indent="0" marL="0">
+            <a:pPr marL="0" indent="0" algn="ctr">
               <a:lnSpc>
                 <a:spcPct val="105000"/>
               </a:lnSpc>
@@ -2237,6 +2027,13 @@
             <a:prstDash val="solid"/>
           </a:ln>
         </p:spPr>
+        <p:txBody>
+          <a:bodyPr/>
+          <a:lstStyle/>
+          <a:p>
+            <a:endParaRPr lang="ko-KR" altLang="en-US"/>
+          </a:p>
+        </p:txBody>
       </p:sp>
       <p:sp>
         <p:nvSpPr>
@@ -2257,6 +2054,13 @@
           </a:solidFill>
           <a:ln/>
         </p:spPr>
+        <p:txBody>
+          <a:bodyPr/>
+          <a:lstStyle/>
+          <a:p>
+            <a:endParaRPr lang="ko-KR" altLang="en-US"/>
+          </a:p>
+        </p:txBody>
       </p:sp>
       <p:sp>
         <p:nvSpPr>
@@ -2279,7 +2083,7 @@
           <a:bodyPr wrap="square" lIns="0" tIns="0" rIns="0" bIns="0" rtlCol="0" anchor="ctr"/>
           <a:lstStyle/>
           <a:p>
-            <a:pPr algn="ctr" indent="0" marL="0">
+            <a:pPr marL="0" indent="0" algn="ctr">
               <a:buNone/>
             </a:pPr>
             <a:r>
@@ -2318,7 +2122,7 @@
           <a:bodyPr wrap="square" lIns="0" tIns="0" rIns="0" bIns="0" rtlCol="0" anchor="t"/>
           <a:lstStyle/>
           <a:p>
-            <a:pPr algn="ctr" indent="0" marL="0">
+            <a:pPr marL="0" indent="0" algn="ctr">
               <a:lnSpc>
                 <a:spcPct val="105000"/>
               </a:lnSpc>
@@ -2339,7 +2143,7 @@
             <a:endParaRPr lang="en-US" sz="1900" dirty="0"/>
           </a:p>
           <a:p>
-            <a:pPr algn="ctr" indent="0" marL="0">
+            <a:pPr marL="0" indent="0" algn="ctr">
               <a:lnSpc>
                 <a:spcPct val="105000"/>
               </a:lnSpc>
@@ -2386,6 +2190,13 @@
             <a:prstDash val="solid"/>
           </a:ln>
         </p:spPr>
+        <p:txBody>
+          <a:bodyPr/>
+          <a:lstStyle/>
+          <a:p>
+            <a:endParaRPr lang="ko-KR" altLang="en-US"/>
+          </a:p>
+        </p:txBody>
       </p:sp>
       <p:sp>
         <p:nvSpPr>
@@ -2406,6 +2217,13 @@
           </a:solidFill>
           <a:ln/>
         </p:spPr>
+        <p:txBody>
+          <a:bodyPr/>
+          <a:lstStyle/>
+          <a:p>
+            <a:endParaRPr lang="ko-KR" altLang="en-US"/>
+          </a:p>
+        </p:txBody>
       </p:sp>
       <p:sp>
         <p:nvSpPr>
@@ -2428,7 +2246,7 @@
           <a:bodyPr wrap="square" lIns="0" tIns="0" rIns="0" bIns="0" rtlCol="0" anchor="ctr"/>
           <a:lstStyle/>
           <a:p>
-            <a:pPr algn="ctr" indent="0" marL="0">
+            <a:pPr marL="0" indent="0" algn="ctr">
               <a:buNone/>
             </a:pPr>
             <a:r>
@@ -2467,7 +2285,7 @@
           <a:bodyPr wrap="square" lIns="0" tIns="0" rIns="0" bIns="0" rtlCol="0" anchor="t"/>
           <a:lstStyle/>
           <a:p>
-            <a:pPr algn="ctr" indent="0" marL="0">
+            <a:pPr marL="0" indent="0" algn="ctr">
               <a:lnSpc>
                 <a:spcPct val="105000"/>
               </a:lnSpc>
@@ -2488,7 +2306,7 @@
             <a:endParaRPr lang="en-US" sz="1900" dirty="0"/>
           </a:p>
           <a:p>
-            <a:pPr algn="ctr" indent="0" marL="0">
+            <a:pPr marL="0" indent="0" algn="ctr">
               <a:lnSpc>
                 <a:spcPct val="105000"/>
               </a:lnSpc>
@@ -2530,7 +2348,7 @@
           <a:bodyPr wrap="square" lIns="0" tIns="0" rIns="0" bIns="0" rtlCol="0" anchor="ctr"/>
           <a:lstStyle/>
           <a:p>
-            <a:pPr indent="0" marL="0">
+            <a:pPr marL="0" indent="0">
               <a:buNone/>
             </a:pPr>
             <a:r>
@@ -2564,6 +2382,7 @@
         <a:solidFill>
           <a:srgbClr val="FBF6EF"/>
         </a:solidFill>
+        <a:effectLst/>
       </p:bgPr>
     </p:bg>
     <p:spTree>
@@ -2601,7 +2420,7 @@
           <a:bodyPr wrap="square" lIns="0" tIns="0" rIns="0" bIns="0" rtlCol="0" anchor="ctr"/>
           <a:lstStyle/>
           <a:p>
-            <a:pPr indent="0" marL="0">
+            <a:pPr marL="0" indent="0">
               <a:buNone/>
             </a:pPr>
             <a:r>
@@ -2643,13 +2462,20 @@
             <a:prstDash val="solid"/>
           </a:ln>
           <a:effectLst>
-            <a:outerShdw sx="100000" sy="100000" kx="0" ky="0" algn="bl" rotWithShape="0" blurRad="101600" dist="38100" dir="8100000">
+            <a:outerShdw blurRad="101600" dist="38100" dir="8100000" algn="bl" rotWithShape="0">
               <a:srgbClr val="000000">
                 <a:alpha val="12000"/>
               </a:srgbClr>
             </a:outerShdw>
           </a:effectLst>
         </p:spPr>
+        <p:txBody>
+          <a:bodyPr/>
+          <a:lstStyle/>
+          <a:p>
+            <a:endParaRPr lang="ko-KR" altLang="en-US"/>
+          </a:p>
+        </p:txBody>
       </p:sp>
       <p:sp>
         <p:nvSpPr>
@@ -2670,6 +2496,13 @@
           </a:solidFill>
           <a:ln/>
         </p:spPr>
+        <p:txBody>
+          <a:bodyPr/>
+          <a:lstStyle/>
+          <a:p>
+            <a:endParaRPr lang="ko-KR" altLang="en-US"/>
+          </a:p>
+        </p:txBody>
       </p:sp>
       <p:sp>
         <p:nvSpPr>
@@ -2692,7 +2525,7 @@
           <a:bodyPr wrap="square" lIns="0" tIns="0" rIns="0" bIns="0" rtlCol="0" anchor="ctr"/>
           <a:lstStyle/>
           <a:p>
-            <a:pPr algn="ctr" indent="0" marL="0">
+            <a:pPr marL="0" indent="0" algn="ctr">
               <a:buNone/>
             </a:pPr>
             <a:r>
@@ -2728,7 +2561,7 @@
           <a:bodyPr wrap="square" lIns="0" tIns="0" rIns="0" bIns="0" rtlCol="0" anchor="ctr"/>
           <a:lstStyle/>
           <a:p>
-            <a:pPr indent="0" marL="0">
+            <a:pPr marL="0" indent="0">
               <a:buNone/>
             </a:pPr>
             <a:r>
@@ -2746,7 +2579,7 @@
             <a:endParaRPr lang="en-US" sz="1700" dirty="0"/>
           </a:p>
           <a:p>
-            <a:pPr indent="0" marL="0">
+            <a:pPr marL="0" indent="0">
               <a:buNone/>
             </a:pPr>
             <a:r>
@@ -2788,13 +2621,20 @@
             <a:prstDash val="solid"/>
           </a:ln>
           <a:effectLst>
-            <a:outerShdw sx="100000" sy="100000" kx="0" ky="0" algn="bl" rotWithShape="0" blurRad="101600" dist="38100" dir="8100000">
+            <a:outerShdw blurRad="101600" dist="38100" dir="8100000" algn="bl" rotWithShape="0">
               <a:srgbClr val="000000">
                 <a:alpha val="12000"/>
               </a:srgbClr>
             </a:outerShdw>
           </a:effectLst>
         </p:spPr>
+        <p:txBody>
+          <a:bodyPr/>
+          <a:lstStyle/>
+          <a:p>
+            <a:endParaRPr lang="ko-KR" altLang="en-US"/>
+          </a:p>
+        </p:txBody>
       </p:sp>
       <p:sp>
         <p:nvSpPr>
@@ -2815,6 +2655,13 @@
           </a:solidFill>
           <a:ln/>
         </p:spPr>
+        <p:txBody>
+          <a:bodyPr/>
+          <a:lstStyle/>
+          <a:p>
+            <a:endParaRPr lang="ko-KR" altLang="en-US"/>
+          </a:p>
+        </p:txBody>
       </p:sp>
       <p:sp>
         <p:nvSpPr>
@@ -2837,7 +2684,7 @@
           <a:bodyPr wrap="square" lIns="0" tIns="0" rIns="0" bIns="0" rtlCol="0" anchor="ctr"/>
           <a:lstStyle/>
           <a:p>
-            <a:pPr algn="ctr" indent="0" marL="0">
+            <a:pPr marL="0" indent="0" algn="ctr">
               <a:buNone/>
             </a:pPr>
             <a:r>
@@ -2873,7 +2720,7 @@
           <a:bodyPr wrap="square" lIns="0" tIns="0" rIns="0" bIns="0" rtlCol="0" anchor="ctr"/>
           <a:lstStyle/>
           <a:p>
-            <a:pPr indent="0" marL="0">
+            <a:pPr marL="0" indent="0">
               <a:buNone/>
             </a:pPr>
             <a:r>
@@ -2891,9 +2738,20 @@
             <a:endParaRPr lang="en-US" sz="1700" dirty="0"/>
           </a:p>
           <a:p>
-            <a:pPr indent="0" marL="0">
-              <a:buNone/>
-            </a:pPr>
+            <a:pPr marL="0" indent="0">
+              <a:buNone/>
+            </a:pPr>
+            <a:r>
+              <a:rPr lang="en-US" sz="1300" dirty="0" err="1">
+                <a:solidFill>
+                  <a:srgbClr val="8A7A6D"/>
+                </a:solidFill>
+                <a:latin typeface="Malgun Gothic" pitchFamily="34" charset="0"/>
+                <a:ea typeface="Malgun Gothic" pitchFamily="34" charset="-122"/>
+                <a:cs typeface="Malgun Gothic" pitchFamily="34" charset="-120"/>
+              </a:rPr>
+              <a:t>커피빈 토큰</a:t>
+            </a:r>
             <a:r>
               <a:rPr lang="en-US" sz="1300" dirty="0">
                 <a:solidFill>
@@ -2903,7 +2761,29 @@
                 <a:ea typeface="Malgun Gothic" pitchFamily="34" charset="-122"/>
                 <a:cs typeface="Malgun Gothic" pitchFamily="34" charset="-120"/>
               </a:rPr>
-              <a:t>커피빈 코인 — 충전하고 마음 전하기</a:t>
+              <a:t> </a:t>
+            </a:r>
+            <a:r>
+              <a:rPr lang="ko-KR" altLang="en-US" sz="1300" dirty="0">
+                <a:solidFill>
+                  <a:srgbClr val="8A7A6D"/>
+                </a:solidFill>
+                <a:latin typeface="Malgun Gothic" pitchFamily="34" charset="0"/>
+                <a:ea typeface="Malgun Gothic" pitchFamily="34" charset="-122"/>
+                <a:cs typeface="Malgun Gothic" pitchFamily="34" charset="-120"/>
+              </a:rPr>
+              <a:t>토큰</a:t>
+            </a:r>
+            <a:r>
+              <a:rPr lang="en-US" sz="1300" dirty="0">
+                <a:solidFill>
+                  <a:srgbClr val="8A7A6D"/>
+                </a:solidFill>
+                <a:latin typeface="Malgun Gothic" pitchFamily="34" charset="0"/>
+                <a:ea typeface="Malgun Gothic" pitchFamily="34" charset="-122"/>
+                <a:cs typeface="Malgun Gothic" pitchFamily="34" charset="-120"/>
+              </a:rPr>
+              <a:t> — 충전하고 마음 전하기</a:t>
             </a:r>
             <a:endParaRPr lang="en-US" sz="1700" dirty="0"/>
           </a:p>
@@ -2933,13 +2813,20 @@
             <a:prstDash val="solid"/>
           </a:ln>
           <a:effectLst>
-            <a:outerShdw sx="100000" sy="100000" kx="0" ky="0" algn="bl" rotWithShape="0" blurRad="101600" dist="38100" dir="8100000">
+            <a:outerShdw blurRad="101600" dist="38100" dir="8100000" algn="bl" rotWithShape="0">
               <a:srgbClr val="000000">
                 <a:alpha val="12000"/>
               </a:srgbClr>
             </a:outerShdw>
           </a:effectLst>
         </p:spPr>
+        <p:txBody>
+          <a:bodyPr/>
+          <a:lstStyle/>
+          <a:p>
+            <a:endParaRPr lang="ko-KR" altLang="en-US"/>
+          </a:p>
+        </p:txBody>
       </p:sp>
       <p:sp>
         <p:nvSpPr>
@@ -2960,6 +2847,13 @@
           </a:solidFill>
           <a:ln/>
         </p:spPr>
+        <p:txBody>
+          <a:bodyPr/>
+          <a:lstStyle/>
+          <a:p>
+            <a:endParaRPr lang="ko-KR" altLang="en-US"/>
+          </a:p>
+        </p:txBody>
       </p:sp>
       <p:sp>
         <p:nvSpPr>
@@ -2982,7 +2876,7 @@
           <a:bodyPr wrap="square" lIns="0" tIns="0" rIns="0" bIns="0" rtlCol="0" anchor="ctr"/>
           <a:lstStyle/>
           <a:p>
-            <a:pPr algn="ctr" indent="0" marL="0">
+            <a:pPr marL="0" indent="0" algn="ctr">
               <a:buNone/>
             </a:pPr>
             <a:r>
@@ -3018,7 +2912,7 @@
           <a:bodyPr wrap="square" lIns="0" tIns="0" rIns="0" bIns="0" rtlCol="0" anchor="ctr"/>
           <a:lstStyle/>
           <a:p>
-            <a:pPr indent="0" marL="0">
+            <a:pPr marL="0" indent="0">
               <a:buNone/>
             </a:pPr>
             <a:r>
@@ -3036,7 +2930,7 @@
             <a:endParaRPr lang="en-US" sz="1700" dirty="0"/>
           </a:p>
           <a:p>
-            <a:pPr indent="0" marL="0">
+            <a:pPr marL="0" indent="0">
               <a:buNone/>
             </a:pPr>
             <a:r>
@@ -3078,13 +2972,20 @@
             <a:prstDash val="solid"/>
           </a:ln>
           <a:effectLst>
-            <a:outerShdw sx="100000" sy="100000" kx="0" ky="0" algn="bl" rotWithShape="0" blurRad="101600" dist="38100" dir="8100000">
+            <a:outerShdw blurRad="101600" dist="38100" dir="8100000" algn="bl" rotWithShape="0">
               <a:srgbClr val="000000">
                 <a:alpha val="12000"/>
               </a:srgbClr>
             </a:outerShdw>
           </a:effectLst>
         </p:spPr>
+        <p:txBody>
+          <a:bodyPr/>
+          <a:lstStyle/>
+          <a:p>
+            <a:endParaRPr lang="ko-KR" altLang="en-US"/>
+          </a:p>
+        </p:txBody>
       </p:sp>
       <p:sp>
         <p:nvSpPr>
@@ -3105,6 +3006,13 @@
           </a:solidFill>
           <a:ln/>
         </p:spPr>
+        <p:txBody>
+          <a:bodyPr/>
+          <a:lstStyle/>
+          <a:p>
+            <a:endParaRPr lang="ko-KR" altLang="en-US"/>
+          </a:p>
+        </p:txBody>
       </p:sp>
       <p:sp>
         <p:nvSpPr>
@@ -3127,7 +3035,7 @@
           <a:bodyPr wrap="square" lIns="0" tIns="0" rIns="0" bIns="0" rtlCol="0" anchor="ctr"/>
           <a:lstStyle/>
           <a:p>
-            <a:pPr algn="ctr" indent="0" marL="0">
+            <a:pPr marL="0" indent="0" algn="ctr">
               <a:buNone/>
             </a:pPr>
             <a:r>
@@ -3163,7 +3071,7 @@
           <a:bodyPr wrap="square" lIns="0" tIns="0" rIns="0" bIns="0" rtlCol="0" anchor="ctr"/>
           <a:lstStyle/>
           <a:p>
-            <a:pPr indent="0" marL="0">
+            <a:pPr marL="0" indent="0">
               <a:buNone/>
             </a:pPr>
             <a:r>
@@ -3181,7 +3089,7 @@
             <a:endParaRPr lang="en-US" sz="1700" dirty="0"/>
           </a:p>
           <a:p>
-            <a:pPr indent="0" marL="0">
+            <a:pPr marL="0" indent="0">
               <a:buNone/>
             </a:pPr>
             <a:r>
@@ -3223,13 +3131,20 @@
             <a:prstDash val="solid"/>
           </a:ln>
           <a:effectLst>
-            <a:outerShdw sx="100000" sy="100000" kx="0" ky="0" algn="bl" rotWithShape="0" blurRad="101600" dist="38100" dir="8100000">
+            <a:outerShdw blurRad="101600" dist="38100" dir="8100000" algn="bl" rotWithShape="0">
               <a:srgbClr val="000000">
                 <a:alpha val="12000"/>
               </a:srgbClr>
             </a:outerShdw>
           </a:effectLst>
         </p:spPr>
+        <p:txBody>
+          <a:bodyPr/>
+          <a:lstStyle/>
+          <a:p>
+            <a:endParaRPr lang="ko-KR" altLang="en-US"/>
+          </a:p>
+        </p:txBody>
       </p:sp>
       <p:sp>
         <p:nvSpPr>
@@ -3250,6 +3165,13 @@
           </a:solidFill>
           <a:ln/>
         </p:spPr>
+        <p:txBody>
+          <a:bodyPr/>
+          <a:lstStyle/>
+          <a:p>
+            <a:endParaRPr lang="ko-KR" altLang="en-US"/>
+          </a:p>
+        </p:txBody>
       </p:sp>
       <p:sp>
         <p:nvSpPr>
@@ -3272,7 +3194,7 @@
           <a:bodyPr wrap="square" lIns="0" tIns="0" rIns="0" bIns="0" rtlCol="0" anchor="ctr"/>
           <a:lstStyle/>
           <a:p>
-            <a:pPr algn="ctr" indent="0" marL="0">
+            <a:pPr marL="0" indent="0" algn="ctr">
               <a:buNone/>
             </a:pPr>
             <a:r>
@@ -3308,7 +3230,7 @@
           <a:bodyPr wrap="square" lIns="0" tIns="0" rIns="0" bIns="0" rtlCol="0" anchor="ctr"/>
           <a:lstStyle/>
           <a:p>
-            <a:pPr indent="0" marL="0">
+            <a:pPr marL="0" indent="0">
               <a:buNone/>
             </a:pPr>
             <a:r>
@@ -3326,7 +3248,7 @@
             <a:endParaRPr lang="en-US" sz="1700" dirty="0"/>
           </a:p>
           <a:p>
-            <a:pPr indent="0" marL="0">
+            <a:pPr marL="0" indent="0">
               <a:buNone/>
             </a:pPr>
             <a:r>
@@ -3368,13 +3290,20 @@
             <a:prstDash val="solid"/>
           </a:ln>
           <a:effectLst>
-            <a:outerShdw sx="100000" sy="100000" kx="0" ky="0" algn="bl" rotWithShape="0" blurRad="101600" dist="38100" dir="8100000">
+            <a:outerShdw blurRad="101600" dist="38100" dir="8100000" algn="bl" rotWithShape="0">
               <a:srgbClr val="000000">
                 <a:alpha val="12000"/>
               </a:srgbClr>
             </a:outerShdw>
           </a:effectLst>
         </p:spPr>
+        <p:txBody>
+          <a:bodyPr/>
+          <a:lstStyle/>
+          <a:p>
+            <a:endParaRPr lang="ko-KR" altLang="en-US"/>
+          </a:p>
+        </p:txBody>
       </p:sp>
       <p:sp>
         <p:nvSpPr>
@@ -3395,6 +3324,13 @@
           </a:solidFill>
           <a:ln/>
         </p:spPr>
+        <p:txBody>
+          <a:bodyPr/>
+          <a:lstStyle/>
+          <a:p>
+            <a:endParaRPr lang="ko-KR" altLang="en-US"/>
+          </a:p>
+        </p:txBody>
       </p:sp>
       <p:sp>
         <p:nvSpPr>
@@ -3417,7 +3353,7 @@
           <a:bodyPr wrap="square" lIns="0" tIns="0" rIns="0" bIns="0" rtlCol="0" anchor="ctr"/>
           <a:lstStyle/>
           <a:p>
-            <a:pPr algn="ctr" indent="0" marL="0">
+            <a:pPr marL="0" indent="0" algn="ctr">
               <a:buNone/>
             </a:pPr>
             <a:r>
@@ -3453,7 +3389,7 @@
           <a:bodyPr wrap="square" lIns="0" tIns="0" rIns="0" bIns="0" rtlCol="0" anchor="ctr"/>
           <a:lstStyle/>
           <a:p>
-            <a:pPr indent="0" marL="0">
+            <a:pPr marL="0" indent="0">
               <a:buNone/>
             </a:pPr>
             <a:r>
@@ -3471,7 +3407,7 @@
             <a:endParaRPr lang="en-US" sz="1700" dirty="0"/>
           </a:p>
           <a:p>
-            <a:pPr indent="0" marL="0">
+            <a:pPr marL="0" indent="0">
               <a:buNone/>
             </a:pPr>
             <a:r>
@@ -3513,13 +3449,20 @@
             <a:prstDash val="solid"/>
           </a:ln>
           <a:effectLst>
-            <a:outerShdw sx="100000" sy="100000" kx="0" ky="0" algn="bl" rotWithShape="0" blurRad="101600" dist="38100" dir="8100000">
+            <a:outerShdw blurRad="101600" dist="38100" dir="8100000" algn="bl" rotWithShape="0">
               <a:srgbClr val="000000">
                 <a:alpha val="12000"/>
               </a:srgbClr>
             </a:outerShdw>
           </a:effectLst>
         </p:spPr>
+        <p:txBody>
+          <a:bodyPr/>
+          <a:lstStyle/>
+          <a:p>
+            <a:endParaRPr lang="ko-KR" altLang="en-US"/>
+          </a:p>
+        </p:txBody>
       </p:sp>
       <p:sp>
         <p:nvSpPr>
@@ -3540,6 +3483,13 @@
           </a:solidFill>
           <a:ln/>
         </p:spPr>
+        <p:txBody>
+          <a:bodyPr/>
+          <a:lstStyle/>
+          <a:p>
+            <a:endParaRPr lang="ko-KR" altLang="en-US"/>
+          </a:p>
+        </p:txBody>
       </p:sp>
       <p:sp>
         <p:nvSpPr>
@@ -3562,7 +3512,7 @@
           <a:bodyPr wrap="square" lIns="0" tIns="0" rIns="0" bIns="0" rtlCol="0" anchor="ctr"/>
           <a:lstStyle/>
           <a:p>
-            <a:pPr algn="ctr" indent="0" marL="0">
+            <a:pPr marL="0" indent="0" algn="ctr">
               <a:buNone/>
             </a:pPr>
             <a:r>
@@ -3598,7 +3548,7 @@
           <a:bodyPr wrap="square" lIns="0" tIns="0" rIns="0" bIns="0" rtlCol="0" anchor="ctr"/>
           <a:lstStyle/>
           <a:p>
-            <a:pPr indent="0" marL="0">
+            <a:pPr marL="0" indent="0">
               <a:buNone/>
             </a:pPr>
             <a:r>
@@ -3616,7 +3566,7 @@
             <a:endParaRPr lang="en-US" sz="1700" dirty="0"/>
           </a:p>
           <a:p>
-            <a:pPr indent="0" marL="0">
+            <a:pPr marL="0" indent="0">
               <a:buNone/>
             </a:pPr>
             <a:r>
@@ -3655,7 +3605,7 @@
           <a:bodyPr wrap="square" lIns="0" tIns="0" rIns="0" bIns="0" rtlCol="0" anchor="ctr"/>
           <a:lstStyle/>
           <a:p>
-            <a:pPr indent="0" marL="0">
+            <a:pPr marL="0" indent="0">
               <a:buNone/>
             </a:pPr>
             <a:r>
@@ -3669,9 +3619,6 @@
               </a:rPr>
               <a:t>☕ Cafe.pi</a:t>
             </a:r>
-            <a:pPr indent="0" marL="0">
-              <a:buNone/>
-            </a:pPr>
             <a:r>
               <a:rPr lang="en-US" sz="1000" dirty="0">
                 <a:solidFill>
@@ -3708,7 +3655,7 @@
           <a:bodyPr wrap="square" lIns="0" tIns="0" rIns="0" bIns="0" rtlCol="0" anchor="ctr"/>
           <a:lstStyle/>
           <a:p>
-            <a:pPr algn="r" indent="0" marL="0">
+            <a:pPr marL="0" indent="0" algn="r">
               <a:buNone/>
             </a:pPr>
             <a:r>
@@ -3742,6 +3689,7 @@
         <a:solidFill>
           <a:srgbClr val="FBF6EF"/>
         </a:solidFill>
+        <a:effectLst/>
       </p:bgPr>
     </p:bg>
     <p:spTree>
@@ -3777,13 +3725,20 @@
           </a:solidFill>
           <a:ln/>
           <a:effectLst>
-            <a:outerShdw sx="100000" sy="100000" kx="0" ky="0" algn="bl" rotWithShape="0" blurRad="101600" dist="38100" dir="8100000">
+            <a:outerShdw blurRad="101600" dist="38100" dir="8100000" algn="bl" rotWithShape="0">
               <a:srgbClr val="000000">
                 <a:alpha val="12000"/>
               </a:srgbClr>
             </a:outerShdw>
           </a:effectLst>
         </p:spPr>
+        <p:txBody>
+          <a:bodyPr/>
+          <a:lstStyle/>
+          <a:p>
+            <a:endParaRPr lang="ko-KR" altLang="en-US"/>
+          </a:p>
+        </p:txBody>
       </p:sp>
       <p:sp>
         <p:nvSpPr>
@@ -3806,7 +3761,7 @@
           <a:bodyPr wrap="square" lIns="0" tIns="0" rIns="0" bIns="0" rtlCol="0" anchor="ctr"/>
           <a:lstStyle/>
           <a:p>
-            <a:pPr algn="ctr" indent="0" marL="0">
+            <a:pPr marL="0" indent="0" algn="ctr">
               <a:buNone/>
             </a:pPr>
             <a:r>
@@ -3845,7 +3800,7 @@
           <a:bodyPr wrap="square" lIns="0" tIns="0" rIns="0" bIns="0" rtlCol="0" anchor="ctr"/>
           <a:lstStyle/>
           <a:p>
-            <a:pPr indent="0" marL="0">
+            <a:pPr marL="0" indent="0">
               <a:buNone/>
             </a:pPr>
             <a:r>
@@ -3884,7 +3839,7 @@
           <a:bodyPr wrap="square" lIns="0" tIns="0" rIns="0" bIns="0" rtlCol="0" anchor="ctr"/>
           <a:lstStyle/>
           <a:p>
-            <a:pPr indent="0" marL="0">
+            <a:pPr marL="0" indent="0">
               <a:buNone/>
             </a:pPr>
             <a:r>
@@ -3926,13 +3881,20 @@
             <a:prstDash val="solid"/>
           </a:ln>
           <a:effectLst>
-            <a:outerShdw sx="100000" sy="100000" kx="0" ky="0" algn="bl" rotWithShape="0" blurRad="101600" dist="38100" dir="8100000">
+            <a:outerShdw blurRad="101600" dist="38100" dir="8100000" algn="bl" rotWithShape="0">
               <a:srgbClr val="000000">
                 <a:alpha val="12000"/>
               </a:srgbClr>
             </a:outerShdw>
           </a:effectLst>
         </p:spPr>
+        <p:txBody>
+          <a:bodyPr/>
+          <a:lstStyle/>
+          <a:p>
+            <a:endParaRPr lang="ko-KR" altLang="en-US"/>
+          </a:p>
+        </p:txBody>
       </p:sp>
       <p:sp>
         <p:nvSpPr>
@@ -3953,6 +3915,13 @@
           </a:solidFill>
           <a:ln/>
         </p:spPr>
+        <p:txBody>
+          <a:bodyPr/>
+          <a:lstStyle/>
+          <a:p>
+            <a:endParaRPr lang="ko-KR" altLang="en-US"/>
+          </a:p>
+        </p:txBody>
       </p:sp>
       <p:sp>
         <p:nvSpPr>
@@ -3975,7 +3944,7 @@
           <a:bodyPr wrap="square" lIns="0" tIns="0" rIns="0" bIns="0" rtlCol="0" anchor="ctr"/>
           <a:lstStyle/>
           <a:p>
-            <a:pPr algn="ctr" indent="0" marL="0">
+            <a:pPr marL="0" indent="0" algn="ctr">
               <a:buNone/>
             </a:pPr>
             <a:r>
@@ -4014,7 +3983,7 @@
           <a:bodyPr wrap="square" lIns="0" tIns="0" rIns="0" bIns="0" rtlCol="0" anchor="ctr"/>
           <a:lstStyle/>
           <a:p>
-            <a:pPr indent="0" marL="0">
+            <a:pPr marL="0" indent="0">
               <a:buNone/>
             </a:pPr>
             <a:r>
@@ -4056,6 +4025,13 @@
             <a:prstDash val="solid"/>
           </a:ln>
         </p:spPr>
+        <p:txBody>
+          <a:bodyPr/>
+          <a:lstStyle/>
+          <a:p>
+            <a:endParaRPr lang="ko-KR" altLang="en-US"/>
+          </a:p>
+        </p:txBody>
       </p:sp>
       <p:sp>
         <p:nvSpPr>
@@ -4078,11 +4054,11 @@
           <a:bodyPr wrap="square" lIns="0" tIns="0" rIns="0" bIns="0" rtlCol="0" anchor="ctr"/>
           <a:lstStyle/>
           <a:p>
-            <a:pPr algn="ctr" indent="0" marL="0">
-              <a:buNone/>
-            </a:pPr>
-            <a:r>
-              <a:rPr lang="en-US" sz="3400" b="1" spc="200" kern="0" dirty="0">
+            <a:pPr marL="0" indent="0" algn="ctr">
+              <a:buNone/>
+            </a:pPr>
+            <a:r>
+              <a:rPr lang="en-US" sz="3400" b="1" kern="0" spc="200" dirty="0">
                 <a:solidFill>
                   <a:srgbClr val="B9740A"/>
                 </a:solidFill>
@@ -4117,7 +4093,7 @@
           <a:bodyPr wrap="square" lIns="0" tIns="0" rIns="0" bIns="0" rtlCol="0" anchor="ctr"/>
           <a:lstStyle/>
           <a:p>
-            <a:pPr algn="ctr" indent="0" marL="0">
+            <a:pPr marL="0" indent="0" algn="ctr">
               <a:buNone/>
             </a:pPr>
             <a:r>
@@ -4156,6 +4132,13 @@
           </a:solidFill>
           <a:ln/>
         </p:spPr>
+        <p:txBody>
+          <a:bodyPr/>
+          <a:lstStyle/>
+          <a:p>
+            <a:endParaRPr lang="ko-KR" altLang="en-US"/>
+          </a:p>
+        </p:txBody>
       </p:sp>
       <p:sp>
         <p:nvSpPr>
@@ -4178,7 +4161,7 @@
           <a:bodyPr wrap="square" lIns="0" tIns="0" rIns="0" bIns="0" rtlCol="0" anchor="ctr"/>
           <a:lstStyle/>
           <a:p>
-            <a:pPr algn="ctr" indent="0" marL="0">
+            <a:pPr marL="0" indent="0" algn="ctr">
               <a:buNone/>
             </a:pPr>
             <a:r>
@@ -4217,7 +4200,7 @@
           <a:bodyPr wrap="square" lIns="0" tIns="0" rIns="0" bIns="0" rtlCol="0" anchor="ctr"/>
           <a:lstStyle/>
           <a:p>
-            <a:pPr algn="ctr" indent="0" marL="0">
+            <a:pPr marL="0" indent="0" algn="ctr">
               <a:buNone/>
             </a:pPr>
             <a:r>
@@ -4256,7 +4239,7 @@
           <a:bodyPr wrap="square" lIns="0" tIns="0" rIns="0" bIns="0" rtlCol="0" anchor="ctr"/>
           <a:lstStyle/>
           <a:p>
-            <a:pPr algn="ctr" indent="0" marL="0">
+            <a:pPr marL="0" indent="0" algn="ctr">
               <a:buNone/>
             </a:pPr>
             <a:r>
@@ -4273,7 +4256,7 @@
             <a:endParaRPr lang="en-US" sz="1100" dirty="0"/>
           </a:p>
           <a:p>
-            <a:pPr algn="ctr" indent="0" marL="0">
+            <a:pPr marL="0" indent="0" algn="ctr">
               <a:buNone/>
             </a:pPr>
             <a:r>
@@ -4315,13 +4298,20 @@
             <a:prstDash val="solid"/>
           </a:ln>
           <a:effectLst>
-            <a:outerShdw sx="100000" sy="100000" kx="0" ky="0" algn="bl" rotWithShape="0" blurRad="101600" dist="38100" dir="8100000">
+            <a:outerShdw blurRad="101600" dist="38100" dir="8100000" algn="bl" rotWithShape="0">
               <a:srgbClr val="000000">
                 <a:alpha val="12000"/>
               </a:srgbClr>
             </a:outerShdw>
           </a:effectLst>
         </p:spPr>
+        <p:txBody>
+          <a:bodyPr/>
+          <a:lstStyle/>
+          <a:p>
+            <a:endParaRPr lang="ko-KR" altLang="en-US"/>
+          </a:p>
+        </p:txBody>
       </p:sp>
       <p:sp>
         <p:nvSpPr>
@@ -4342,6 +4332,13 @@
           </a:solidFill>
           <a:ln/>
         </p:spPr>
+        <p:txBody>
+          <a:bodyPr/>
+          <a:lstStyle/>
+          <a:p>
+            <a:endParaRPr lang="ko-KR" altLang="en-US"/>
+          </a:p>
+        </p:txBody>
       </p:sp>
       <p:sp>
         <p:nvSpPr>
@@ -4364,7 +4361,7 @@
           <a:bodyPr wrap="square" lIns="0" tIns="0" rIns="0" bIns="0" rtlCol="0" anchor="ctr"/>
           <a:lstStyle/>
           <a:p>
-            <a:pPr algn="ctr" indent="0" marL="0">
+            <a:pPr marL="0" indent="0" algn="ctr">
               <a:buNone/>
             </a:pPr>
             <a:r>
@@ -4403,7 +4400,7 @@
           <a:bodyPr wrap="square" lIns="0" tIns="0" rIns="0" bIns="0" rtlCol="0" anchor="ctr"/>
           <a:lstStyle/>
           <a:p>
-            <a:pPr indent="0" marL="0">
+            <a:pPr marL="0" indent="0">
               <a:buNone/>
             </a:pPr>
             <a:r>
@@ -4447,6 +4444,13 @@
             <a:prstDash val="solid"/>
           </a:ln>
         </p:spPr>
+        <p:txBody>
+          <a:bodyPr/>
+          <a:lstStyle/>
+          <a:p>
+            <a:endParaRPr lang="ko-KR" altLang="en-US"/>
+          </a:p>
+        </p:txBody>
       </p:sp>
       <p:sp>
         <p:nvSpPr>
@@ -4469,7 +4473,7 @@
           <a:bodyPr wrap="square" lIns="0" tIns="0" rIns="0" bIns="0" rtlCol="0" anchor="ctr"/>
           <a:lstStyle/>
           <a:p>
-            <a:pPr indent="0" marL="0">
+            <a:pPr marL="0" indent="0">
               <a:buNone/>
             </a:pPr>
             <a:r>
@@ -4508,6 +4512,13 @@
           </a:solidFill>
           <a:ln/>
         </p:spPr>
+        <p:txBody>
+          <a:bodyPr/>
+          <a:lstStyle/>
+          <a:p>
+            <a:endParaRPr lang="ko-KR" altLang="en-US"/>
+          </a:p>
+        </p:txBody>
       </p:sp>
       <p:sp>
         <p:nvSpPr>
@@ -4530,7 +4541,7 @@
           <a:bodyPr wrap="square" lIns="0" tIns="0" rIns="0" bIns="0" rtlCol="0" anchor="ctr"/>
           <a:lstStyle/>
           <a:p>
-            <a:pPr algn="ctr" indent="0" marL="0">
+            <a:pPr marL="0" indent="0" algn="ctr">
               <a:buNone/>
             </a:pPr>
             <a:r>
@@ -4574,6 +4585,13 @@
             <a:prstDash val="solid"/>
           </a:ln>
         </p:spPr>
+        <p:txBody>
+          <a:bodyPr/>
+          <a:lstStyle/>
+          <a:p>
+            <a:endParaRPr lang="ko-KR" altLang="en-US"/>
+          </a:p>
+        </p:txBody>
       </p:sp>
       <p:sp>
         <p:nvSpPr>
@@ -4596,7 +4614,7 @@
           <a:bodyPr wrap="square" lIns="0" tIns="0" rIns="0" bIns="0" rtlCol="0" anchor="ctr"/>
           <a:lstStyle/>
           <a:p>
-            <a:pPr algn="ctr" indent="0" marL="0">
+            <a:pPr marL="0" indent="0" algn="ctr">
               <a:buNone/>
             </a:pPr>
             <a:r>
@@ -4640,6 +4658,13 @@
             <a:prstDash val="solid"/>
           </a:ln>
         </p:spPr>
+        <p:txBody>
+          <a:bodyPr/>
+          <a:lstStyle/>
+          <a:p>
+            <a:endParaRPr lang="ko-KR" altLang="en-US"/>
+          </a:p>
+        </p:txBody>
       </p:sp>
       <p:sp>
         <p:nvSpPr>
@@ -4662,7 +4687,7 @@
           <a:bodyPr wrap="square" lIns="0" tIns="0" rIns="0" bIns="0" rtlCol="0" anchor="ctr"/>
           <a:lstStyle/>
           <a:p>
-            <a:pPr indent="0" marL="0">
+            <a:pPr marL="0" indent="0">
               <a:buNone/>
             </a:pPr>
             <a:r>
@@ -4676,9 +4701,6 @@
               </a:rPr>
               <a:t>💡 쉽게 말하면   </a:t>
             </a:r>
-            <a:pPr indent="0" marL="0">
-              <a:buNone/>
-            </a:pPr>
             <a:r>
               <a:rPr lang="en-US" sz="1350" dirty="0">
                 <a:solidFill>
@@ -4715,7 +4737,7 @@
           <a:bodyPr wrap="square" lIns="0" tIns="0" rIns="0" bIns="0" rtlCol="0" anchor="ctr"/>
           <a:lstStyle/>
           <a:p>
-            <a:pPr indent="0" marL="0">
+            <a:pPr marL="0" indent="0">
               <a:buNone/>
             </a:pPr>
             <a:r>
@@ -4729,9 +4751,6 @@
               </a:rPr>
               <a:t>☕ Cafe.pi</a:t>
             </a:r>
-            <a:pPr indent="0" marL="0">
-              <a:buNone/>
-            </a:pPr>
             <a:r>
               <a:rPr lang="en-US" sz="1000" dirty="0">
                 <a:solidFill>
@@ -4768,7 +4787,7 @@
           <a:bodyPr wrap="square" lIns="0" tIns="0" rIns="0" bIns="0" rtlCol="0" anchor="ctr"/>
           <a:lstStyle/>
           <a:p>
-            <a:pPr algn="r" indent="0" marL="0">
+            <a:pPr marL="0" indent="0" algn="r">
               <a:buNone/>
             </a:pPr>
             <a:r>
@@ -4802,6 +4821,7 @@
         <a:solidFill>
           <a:srgbClr val="FBF6EF"/>
         </a:solidFill>
+        <a:effectLst/>
       </p:bgPr>
     </p:bg>
     <p:spTree>
@@ -4837,13 +4857,20 @@
           </a:solidFill>
           <a:ln/>
           <a:effectLst>
-            <a:outerShdw sx="100000" sy="100000" kx="0" ky="0" algn="bl" rotWithShape="0" blurRad="101600" dist="38100" dir="8100000">
+            <a:outerShdw blurRad="101600" dist="38100" dir="8100000" algn="bl" rotWithShape="0">
               <a:srgbClr val="000000">
                 <a:alpha val="12000"/>
               </a:srgbClr>
             </a:outerShdw>
           </a:effectLst>
         </p:spPr>
+        <p:txBody>
+          <a:bodyPr/>
+          <a:lstStyle/>
+          <a:p>
+            <a:endParaRPr lang="ko-KR" altLang="en-US"/>
+          </a:p>
+        </p:txBody>
       </p:sp>
       <p:sp>
         <p:nvSpPr>
@@ -4866,7 +4893,7 @@
           <a:bodyPr wrap="square" lIns="0" tIns="0" rIns="0" bIns="0" rtlCol="0" anchor="ctr"/>
           <a:lstStyle/>
           <a:p>
-            <a:pPr algn="ctr" indent="0" marL="0">
+            <a:pPr marL="0" indent="0" algn="ctr">
               <a:buNone/>
             </a:pPr>
             <a:r>
@@ -4905,7 +4932,7 @@
           <a:bodyPr wrap="square" lIns="0" tIns="0" rIns="0" bIns="0" rtlCol="0" anchor="ctr"/>
           <a:lstStyle/>
           <a:p>
-            <a:pPr indent="0" marL="0">
+            <a:pPr marL="0" indent="0">
               <a:buNone/>
             </a:pPr>
             <a:r>
@@ -4917,7 +4944,7 @@
                 <a:ea typeface="Malgun Gothic" pitchFamily="34" charset="-122"/>
                 <a:cs typeface="Malgun Gothic" pitchFamily="34" charset="-120"/>
               </a:rPr>
-              <a:t>☕  Bean(커피빈) 이해하기</a:t>
+              <a:t>☕  Bean(커피빈 토큰) 이해하기</a:t>
             </a:r>
             <a:endParaRPr lang="en-US" sz="3200" dirty="0"/>
           </a:p>
@@ -4944,7 +4971,7 @@
           <a:bodyPr wrap="square" lIns="0" tIns="0" rIns="0" bIns="0" rtlCol="0" anchor="ctr"/>
           <a:lstStyle/>
           <a:p>
-            <a:pPr indent="0" marL="0">
+            <a:pPr marL="0" indent="0">
               <a:buNone/>
             </a:pPr>
             <a:r>
@@ -4956,7 +4983,62 @@
                 <a:ea typeface="Malgun Gothic" pitchFamily="34" charset="-122"/>
                 <a:cs typeface="Malgun Gothic" pitchFamily="34" charset="-120"/>
               </a:rPr>
-              <a:t>커피빈은 앱 안에서 마음을 전하는 작은 코인이에요. 충전해서 쓰고, 고마운 사람에게 보냅니다.</a:t>
+              <a:t>커피빈 토큰은 앱 안에서 마음을 전하는 </a:t>
+            </a:r>
+            <a:r>
+              <a:rPr lang="en-US" sz="1600" dirty="0" err="1">
+                <a:solidFill>
+                  <a:srgbClr val="8A7A6D"/>
+                </a:solidFill>
+                <a:latin typeface="Malgun Gothic" pitchFamily="34" charset="0"/>
+                <a:ea typeface="Malgun Gothic" pitchFamily="34" charset="-122"/>
+                <a:cs typeface="Malgun Gothic" pitchFamily="34" charset="-120"/>
+              </a:rPr>
+              <a:t>작은</a:t>
+            </a:r>
+            <a:r>
+              <a:rPr lang="en-US" sz="1600" dirty="0">
+                <a:solidFill>
+                  <a:srgbClr val="8A7A6D"/>
+                </a:solidFill>
+                <a:latin typeface="Malgun Gothic" pitchFamily="34" charset="0"/>
+                <a:ea typeface="Malgun Gothic" pitchFamily="34" charset="-122"/>
+                <a:cs typeface="Malgun Gothic" pitchFamily="34" charset="-120"/>
+              </a:rPr>
+              <a:t> </a:t>
+            </a:r>
+            <a:r>
+              <a:rPr lang="ko-KR" altLang="en-US" sz="1600" dirty="0">
+                <a:solidFill>
+                  <a:srgbClr val="8A7A6D"/>
+                </a:solidFill>
+                <a:latin typeface="Malgun Gothic" pitchFamily="34" charset="0"/>
+                <a:ea typeface="Malgun Gothic" pitchFamily="34" charset="-122"/>
+                <a:cs typeface="Malgun Gothic" pitchFamily="34" charset="-120"/>
+              </a:rPr>
+              <a:t>토큰</a:t>
+            </a:r>
+            <a:r>
+              <a:rPr lang="en-US" sz="1600" dirty="0" err="1">
+                <a:solidFill>
+                  <a:srgbClr val="8A7A6D"/>
+                </a:solidFill>
+                <a:latin typeface="Malgun Gothic" pitchFamily="34" charset="0"/>
+                <a:ea typeface="Malgun Gothic" pitchFamily="34" charset="-122"/>
+                <a:cs typeface="Malgun Gothic" pitchFamily="34" charset="-120"/>
+              </a:rPr>
+              <a:t>이에요</a:t>
+            </a:r>
+            <a:r>
+              <a:rPr lang="en-US" sz="1600" dirty="0">
+                <a:solidFill>
+                  <a:srgbClr val="8A7A6D"/>
+                </a:solidFill>
+                <a:latin typeface="Malgun Gothic" pitchFamily="34" charset="0"/>
+                <a:ea typeface="Malgun Gothic" pitchFamily="34" charset="-122"/>
+                <a:cs typeface="Malgun Gothic" pitchFamily="34" charset="-120"/>
+              </a:rPr>
+              <a:t>. 충전해서 쓰고, 고마운 사람에게 보냅니다.</a:t>
             </a:r>
             <a:endParaRPr lang="en-US" sz="1600" dirty="0"/>
           </a:p>
@@ -4986,13 +5068,20 @@
             <a:prstDash val="solid"/>
           </a:ln>
           <a:effectLst>
-            <a:outerShdw sx="100000" sy="100000" kx="0" ky="0" algn="bl" rotWithShape="0" blurRad="101600" dist="38100" dir="8100000">
+            <a:outerShdw blurRad="101600" dist="38100" dir="8100000" algn="bl" rotWithShape="0">
               <a:srgbClr val="000000">
                 <a:alpha val="12000"/>
               </a:srgbClr>
             </a:outerShdw>
           </a:effectLst>
         </p:spPr>
+        <p:txBody>
+          <a:bodyPr/>
+          <a:lstStyle/>
+          <a:p>
+            <a:endParaRPr lang="ko-KR" altLang="en-US"/>
+          </a:p>
+        </p:txBody>
       </p:sp>
       <p:sp>
         <p:nvSpPr>
@@ -5013,6 +5102,13 @@
           </a:solidFill>
           <a:ln/>
         </p:spPr>
+        <p:txBody>
+          <a:bodyPr/>
+          <a:lstStyle/>
+          <a:p>
+            <a:endParaRPr lang="ko-KR" altLang="en-US"/>
+          </a:p>
+        </p:txBody>
       </p:sp>
       <p:sp>
         <p:nvSpPr>
@@ -5033,6 +5129,13 @@
           </a:solidFill>
           <a:ln/>
         </p:spPr>
+        <p:txBody>
+          <a:bodyPr/>
+          <a:lstStyle/>
+          <a:p>
+            <a:endParaRPr lang="ko-KR" altLang="en-US"/>
+          </a:p>
+        </p:txBody>
       </p:sp>
       <p:sp>
         <p:nvSpPr>
@@ -5055,7 +5158,7 @@
           <a:bodyPr wrap="square" lIns="0" tIns="0" rIns="0" bIns="0" rtlCol="0" anchor="ctr"/>
           <a:lstStyle/>
           <a:p>
-            <a:pPr algn="ctr" indent="0" marL="0">
+            <a:pPr marL="0" indent="0" algn="ctr">
               <a:buNone/>
             </a:pPr>
             <a:r>
@@ -5094,7 +5197,7 @@
           <a:bodyPr wrap="square" lIns="0" tIns="0" rIns="0" bIns="0" rtlCol="0" anchor="ctr"/>
           <a:lstStyle/>
           <a:p>
-            <a:pPr indent="0" marL="0">
+            <a:pPr marL="0" indent="0">
               <a:lnSpc>
                 <a:spcPct val="102000"/>
               </a:lnSpc>
@@ -5115,7 +5218,7 @@
             <a:endParaRPr lang="en-US" sz="1700" dirty="0"/>
           </a:p>
           <a:p>
-            <a:pPr indent="0" marL="0">
+            <a:pPr marL="0" indent="0">
               <a:lnSpc>
                 <a:spcPct val="102000"/>
               </a:lnSpc>
@@ -5130,7 +5233,51 @@
                 <a:ea typeface="Malgun Gothic" pitchFamily="34" charset="-122"/>
                 <a:cs typeface="Malgun Gothic" pitchFamily="34" charset="-120"/>
               </a:rPr>
-              <a:t>카페에서 고마운 사람에게 톡 보내는 "커피빈 코인(☕)"이에요. 칭찬·응원·감사를 숫자 대신 커피빈으로 표현합니다.</a:t>
+              <a:t>카페에서 고마운 사람에게 톡 보내는 "</a:t>
+            </a:r>
+            <a:r>
+              <a:rPr lang="en-US" sz="1350" dirty="0" err="1">
+                <a:solidFill>
+                  <a:srgbClr val="8A7A6D"/>
+                </a:solidFill>
+                <a:latin typeface="Malgun Gothic" pitchFamily="34" charset="0"/>
+                <a:ea typeface="Malgun Gothic" pitchFamily="34" charset="-122"/>
+                <a:cs typeface="Malgun Gothic" pitchFamily="34" charset="-120"/>
+              </a:rPr>
+              <a:t>커피빈 토큰</a:t>
+            </a:r>
+            <a:r>
+              <a:rPr lang="en-US" sz="1350" dirty="0">
+                <a:solidFill>
+                  <a:srgbClr val="8A7A6D"/>
+                </a:solidFill>
+                <a:latin typeface="Malgun Gothic" pitchFamily="34" charset="0"/>
+                <a:ea typeface="Malgun Gothic" pitchFamily="34" charset="-122"/>
+                <a:cs typeface="Malgun Gothic" pitchFamily="34" charset="-120"/>
+              </a:rPr>
+              <a:t> </a:t>
+            </a:r>
+            <a:r>
+              <a:rPr lang="ko-KR" altLang="en-US" sz="1350" dirty="0">
+                <a:solidFill>
+                  <a:srgbClr val="8A7A6D"/>
+                </a:solidFill>
+                <a:latin typeface="Malgun Gothic" pitchFamily="34" charset="0"/>
+                <a:ea typeface="Malgun Gothic" pitchFamily="34" charset="-122"/>
+                <a:cs typeface="Malgun Gothic" pitchFamily="34" charset="-120"/>
+              </a:rPr>
+              <a:t>토큰</a:t>
+            </a:r>
+            <a:r>
+              <a:rPr lang="en-US" sz="1350" dirty="0">
+                <a:solidFill>
+                  <a:srgbClr val="8A7A6D"/>
+                </a:solidFill>
+                <a:latin typeface="Malgun Gothic" pitchFamily="34" charset="0"/>
+                <a:ea typeface="Malgun Gothic" pitchFamily="34" charset="-122"/>
+                <a:cs typeface="Malgun Gothic" pitchFamily="34" charset="-120"/>
+              </a:rPr>
+              <a:t>(☕)"이에요. 칭찬·응원·감사를 숫자 대신 커피빈 토큰으로 표현합니다.</a:t>
             </a:r>
             <a:endParaRPr lang="en-US" sz="1700" dirty="0"/>
           </a:p>
@@ -5160,13 +5307,20 @@
             <a:prstDash val="solid"/>
           </a:ln>
           <a:effectLst>
-            <a:outerShdw sx="100000" sy="100000" kx="0" ky="0" algn="bl" rotWithShape="0" blurRad="101600" dist="38100" dir="8100000">
+            <a:outerShdw blurRad="101600" dist="38100" dir="8100000" algn="bl" rotWithShape="0">
               <a:srgbClr val="000000">
                 <a:alpha val="12000"/>
               </a:srgbClr>
             </a:outerShdw>
           </a:effectLst>
         </p:spPr>
+        <p:txBody>
+          <a:bodyPr/>
+          <a:lstStyle/>
+          <a:p>
+            <a:endParaRPr lang="ko-KR" altLang="en-US"/>
+          </a:p>
+        </p:txBody>
       </p:sp>
       <p:sp>
         <p:nvSpPr>
@@ -5187,6 +5341,13 @@
           </a:solidFill>
           <a:ln/>
         </p:spPr>
+        <p:txBody>
+          <a:bodyPr/>
+          <a:lstStyle/>
+          <a:p>
+            <a:endParaRPr lang="ko-KR" altLang="en-US"/>
+          </a:p>
+        </p:txBody>
       </p:sp>
       <p:sp>
         <p:nvSpPr>
@@ -5207,6 +5368,13 @@
           </a:solidFill>
           <a:ln/>
         </p:spPr>
+        <p:txBody>
+          <a:bodyPr/>
+          <a:lstStyle/>
+          <a:p>
+            <a:endParaRPr lang="ko-KR" altLang="en-US"/>
+          </a:p>
+        </p:txBody>
       </p:sp>
       <p:sp>
         <p:nvSpPr>
@@ -5229,7 +5397,7 @@
           <a:bodyPr wrap="square" lIns="0" tIns="0" rIns="0" bIns="0" rtlCol="0" anchor="ctr"/>
           <a:lstStyle/>
           <a:p>
-            <a:pPr algn="ctr" indent="0" marL="0">
+            <a:pPr marL="0" indent="0" algn="ctr">
               <a:buNone/>
             </a:pPr>
             <a:r>
@@ -5268,7 +5436,7 @@
           <a:bodyPr wrap="square" lIns="0" tIns="0" rIns="0" bIns="0" rtlCol="0" anchor="ctr"/>
           <a:lstStyle/>
           <a:p>
-            <a:pPr indent="0" marL="0">
+            <a:pPr marL="0" indent="0">
               <a:lnSpc>
                 <a:spcPct val="102000"/>
               </a:lnSpc>
@@ -5289,7 +5457,7 @@
             <a:endParaRPr lang="en-US" sz="1700" dirty="0"/>
           </a:p>
           <a:p>
-            <a:pPr indent="0" marL="0">
+            <a:pPr marL="0" indent="0">
               <a:lnSpc>
                 <a:spcPct val="102000"/>
               </a:lnSpc>
@@ -5304,7 +5472,7 @@
                 <a:ea typeface="Malgun Gothic" pitchFamily="34" charset="-122"/>
                 <a:cs typeface="Malgun Gothic" pitchFamily="34" charset="-120"/>
               </a:rPr>
-              <a:t>Pi로 커피빈을 충전해요. 충전 버튼을 누르고 원하는 만큼 고른 뒤 Pi로 결제하면 내 커피빈이 쌓입니다.</a:t>
+              <a:t>Pi로 커피빈 토큰을 충전해요. 충전 버튼을 누르고 원하는 만큼 고른 뒤 Pi로 결제하면 내 커피빈 토큰이 쌓입니다.</a:t>
             </a:r>
             <a:endParaRPr lang="en-US" sz="1700" dirty="0"/>
           </a:p>
@@ -5334,13 +5502,20 @@
             <a:prstDash val="solid"/>
           </a:ln>
           <a:effectLst>
-            <a:outerShdw sx="100000" sy="100000" kx="0" ky="0" algn="bl" rotWithShape="0" blurRad="101600" dist="38100" dir="8100000">
+            <a:outerShdw blurRad="101600" dist="38100" dir="8100000" algn="bl" rotWithShape="0">
               <a:srgbClr val="000000">
                 <a:alpha val="12000"/>
               </a:srgbClr>
             </a:outerShdw>
           </a:effectLst>
         </p:spPr>
+        <p:txBody>
+          <a:bodyPr/>
+          <a:lstStyle/>
+          <a:p>
+            <a:endParaRPr lang="ko-KR" altLang="en-US"/>
+          </a:p>
+        </p:txBody>
       </p:sp>
       <p:sp>
         <p:nvSpPr>
@@ -5361,6 +5536,13 @@
           </a:solidFill>
           <a:ln/>
         </p:spPr>
+        <p:txBody>
+          <a:bodyPr/>
+          <a:lstStyle/>
+          <a:p>
+            <a:endParaRPr lang="ko-KR" altLang="en-US"/>
+          </a:p>
+        </p:txBody>
       </p:sp>
       <p:sp>
         <p:nvSpPr>
@@ -5381,6 +5563,13 @@
           </a:solidFill>
           <a:ln/>
         </p:spPr>
+        <p:txBody>
+          <a:bodyPr/>
+          <a:lstStyle/>
+          <a:p>
+            <a:endParaRPr lang="ko-KR" altLang="en-US"/>
+          </a:p>
+        </p:txBody>
       </p:sp>
       <p:sp>
         <p:nvSpPr>
@@ -5403,7 +5592,7 @@
           <a:bodyPr wrap="square" lIns="0" tIns="0" rIns="0" bIns="0" rtlCol="0" anchor="ctr"/>
           <a:lstStyle/>
           <a:p>
-            <a:pPr algn="ctr" indent="0" marL="0">
+            <a:pPr marL="0" indent="0" algn="ctr">
               <a:buNone/>
             </a:pPr>
             <a:r>
@@ -5442,7 +5631,7 @@
           <a:bodyPr wrap="square" lIns="0" tIns="0" rIns="0" bIns="0" rtlCol="0" anchor="ctr"/>
           <a:lstStyle/>
           <a:p>
-            <a:pPr indent="0" marL="0">
+            <a:pPr marL="0" indent="0">
               <a:lnSpc>
                 <a:spcPct val="102000"/>
               </a:lnSpc>
@@ -5463,7 +5652,7 @@
             <a:endParaRPr lang="en-US" sz="1700" dirty="0"/>
           </a:p>
           <a:p>
-            <a:pPr indent="0" marL="0">
+            <a:pPr marL="0" indent="0">
               <a:lnSpc>
                 <a:spcPct val="102000"/>
               </a:lnSpc>
@@ -5478,7 +5667,7 @@
                 <a:ea typeface="Malgun Gothic" pitchFamily="34" charset="-122"/>
                 <a:cs typeface="Malgun Gothic" pitchFamily="34" charset="-120"/>
               </a:rPr>
-              <a:t>대화방에서 상대에게 "커피빈 보내기"를 누르면 마음이 전달돼요. 받은 사람은 알림으로 확인합니다.</a:t>
+              <a:t>대화방에서 상대에게 "커피빈 토큰 보내기"를 누르면 마음이 전달돼요. 받은 사람은 알림으로 확인합니다.</a:t>
             </a:r>
             <a:endParaRPr lang="en-US" sz="1700" dirty="0"/>
           </a:p>
@@ -5510,6 +5699,13 @@
             <a:prstDash val="solid"/>
           </a:ln>
         </p:spPr>
+        <p:txBody>
+          <a:bodyPr/>
+          <a:lstStyle/>
+          <a:p>
+            <a:endParaRPr lang="ko-KR" altLang="en-US"/>
+          </a:p>
+        </p:txBody>
       </p:sp>
       <p:sp>
         <p:nvSpPr>
@@ -5532,7 +5728,7 @@
           <a:bodyPr wrap="square" lIns="0" tIns="0" rIns="0" bIns="0" rtlCol="0" anchor="ctr"/>
           <a:lstStyle/>
           <a:p>
-            <a:pPr indent="0" marL="0">
+            <a:pPr marL="0" indent="0">
               <a:buNone/>
             </a:pPr>
             <a:r>
@@ -5546,9 +5742,6 @@
               </a:rPr>
               <a:t>💡 쉽게 말하면   </a:t>
             </a:r>
-            <a:pPr indent="0" marL="0">
-              <a:buNone/>
-            </a:pPr>
             <a:r>
               <a:rPr lang="en-US" sz="1350" dirty="0">
                 <a:solidFill>
@@ -5558,7 +5751,7 @@
                 <a:ea typeface="Malgun Gothic" pitchFamily="34" charset="-122"/>
                 <a:cs typeface="Malgun Gothic" pitchFamily="34" charset="-120"/>
               </a:rPr>
-              <a:t>커피 한 잔 대접하듯, 앱 안에서 "커피빈(Bean)"으로 따뜻한 마음을 건네는 거예요. ☕</a:t>
+              <a:t>커피 한 잔 대접하듯, 앱 안에서 "커피빈 토큰(Bean)"으로 따뜻한 마음을 건네는 거예요. ☕</a:t>
             </a:r>
             <a:endParaRPr lang="en-US" sz="1350" dirty="0"/>
           </a:p>
@@ -5585,7 +5778,7 @@
           <a:bodyPr wrap="square" lIns="0" tIns="0" rIns="0" bIns="0" rtlCol="0" anchor="ctr"/>
           <a:lstStyle/>
           <a:p>
-            <a:pPr indent="0" marL="0">
+            <a:pPr marL="0" indent="0">
               <a:buNone/>
             </a:pPr>
             <a:r>
@@ -5599,9 +5792,6 @@
               </a:rPr>
               <a:t>☕ Cafe.pi</a:t>
             </a:r>
-            <a:pPr indent="0" marL="0">
-              <a:buNone/>
-            </a:pPr>
             <a:r>
               <a:rPr lang="en-US" sz="1000" dirty="0">
                 <a:solidFill>
@@ -5638,7 +5828,7 @@
           <a:bodyPr wrap="square" lIns="0" tIns="0" rIns="0" bIns="0" rtlCol="0" anchor="ctr"/>
           <a:lstStyle/>
           <a:p>
-            <a:pPr algn="r" indent="0" marL="0">
+            <a:pPr marL="0" indent="0" algn="r">
               <a:buNone/>
             </a:pPr>
             <a:r>
@@ -5672,6 +5862,7 @@
         <a:solidFill>
           <a:srgbClr val="FBF6EF"/>
         </a:solidFill>
+        <a:effectLst/>
       </p:bgPr>
     </p:bg>
     <p:spTree>
@@ -5707,13 +5898,20 @@
           </a:solidFill>
           <a:ln/>
           <a:effectLst>
-            <a:outerShdw sx="100000" sy="100000" kx="0" ky="0" algn="bl" rotWithShape="0" blurRad="101600" dist="38100" dir="8100000">
+            <a:outerShdw blurRad="101600" dist="38100" dir="8100000" algn="bl" rotWithShape="0">
               <a:srgbClr val="000000">
                 <a:alpha val="12000"/>
               </a:srgbClr>
             </a:outerShdw>
           </a:effectLst>
         </p:spPr>
+        <p:txBody>
+          <a:bodyPr/>
+          <a:lstStyle/>
+          <a:p>
+            <a:endParaRPr lang="ko-KR" altLang="en-US"/>
+          </a:p>
+        </p:txBody>
       </p:sp>
       <p:sp>
         <p:nvSpPr>
@@ -5736,7 +5934,7 @@
           <a:bodyPr wrap="square" lIns="0" tIns="0" rIns="0" bIns="0" rtlCol="0" anchor="ctr"/>
           <a:lstStyle/>
           <a:p>
-            <a:pPr algn="ctr" indent="0" marL="0">
+            <a:pPr marL="0" indent="0" algn="ctr">
               <a:buNone/>
             </a:pPr>
             <a:r>
@@ -5775,7 +5973,7 @@
           <a:bodyPr wrap="square" lIns="0" tIns="0" rIns="0" bIns="0" rtlCol="0" anchor="ctr"/>
           <a:lstStyle/>
           <a:p>
-            <a:pPr indent="0" marL="0">
+            <a:pPr marL="0" indent="0">
               <a:buNone/>
             </a:pPr>
             <a:r>
@@ -5814,7 +6012,7 @@
           <a:bodyPr wrap="square" lIns="0" tIns="0" rIns="0" bIns="0" rtlCol="0" anchor="ctr"/>
           <a:lstStyle/>
           <a:p>
-            <a:pPr indent="0" marL="0">
+            <a:pPr marL="0" indent="0">
               <a:buNone/>
             </a:pPr>
             <a:r>
@@ -5856,13 +6054,20 @@
             <a:prstDash val="solid"/>
           </a:ln>
           <a:effectLst>
-            <a:outerShdw sx="100000" sy="100000" kx="0" ky="0" algn="bl" rotWithShape="0" blurRad="101600" dist="38100" dir="8100000">
+            <a:outerShdw blurRad="101600" dist="38100" dir="8100000" algn="bl" rotWithShape="0">
               <a:srgbClr val="000000">
                 <a:alpha val="12000"/>
               </a:srgbClr>
             </a:outerShdw>
           </a:effectLst>
         </p:spPr>
+        <p:txBody>
+          <a:bodyPr/>
+          <a:lstStyle/>
+          <a:p>
+            <a:endParaRPr lang="ko-KR" altLang="en-US"/>
+          </a:p>
+        </p:txBody>
       </p:sp>
       <p:sp>
         <p:nvSpPr>
@@ -5883,6 +6088,13 @@
           </a:solidFill>
           <a:ln/>
         </p:spPr>
+        <p:txBody>
+          <a:bodyPr/>
+          <a:lstStyle/>
+          <a:p>
+            <a:endParaRPr lang="ko-KR" altLang="en-US"/>
+          </a:p>
+        </p:txBody>
       </p:sp>
       <p:sp>
         <p:nvSpPr>
@@ -5905,7 +6117,7 @@
           <a:bodyPr wrap="square" lIns="0" tIns="0" rIns="0" bIns="0" rtlCol="0" anchor="ctr"/>
           <a:lstStyle/>
           <a:p>
-            <a:pPr algn="ctr" indent="0" marL="0">
+            <a:pPr marL="0" indent="0" algn="ctr">
               <a:buNone/>
             </a:pPr>
             <a:r>
@@ -5944,7 +6156,7 @@
           <a:bodyPr wrap="square" lIns="0" tIns="0" rIns="0" bIns="0" rtlCol="0" anchor="ctr"/>
           <a:lstStyle/>
           <a:p>
-            <a:pPr algn="ctr" indent="0" marL="0">
+            <a:pPr marL="0" indent="0" algn="ctr">
               <a:buNone/>
             </a:pPr>
             <a:r>
@@ -5983,7 +6195,7 @@
           <a:bodyPr wrap="square" lIns="0" tIns="0" rIns="0" bIns="0" rtlCol="0" anchor="ctr"/>
           <a:lstStyle/>
           <a:p>
-            <a:pPr algn="ctr" indent="0" marL="0">
+            <a:pPr marL="0" indent="0" algn="ctr">
               <a:lnSpc>
                 <a:spcPct val="100000"/>
               </a:lnSpc>
@@ -6113,13 +6325,20 @@
             <a:prstDash val="solid"/>
           </a:ln>
           <a:effectLst>
-            <a:outerShdw sx="100000" sy="100000" kx="0" ky="0" algn="bl" rotWithShape="0" blurRad="101600" dist="38100" dir="8100000">
+            <a:outerShdw blurRad="101600" dist="38100" dir="8100000" algn="bl" rotWithShape="0">
               <a:srgbClr val="000000">
                 <a:alpha val="12000"/>
               </a:srgbClr>
             </a:outerShdw>
           </a:effectLst>
         </p:spPr>
+        <p:txBody>
+          <a:bodyPr/>
+          <a:lstStyle/>
+          <a:p>
+            <a:endParaRPr lang="ko-KR" altLang="en-US"/>
+          </a:p>
+        </p:txBody>
       </p:sp>
       <p:sp>
         <p:nvSpPr>
@@ -6140,6 +6359,13 @@
           </a:solidFill>
           <a:ln/>
         </p:spPr>
+        <p:txBody>
+          <a:bodyPr/>
+          <a:lstStyle/>
+          <a:p>
+            <a:endParaRPr lang="ko-KR" altLang="en-US"/>
+          </a:p>
+        </p:txBody>
       </p:sp>
       <p:sp>
         <p:nvSpPr>
@@ -6162,7 +6388,7 @@
           <a:bodyPr wrap="square" lIns="0" tIns="0" rIns="0" bIns="0" rtlCol="0" anchor="ctr"/>
           <a:lstStyle/>
           <a:p>
-            <a:pPr algn="ctr" indent="0" marL="0">
+            <a:pPr marL="0" indent="0" algn="ctr">
               <a:buNone/>
             </a:pPr>
             <a:r>
@@ -6201,7 +6427,7 @@
           <a:bodyPr wrap="square" lIns="0" tIns="0" rIns="0" bIns="0" rtlCol="0" anchor="ctr"/>
           <a:lstStyle/>
           <a:p>
-            <a:pPr algn="ctr" indent="0" marL="0">
+            <a:pPr marL="0" indent="0" algn="ctr">
               <a:buNone/>
             </a:pPr>
             <a:r>
@@ -6240,7 +6466,7 @@
           <a:bodyPr wrap="square" lIns="0" tIns="0" rIns="0" bIns="0" rtlCol="0" anchor="ctr"/>
           <a:lstStyle/>
           <a:p>
-            <a:pPr algn="ctr" indent="0" marL="0">
+            <a:pPr marL="0" indent="0" algn="ctr">
               <a:lnSpc>
                 <a:spcPct val="100000"/>
               </a:lnSpc>
@@ -6367,13 +6593,20 @@
           </a:solidFill>
           <a:ln/>
           <a:effectLst>
-            <a:outerShdw sx="100000" sy="100000" kx="0" ky="0" algn="bl" rotWithShape="0" blurRad="101600" dist="38100" dir="8100000">
+            <a:outerShdw blurRad="101600" dist="38100" dir="8100000" algn="bl" rotWithShape="0">
               <a:srgbClr val="000000">
                 <a:alpha val="12000"/>
               </a:srgbClr>
             </a:outerShdw>
           </a:effectLst>
         </p:spPr>
+        <p:txBody>
+          <a:bodyPr/>
+          <a:lstStyle/>
+          <a:p>
+            <a:endParaRPr lang="ko-KR" altLang="en-US"/>
+          </a:p>
+        </p:txBody>
       </p:sp>
       <p:sp>
         <p:nvSpPr>
@@ -6396,7 +6629,7 @@
           <a:bodyPr wrap="square" lIns="0" tIns="0" rIns="0" bIns="0" rtlCol="0" anchor="ctr"/>
           <a:lstStyle/>
           <a:p>
-            <a:pPr algn="ctr" indent="0" marL="0">
+            <a:pPr marL="0" indent="0" algn="ctr">
               <a:buNone/>
             </a:pPr>
             <a:r>
@@ -6438,13 +6671,20 @@
             <a:prstDash val="solid"/>
           </a:ln>
           <a:effectLst>
-            <a:outerShdw sx="100000" sy="100000" kx="0" ky="0" algn="bl" rotWithShape="0" blurRad="101600" dist="38100" dir="8100000">
+            <a:outerShdw blurRad="101600" dist="38100" dir="8100000" algn="bl" rotWithShape="0">
               <a:srgbClr val="000000">
                 <a:alpha val="12000"/>
               </a:srgbClr>
             </a:outerShdw>
           </a:effectLst>
         </p:spPr>
+        <p:txBody>
+          <a:bodyPr/>
+          <a:lstStyle/>
+          <a:p>
+            <a:endParaRPr lang="ko-KR" altLang="en-US"/>
+          </a:p>
+        </p:txBody>
       </p:sp>
       <p:sp>
         <p:nvSpPr>
@@ -6465,6 +6705,13 @@
           </a:solidFill>
           <a:ln/>
         </p:spPr>
+        <p:txBody>
+          <a:bodyPr/>
+          <a:lstStyle/>
+          <a:p>
+            <a:endParaRPr lang="ko-KR" altLang="en-US"/>
+          </a:p>
+        </p:txBody>
       </p:sp>
       <p:sp>
         <p:nvSpPr>
@@ -6487,7 +6734,7 @@
           <a:bodyPr wrap="square" lIns="0" tIns="0" rIns="0" bIns="0" rtlCol="0" anchor="ctr"/>
           <a:lstStyle/>
           <a:p>
-            <a:pPr algn="ctr" indent="0" marL="0">
+            <a:pPr marL="0" indent="0" algn="ctr">
               <a:buNone/>
             </a:pPr>
             <a:r>
@@ -6526,7 +6773,7 @@
           <a:bodyPr wrap="square" lIns="0" tIns="0" rIns="0" bIns="0" rtlCol="0" anchor="ctr"/>
           <a:lstStyle/>
           <a:p>
-            <a:pPr algn="ctr" indent="0" marL="0">
+            <a:pPr marL="0" indent="0" algn="ctr">
               <a:buNone/>
             </a:pPr>
             <a:r>
@@ -6565,7 +6812,7 @@
           <a:bodyPr wrap="square" lIns="0" tIns="0" rIns="0" bIns="0" rtlCol="0" anchor="ctr"/>
           <a:lstStyle/>
           <a:p>
-            <a:pPr algn="ctr" indent="0" marL="0">
+            <a:pPr marL="0" indent="0" algn="ctr">
               <a:lnSpc>
                 <a:spcPct val="100000"/>
               </a:lnSpc>
@@ -6695,13 +6942,20 @@
             <a:prstDash val="solid"/>
           </a:ln>
           <a:effectLst>
-            <a:outerShdw sx="100000" sy="100000" kx="0" ky="0" algn="bl" rotWithShape="0" blurRad="101600" dist="38100" dir="8100000">
+            <a:outerShdw blurRad="101600" dist="38100" dir="8100000" algn="bl" rotWithShape="0">
               <a:srgbClr val="000000">
                 <a:alpha val="12000"/>
               </a:srgbClr>
             </a:outerShdw>
           </a:effectLst>
         </p:spPr>
+        <p:txBody>
+          <a:bodyPr/>
+          <a:lstStyle/>
+          <a:p>
+            <a:endParaRPr lang="ko-KR" altLang="en-US"/>
+          </a:p>
+        </p:txBody>
       </p:sp>
       <p:sp>
         <p:nvSpPr>
@@ -6722,6 +6976,13 @@
           </a:solidFill>
           <a:ln/>
         </p:spPr>
+        <p:txBody>
+          <a:bodyPr/>
+          <a:lstStyle/>
+          <a:p>
+            <a:endParaRPr lang="ko-KR" altLang="en-US"/>
+          </a:p>
+        </p:txBody>
       </p:sp>
       <p:sp>
         <p:nvSpPr>
@@ -6744,7 +7005,7 @@
           <a:bodyPr wrap="square" lIns="0" tIns="0" rIns="0" bIns="0" rtlCol="0" anchor="ctr"/>
           <a:lstStyle/>
           <a:p>
-            <a:pPr algn="ctr" indent="0" marL="0">
+            <a:pPr marL="0" indent="0" algn="ctr">
               <a:buNone/>
             </a:pPr>
             <a:r>
@@ -6783,7 +7044,7 @@
           <a:bodyPr wrap="square" lIns="0" tIns="0" rIns="0" bIns="0" rtlCol="0" anchor="ctr"/>
           <a:lstStyle/>
           <a:p>
-            <a:pPr algn="ctr" indent="0" marL="0">
+            <a:pPr marL="0" indent="0" algn="ctr">
               <a:buNone/>
             </a:pPr>
             <a:r>
@@ -6822,7 +7083,7 @@
           <a:bodyPr wrap="square" lIns="0" tIns="0" rIns="0" bIns="0" rtlCol="0" anchor="ctr"/>
           <a:lstStyle/>
           <a:p>
-            <a:pPr algn="ctr" indent="0" marL="0">
+            <a:pPr marL="0" indent="0" algn="ctr">
               <a:lnSpc>
                 <a:spcPct val="100000"/>
               </a:lnSpc>
@@ -6954,6 +7215,13 @@
             <a:prstDash val="solid"/>
           </a:ln>
         </p:spPr>
+        <p:txBody>
+          <a:bodyPr/>
+          <a:lstStyle/>
+          <a:p>
+            <a:endParaRPr lang="ko-KR" altLang="en-US"/>
+          </a:p>
+        </p:txBody>
       </p:sp>
       <p:sp>
         <p:nvSpPr>
@@ -6976,7 +7244,7 @@
           <a:bodyPr wrap="square" lIns="0" tIns="0" rIns="0" bIns="0" rtlCol="0" anchor="ctr"/>
           <a:lstStyle/>
           <a:p>
-            <a:pPr indent="0" marL="0">
+            <a:pPr marL="0" indent="0">
               <a:buNone/>
             </a:pPr>
             <a:r>
@@ -6990,9 +7258,6 @@
               </a:rPr>
               <a:t>💡 쉽게 말하면   </a:t>
             </a:r>
-            <a:pPr indent="0" marL="0">
-              <a:buNone/>
-            </a:pPr>
             <a:r>
               <a:rPr lang="en-US" sz="1350" dirty="0">
                 <a:solidFill>
@@ -7029,7 +7294,7 @@
           <a:bodyPr wrap="square" lIns="0" tIns="0" rIns="0" bIns="0" rtlCol="0" anchor="ctr"/>
           <a:lstStyle/>
           <a:p>
-            <a:pPr indent="0" marL="0">
+            <a:pPr marL="0" indent="0">
               <a:buNone/>
             </a:pPr>
             <a:r>
@@ -7043,9 +7308,6 @@
               </a:rPr>
               <a:t>☕ Cafe.pi</a:t>
             </a:r>
-            <a:pPr indent="0" marL="0">
-              <a:buNone/>
-            </a:pPr>
             <a:r>
               <a:rPr lang="en-US" sz="1000" dirty="0">
                 <a:solidFill>
@@ -7082,7 +7344,7 @@
           <a:bodyPr wrap="square" lIns="0" tIns="0" rIns="0" bIns="0" rtlCol="0" anchor="ctr"/>
           <a:lstStyle/>
           <a:p>
-            <a:pPr algn="r" indent="0" marL="0">
+            <a:pPr marL="0" indent="0" algn="r">
               <a:buNone/>
             </a:pPr>
             <a:r>
@@ -7116,6 +7378,7 @@
         <a:solidFill>
           <a:srgbClr val="FBF6EF"/>
         </a:solidFill>
+        <a:effectLst/>
       </p:bgPr>
     </p:bg>
     <p:spTree>
@@ -7151,13 +7414,20 @@
           </a:solidFill>
           <a:ln/>
           <a:effectLst>
-            <a:outerShdw sx="100000" sy="100000" kx="0" ky="0" algn="bl" rotWithShape="0" blurRad="101600" dist="38100" dir="8100000">
+            <a:outerShdw blurRad="101600" dist="38100" dir="8100000" algn="bl" rotWithShape="0">
               <a:srgbClr val="000000">
                 <a:alpha val="12000"/>
               </a:srgbClr>
             </a:outerShdw>
           </a:effectLst>
         </p:spPr>
+        <p:txBody>
+          <a:bodyPr/>
+          <a:lstStyle/>
+          <a:p>
+            <a:endParaRPr lang="ko-KR" altLang="en-US"/>
+          </a:p>
+        </p:txBody>
       </p:sp>
       <p:sp>
         <p:nvSpPr>
@@ -7180,7 +7450,7 @@
           <a:bodyPr wrap="square" lIns="0" tIns="0" rIns="0" bIns="0" rtlCol="0" anchor="ctr"/>
           <a:lstStyle/>
           <a:p>
-            <a:pPr algn="ctr" indent="0" marL="0">
+            <a:pPr marL="0" indent="0" algn="ctr">
               <a:buNone/>
             </a:pPr>
             <a:r>
@@ -7219,7 +7489,7 @@
           <a:bodyPr wrap="square" lIns="0" tIns="0" rIns="0" bIns="0" rtlCol="0" anchor="ctr"/>
           <a:lstStyle/>
           <a:p>
-            <a:pPr indent="0" marL="0">
+            <a:pPr marL="0" indent="0">
               <a:buNone/>
             </a:pPr>
             <a:r>
@@ -7258,7 +7528,7 @@
           <a:bodyPr wrap="square" lIns="0" tIns="0" rIns="0" bIns="0" rtlCol="0" anchor="ctr"/>
           <a:lstStyle/>
           <a:p>
-            <a:pPr indent="0" marL="0">
+            <a:pPr marL="0" indent="0">
               <a:buNone/>
             </a:pPr>
             <a:r>
@@ -7300,13 +7570,20 @@
             <a:prstDash val="solid"/>
           </a:ln>
           <a:effectLst>
-            <a:outerShdw sx="100000" sy="100000" kx="0" ky="0" algn="bl" rotWithShape="0" blurRad="101600" dist="38100" dir="8100000">
+            <a:outerShdw blurRad="101600" dist="38100" dir="8100000" algn="bl" rotWithShape="0">
               <a:srgbClr val="000000">
                 <a:alpha val="12000"/>
               </a:srgbClr>
             </a:outerShdw>
           </a:effectLst>
         </p:spPr>
+        <p:txBody>
+          <a:bodyPr/>
+          <a:lstStyle/>
+          <a:p>
+            <a:endParaRPr lang="ko-KR" altLang="en-US"/>
+          </a:p>
+        </p:txBody>
       </p:sp>
       <p:sp>
         <p:nvSpPr>
@@ -7327,6 +7604,13 @@
           </a:solidFill>
           <a:ln/>
         </p:spPr>
+        <p:txBody>
+          <a:bodyPr/>
+          <a:lstStyle/>
+          <a:p>
+            <a:endParaRPr lang="ko-KR" altLang="en-US"/>
+          </a:p>
+        </p:txBody>
       </p:sp>
       <p:sp>
         <p:nvSpPr>
@@ -7347,6 +7631,13 @@
           </a:solidFill>
           <a:ln/>
         </p:spPr>
+        <p:txBody>
+          <a:bodyPr/>
+          <a:lstStyle/>
+          <a:p>
+            <a:endParaRPr lang="ko-KR" altLang="en-US"/>
+          </a:p>
+        </p:txBody>
       </p:sp>
       <p:sp>
         <p:nvSpPr>
@@ -7369,7 +7660,7 @@
           <a:bodyPr wrap="square" lIns="0" tIns="0" rIns="0" bIns="0" rtlCol="0" anchor="ctr"/>
           <a:lstStyle/>
           <a:p>
-            <a:pPr algn="ctr" indent="0" marL="0">
+            <a:pPr marL="0" indent="0" algn="ctr">
               <a:buNone/>
             </a:pPr>
             <a:r>
@@ -7408,7 +7699,7 @@
           <a:bodyPr wrap="square" lIns="0" tIns="0" rIns="0" bIns="0" rtlCol="0" anchor="ctr"/>
           <a:lstStyle/>
           <a:p>
-            <a:pPr indent="0" marL="0">
+            <a:pPr marL="0" indent="0">
               <a:lnSpc>
                 <a:spcPct val="102000"/>
               </a:lnSpc>
@@ -7429,7 +7720,7 @@
             <a:endParaRPr lang="en-US" sz="1700" dirty="0"/>
           </a:p>
           <a:p>
-            <a:pPr indent="0" marL="0">
+            <a:pPr marL="0" indent="0">
               <a:lnSpc>
                 <a:spcPct val="102000"/>
               </a:lnSpc>
@@ -7474,13 +7765,20 @@
             <a:prstDash val="solid"/>
           </a:ln>
           <a:effectLst>
-            <a:outerShdw sx="100000" sy="100000" kx="0" ky="0" algn="bl" rotWithShape="0" blurRad="101600" dist="38100" dir="8100000">
+            <a:outerShdw blurRad="101600" dist="38100" dir="8100000" algn="bl" rotWithShape="0">
               <a:srgbClr val="000000">
                 <a:alpha val="12000"/>
               </a:srgbClr>
             </a:outerShdw>
           </a:effectLst>
         </p:spPr>
+        <p:txBody>
+          <a:bodyPr/>
+          <a:lstStyle/>
+          <a:p>
+            <a:endParaRPr lang="ko-KR" altLang="en-US"/>
+          </a:p>
+        </p:txBody>
       </p:sp>
       <p:sp>
         <p:nvSpPr>
@@ -7501,6 +7799,13 @@
           </a:solidFill>
           <a:ln/>
         </p:spPr>
+        <p:txBody>
+          <a:bodyPr/>
+          <a:lstStyle/>
+          <a:p>
+            <a:endParaRPr lang="ko-KR" altLang="en-US"/>
+          </a:p>
+        </p:txBody>
       </p:sp>
       <p:sp>
         <p:nvSpPr>
@@ -7521,6 +7826,13 @@
           </a:solidFill>
           <a:ln/>
         </p:spPr>
+        <p:txBody>
+          <a:bodyPr/>
+          <a:lstStyle/>
+          <a:p>
+            <a:endParaRPr lang="ko-KR" altLang="en-US"/>
+          </a:p>
+        </p:txBody>
       </p:sp>
       <p:sp>
         <p:nvSpPr>
@@ -7543,7 +7855,7 @@
           <a:bodyPr wrap="square" lIns="0" tIns="0" rIns="0" bIns="0" rtlCol="0" anchor="ctr"/>
           <a:lstStyle/>
           <a:p>
-            <a:pPr algn="ctr" indent="0" marL="0">
+            <a:pPr marL="0" indent="0" algn="ctr">
               <a:buNone/>
             </a:pPr>
             <a:r>
@@ -7582,7 +7894,7 @@
           <a:bodyPr wrap="square" lIns="0" tIns="0" rIns="0" bIns="0" rtlCol="0" anchor="ctr"/>
           <a:lstStyle/>
           <a:p>
-            <a:pPr indent="0" marL="0">
+            <a:pPr marL="0" indent="0">
               <a:lnSpc>
                 <a:spcPct val="102000"/>
               </a:lnSpc>
@@ -7603,7 +7915,7 @@
             <a:endParaRPr lang="en-US" sz="1700" dirty="0"/>
           </a:p>
           <a:p>
-            <a:pPr indent="0" marL="0">
+            <a:pPr marL="0" indent="0">
               <a:lnSpc>
                 <a:spcPct val="102000"/>
               </a:lnSpc>
@@ -7648,13 +7960,20 @@
             <a:prstDash val="solid"/>
           </a:ln>
           <a:effectLst>
-            <a:outerShdw sx="100000" sy="100000" kx="0" ky="0" algn="bl" rotWithShape="0" blurRad="101600" dist="38100" dir="8100000">
+            <a:outerShdw blurRad="101600" dist="38100" dir="8100000" algn="bl" rotWithShape="0">
               <a:srgbClr val="000000">
                 <a:alpha val="12000"/>
               </a:srgbClr>
             </a:outerShdw>
           </a:effectLst>
         </p:spPr>
+        <p:txBody>
+          <a:bodyPr/>
+          <a:lstStyle/>
+          <a:p>
+            <a:endParaRPr lang="ko-KR" altLang="en-US"/>
+          </a:p>
+        </p:txBody>
       </p:sp>
       <p:sp>
         <p:nvSpPr>
@@ -7675,6 +7994,13 @@
           </a:solidFill>
           <a:ln/>
         </p:spPr>
+        <p:txBody>
+          <a:bodyPr/>
+          <a:lstStyle/>
+          <a:p>
+            <a:endParaRPr lang="ko-KR" altLang="en-US"/>
+          </a:p>
+        </p:txBody>
       </p:sp>
       <p:sp>
         <p:nvSpPr>
@@ -7695,6 +8021,13 @@
           </a:solidFill>
           <a:ln/>
         </p:spPr>
+        <p:txBody>
+          <a:bodyPr/>
+          <a:lstStyle/>
+          <a:p>
+            <a:endParaRPr lang="ko-KR" altLang="en-US"/>
+          </a:p>
+        </p:txBody>
       </p:sp>
       <p:sp>
         <p:nvSpPr>
@@ -7717,7 +8050,7 @@
           <a:bodyPr wrap="square" lIns="0" tIns="0" rIns="0" bIns="0" rtlCol="0" anchor="ctr"/>
           <a:lstStyle/>
           <a:p>
-            <a:pPr algn="ctr" indent="0" marL="0">
+            <a:pPr marL="0" indent="0" algn="ctr">
               <a:buNone/>
             </a:pPr>
             <a:r>
@@ -7756,7 +8089,7 @@
           <a:bodyPr wrap="square" lIns="0" tIns="0" rIns="0" bIns="0" rtlCol="0" anchor="ctr"/>
           <a:lstStyle/>
           <a:p>
-            <a:pPr indent="0" marL="0">
+            <a:pPr marL="0" indent="0">
               <a:lnSpc>
                 <a:spcPct val="102000"/>
               </a:lnSpc>
@@ -7777,7 +8110,7 @@
             <a:endParaRPr lang="en-US" sz="1700" dirty="0"/>
           </a:p>
           <a:p>
-            <a:pPr indent="0" marL="0">
+            <a:pPr marL="0" indent="0">
               <a:lnSpc>
                 <a:spcPct val="102000"/>
               </a:lnSpc>
@@ -7824,6 +8157,13 @@
             <a:prstDash val="solid"/>
           </a:ln>
         </p:spPr>
+        <p:txBody>
+          <a:bodyPr/>
+          <a:lstStyle/>
+          <a:p>
+            <a:endParaRPr lang="ko-KR" altLang="en-US"/>
+          </a:p>
+        </p:txBody>
       </p:sp>
       <p:sp>
         <p:nvSpPr>
@@ -7846,7 +8186,7 @@
           <a:bodyPr wrap="square" lIns="0" tIns="0" rIns="0" bIns="0" rtlCol="0" anchor="ctr"/>
           <a:lstStyle/>
           <a:p>
-            <a:pPr indent="0" marL="0">
+            <a:pPr marL="0" indent="0">
               <a:buNone/>
             </a:pPr>
             <a:r>
@@ -7860,9 +8200,6 @@
               </a:rPr>
               <a:t>💡 쉽게 말하면   </a:t>
             </a:r>
-            <a:pPr indent="0" marL="0">
-              <a:buNone/>
-            </a:pPr>
             <a:r>
               <a:rPr lang="en-US" sz="1350" dirty="0">
                 <a:solidFill>
@@ -7899,7 +8236,7 @@
           <a:bodyPr wrap="square" lIns="0" tIns="0" rIns="0" bIns="0" rtlCol="0" anchor="ctr"/>
           <a:lstStyle/>
           <a:p>
-            <a:pPr indent="0" marL="0">
+            <a:pPr marL="0" indent="0">
               <a:buNone/>
             </a:pPr>
             <a:r>
@@ -7913,9 +8250,6 @@
               </a:rPr>
               <a:t>☕ Cafe.pi</a:t>
             </a:r>
-            <a:pPr indent="0" marL="0">
-              <a:buNone/>
-            </a:pPr>
             <a:r>
               <a:rPr lang="en-US" sz="1000" dirty="0">
                 <a:solidFill>
@@ -7952,7 +8286,7 @@
           <a:bodyPr wrap="square" lIns="0" tIns="0" rIns="0" bIns="0" rtlCol="0" anchor="ctr"/>
           <a:lstStyle/>
           <a:p>
-            <a:pPr algn="r" indent="0" marL="0">
+            <a:pPr marL="0" indent="0" algn="r">
               <a:buNone/>
             </a:pPr>
             <a:r>
@@ -7986,6 +8320,7 @@
         <a:solidFill>
           <a:srgbClr val="FBF6EF"/>
         </a:solidFill>
+        <a:effectLst/>
       </p:bgPr>
     </p:bg>
     <p:spTree>
@@ -8021,13 +8356,20 @@
           </a:solidFill>
           <a:ln/>
           <a:effectLst>
-            <a:outerShdw sx="100000" sy="100000" kx="0" ky="0" algn="bl" rotWithShape="0" blurRad="101600" dist="38100" dir="8100000">
+            <a:outerShdw blurRad="101600" dist="38100" dir="8100000" algn="bl" rotWithShape="0">
               <a:srgbClr val="000000">
                 <a:alpha val="12000"/>
               </a:srgbClr>
             </a:outerShdw>
           </a:effectLst>
         </p:spPr>
+        <p:txBody>
+          <a:bodyPr/>
+          <a:lstStyle/>
+          <a:p>
+            <a:endParaRPr lang="ko-KR" altLang="en-US"/>
+          </a:p>
+        </p:txBody>
       </p:sp>
       <p:sp>
         <p:nvSpPr>
@@ -8050,7 +8392,7 @@
           <a:bodyPr wrap="square" lIns="0" tIns="0" rIns="0" bIns="0" rtlCol="0" anchor="ctr"/>
           <a:lstStyle/>
           <a:p>
-            <a:pPr algn="ctr" indent="0" marL="0">
+            <a:pPr marL="0" indent="0" algn="ctr">
               <a:buNone/>
             </a:pPr>
             <a:r>
@@ -8089,7 +8431,7 @@
           <a:bodyPr wrap="square" lIns="0" tIns="0" rIns="0" bIns="0" rtlCol="0" anchor="ctr"/>
           <a:lstStyle/>
           <a:p>
-            <a:pPr indent="0" marL="0">
+            <a:pPr marL="0" indent="0">
               <a:buNone/>
             </a:pPr>
             <a:r>
@@ -8128,7 +8470,7 @@
           <a:bodyPr wrap="square" lIns="0" tIns="0" rIns="0" bIns="0" rtlCol="0" anchor="ctr"/>
           <a:lstStyle/>
           <a:p>
-            <a:pPr indent="0" marL="0">
+            <a:pPr marL="0" indent="0">
               <a:buNone/>
             </a:pPr>
             <a:r>
@@ -8170,13 +8512,20 @@
             <a:prstDash val="solid"/>
           </a:ln>
           <a:effectLst>
-            <a:outerShdw sx="100000" sy="100000" kx="0" ky="0" algn="bl" rotWithShape="0" blurRad="101600" dist="38100" dir="8100000">
+            <a:outerShdw blurRad="101600" dist="38100" dir="8100000" algn="bl" rotWithShape="0">
               <a:srgbClr val="000000">
                 <a:alpha val="12000"/>
               </a:srgbClr>
             </a:outerShdw>
           </a:effectLst>
         </p:spPr>
+        <p:txBody>
+          <a:bodyPr/>
+          <a:lstStyle/>
+          <a:p>
+            <a:endParaRPr lang="ko-KR" altLang="en-US"/>
+          </a:p>
+        </p:txBody>
       </p:sp>
       <p:sp>
         <p:nvSpPr>
@@ -8197,6 +8546,13 @@
           </a:solidFill>
           <a:ln/>
         </p:spPr>
+        <p:txBody>
+          <a:bodyPr/>
+          <a:lstStyle/>
+          <a:p>
+            <a:endParaRPr lang="ko-KR" altLang="en-US"/>
+          </a:p>
+        </p:txBody>
       </p:sp>
       <p:sp>
         <p:nvSpPr>
@@ -8217,6 +8573,13 @@
           </a:solidFill>
           <a:ln/>
         </p:spPr>
+        <p:txBody>
+          <a:bodyPr/>
+          <a:lstStyle/>
+          <a:p>
+            <a:endParaRPr lang="ko-KR" altLang="en-US"/>
+          </a:p>
+        </p:txBody>
       </p:sp>
       <p:sp>
         <p:nvSpPr>
@@ -8239,7 +8602,7 @@
           <a:bodyPr wrap="square" lIns="0" tIns="0" rIns="0" bIns="0" rtlCol="0" anchor="ctr"/>
           <a:lstStyle/>
           <a:p>
-            <a:pPr algn="ctr" indent="0" marL="0">
+            <a:pPr marL="0" indent="0" algn="ctr">
               <a:buNone/>
             </a:pPr>
             <a:r>
@@ -8278,7 +8641,7 @@
           <a:bodyPr wrap="square" lIns="0" tIns="0" rIns="0" bIns="0" rtlCol="0" anchor="ctr"/>
           <a:lstStyle/>
           <a:p>
-            <a:pPr indent="0" marL="0">
+            <a:pPr marL="0" indent="0">
               <a:lnSpc>
                 <a:spcPct val="102000"/>
               </a:lnSpc>
@@ -8299,7 +8662,7 @@
             <a:endParaRPr lang="en-US" sz="1700" dirty="0"/>
           </a:p>
           <a:p>
-            <a:pPr indent="0" marL="0">
+            <a:pPr marL="0" indent="0">
               <a:lnSpc>
                 <a:spcPct val="102000"/>
               </a:lnSpc>
@@ -8344,13 +8707,20 @@
             <a:prstDash val="solid"/>
           </a:ln>
           <a:effectLst>
-            <a:outerShdw sx="100000" sy="100000" kx="0" ky="0" algn="bl" rotWithShape="0" blurRad="101600" dist="38100" dir="8100000">
+            <a:outerShdw blurRad="101600" dist="38100" dir="8100000" algn="bl" rotWithShape="0">
               <a:srgbClr val="000000">
                 <a:alpha val="12000"/>
               </a:srgbClr>
             </a:outerShdw>
           </a:effectLst>
         </p:spPr>
+        <p:txBody>
+          <a:bodyPr/>
+          <a:lstStyle/>
+          <a:p>
+            <a:endParaRPr lang="ko-KR" altLang="en-US"/>
+          </a:p>
+        </p:txBody>
       </p:sp>
       <p:sp>
         <p:nvSpPr>
@@ -8371,6 +8741,13 @@
           </a:solidFill>
           <a:ln/>
         </p:spPr>
+        <p:txBody>
+          <a:bodyPr/>
+          <a:lstStyle/>
+          <a:p>
+            <a:endParaRPr lang="ko-KR" altLang="en-US"/>
+          </a:p>
+        </p:txBody>
       </p:sp>
       <p:sp>
         <p:nvSpPr>
@@ -8391,6 +8768,13 @@
           </a:solidFill>
           <a:ln/>
         </p:spPr>
+        <p:txBody>
+          <a:bodyPr/>
+          <a:lstStyle/>
+          <a:p>
+            <a:endParaRPr lang="ko-KR" altLang="en-US"/>
+          </a:p>
+        </p:txBody>
       </p:sp>
       <p:sp>
         <p:nvSpPr>
@@ -8413,7 +8797,7 @@
           <a:bodyPr wrap="square" lIns="0" tIns="0" rIns="0" bIns="0" rtlCol="0" anchor="ctr"/>
           <a:lstStyle/>
           <a:p>
-            <a:pPr algn="ctr" indent="0" marL="0">
+            <a:pPr marL="0" indent="0" algn="ctr">
               <a:buNone/>
             </a:pPr>
             <a:r>
@@ -8452,7 +8836,7 @@
           <a:bodyPr wrap="square" lIns="0" tIns="0" rIns="0" bIns="0" rtlCol="0" anchor="ctr"/>
           <a:lstStyle/>
           <a:p>
-            <a:pPr indent="0" marL="0">
+            <a:pPr marL="0" indent="0">
               <a:lnSpc>
                 <a:spcPct val="102000"/>
               </a:lnSpc>
@@ -8473,7 +8857,7 @@
             <a:endParaRPr lang="en-US" sz="1700" dirty="0"/>
           </a:p>
           <a:p>
-            <a:pPr indent="0" marL="0">
+            <a:pPr marL="0" indent="0">
               <a:lnSpc>
                 <a:spcPct val="102000"/>
               </a:lnSpc>
@@ -8518,13 +8902,20 @@
             <a:prstDash val="solid"/>
           </a:ln>
           <a:effectLst>
-            <a:outerShdw sx="100000" sy="100000" kx="0" ky="0" algn="bl" rotWithShape="0" blurRad="101600" dist="38100" dir="8100000">
+            <a:outerShdw blurRad="101600" dist="38100" dir="8100000" algn="bl" rotWithShape="0">
               <a:srgbClr val="000000">
                 <a:alpha val="12000"/>
               </a:srgbClr>
             </a:outerShdw>
           </a:effectLst>
         </p:spPr>
+        <p:txBody>
+          <a:bodyPr/>
+          <a:lstStyle/>
+          <a:p>
+            <a:endParaRPr lang="ko-KR" altLang="en-US"/>
+          </a:p>
+        </p:txBody>
       </p:sp>
       <p:sp>
         <p:nvSpPr>
@@ -8545,6 +8936,13 @@
           </a:solidFill>
           <a:ln/>
         </p:spPr>
+        <p:txBody>
+          <a:bodyPr/>
+          <a:lstStyle/>
+          <a:p>
+            <a:endParaRPr lang="ko-KR" altLang="en-US"/>
+          </a:p>
+        </p:txBody>
       </p:sp>
       <p:sp>
         <p:nvSpPr>
@@ -8565,6 +8963,13 @@
           </a:solidFill>
           <a:ln/>
         </p:spPr>
+        <p:txBody>
+          <a:bodyPr/>
+          <a:lstStyle/>
+          <a:p>
+            <a:endParaRPr lang="ko-KR" altLang="en-US"/>
+          </a:p>
+        </p:txBody>
       </p:sp>
       <p:sp>
         <p:nvSpPr>
@@ -8587,7 +8992,7 @@
           <a:bodyPr wrap="square" lIns="0" tIns="0" rIns="0" bIns="0" rtlCol="0" anchor="ctr"/>
           <a:lstStyle/>
           <a:p>
-            <a:pPr algn="ctr" indent="0" marL="0">
+            <a:pPr marL="0" indent="0" algn="ctr">
               <a:buNone/>
             </a:pPr>
             <a:r>
@@ -8626,7 +9031,7 @@
           <a:bodyPr wrap="square" lIns="0" tIns="0" rIns="0" bIns="0" rtlCol="0" anchor="ctr"/>
           <a:lstStyle/>
           <a:p>
-            <a:pPr indent="0" marL="0">
+            <a:pPr marL="0" indent="0">
               <a:lnSpc>
                 <a:spcPct val="102000"/>
               </a:lnSpc>
@@ -8647,7 +9052,7 @@
             <a:endParaRPr lang="en-US" sz="1700" dirty="0"/>
           </a:p>
           <a:p>
-            <a:pPr indent="0" marL="0">
+            <a:pPr marL="0" indent="0">
               <a:lnSpc>
                 <a:spcPct val="102000"/>
               </a:lnSpc>
@@ -8694,6 +9099,13 @@
             <a:prstDash val="solid"/>
           </a:ln>
         </p:spPr>
+        <p:txBody>
+          <a:bodyPr/>
+          <a:lstStyle/>
+          <a:p>
+            <a:endParaRPr lang="ko-KR" altLang="en-US"/>
+          </a:p>
+        </p:txBody>
       </p:sp>
       <p:sp>
         <p:nvSpPr>
@@ -8716,7 +9128,7 @@
           <a:bodyPr wrap="square" lIns="0" tIns="0" rIns="0" bIns="0" rtlCol="0" anchor="ctr"/>
           <a:lstStyle/>
           <a:p>
-            <a:pPr indent="0" marL="0">
+            <a:pPr marL="0" indent="0">
               <a:buNone/>
             </a:pPr>
             <a:r>
@@ -8730,9 +9142,6 @@
               </a:rPr>
               <a:t>💡 쉽게 말하면   </a:t>
             </a:r>
-            <a:pPr indent="0" marL="0">
-              <a:buNone/>
-            </a:pPr>
             <a:r>
               <a:rPr lang="en-US" sz="1350" dirty="0">
                 <a:solidFill>
@@ -8769,7 +9178,7 @@
           <a:bodyPr wrap="square" lIns="0" tIns="0" rIns="0" bIns="0" rtlCol="0" anchor="ctr"/>
           <a:lstStyle/>
           <a:p>
-            <a:pPr indent="0" marL="0">
+            <a:pPr marL="0" indent="0">
               <a:buNone/>
             </a:pPr>
             <a:r>
@@ -8783,9 +9192,6 @@
               </a:rPr>
               <a:t>☕ Cafe.pi</a:t>
             </a:r>
-            <a:pPr indent="0" marL="0">
-              <a:buNone/>
-            </a:pPr>
             <a:r>
               <a:rPr lang="en-US" sz="1000" dirty="0">
                 <a:solidFill>
@@ -8822,7 +9228,7 @@
           <a:bodyPr wrap="square" lIns="0" tIns="0" rIns="0" bIns="0" rtlCol="0" anchor="ctr"/>
           <a:lstStyle/>
           <a:p>
-            <a:pPr algn="r" indent="0" marL="0">
+            <a:pPr marL="0" indent="0" algn="r">
               <a:buNone/>
             </a:pPr>
             <a:r>
@@ -8856,6 +9262,7 @@
         <a:solidFill>
           <a:srgbClr val="FBF6EF"/>
         </a:solidFill>
+        <a:effectLst/>
       </p:bgPr>
     </p:bg>
     <p:spTree>
@@ -8891,13 +9298,20 @@
           </a:solidFill>
           <a:ln/>
           <a:effectLst>
-            <a:outerShdw sx="100000" sy="100000" kx="0" ky="0" algn="bl" rotWithShape="0" blurRad="101600" dist="38100" dir="8100000">
+            <a:outerShdw blurRad="101600" dist="38100" dir="8100000" algn="bl" rotWithShape="0">
               <a:srgbClr val="000000">
                 <a:alpha val="12000"/>
               </a:srgbClr>
             </a:outerShdw>
           </a:effectLst>
         </p:spPr>
+        <p:txBody>
+          <a:bodyPr/>
+          <a:lstStyle/>
+          <a:p>
+            <a:endParaRPr lang="ko-KR" altLang="en-US"/>
+          </a:p>
+        </p:txBody>
       </p:sp>
       <p:sp>
         <p:nvSpPr>
@@ -8920,7 +9334,7 @@
           <a:bodyPr wrap="square" lIns="0" tIns="0" rIns="0" bIns="0" rtlCol="0" anchor="ctr"/>
           <a:lstStyle/>
           <a:p>
-            <a:pPr algn="ctr" indent="0" marL="0">
+            <a:pPr marL="0" indent="0" algn="ctr">
               <a:buNone/>
             </a:pPr>
             <a:r>
@@ -8959,7 +9373,7 @@
           <a:bodyPr wrap="square" lIns="0" tIns="0" rIns="0" bIns="0" rtlCol="0" anchor="ctr"/>
           <a:lstStyle/>
           <a:p>
-            <a:pPr indent="0" marL="0">
+            <a:pPr marL="0" indent="0">
               <a:buNone/>
             </a:pPr>
             <a:r>
@@ -8971,7 +9385,73 @@
                 <a:ea typeface="Malgun Gothic" pitchFamily="34" charset="-122"/>
                 <a:cs typeface="Malgun Gothic" pitchFamily="34" charset="-120"/>
               </a:rPr>
-              <a:t>🏪  내 O2O 매장, 10분 만에!</a:t>
+              <a:t>🏪  내 O2O 매장, </a:t>
+            </a:r>
+            <a:r>
+              <a:rPr lang="ko-KR" altLang="en-US" sz="3200" b="1" dirty="0">
+                <a:solidFill>
+                  <a:srgbClr val="3B2A20"/>
+                </a:solidFill>
+                <a:latin typeface="Malgun Gothic" pitchFamily="34" charset="0"/>
+                <a:ea typeface="Malgun Gothic" pitchFamily="34" charset="-122"/>
+                <a:cs typeface="Malgun Gothic" pitchFamily="34" charset="-120"/>
+              </a:rPr>
+              <a:t>메뉴까지 </a:t>
+            </a:r>
+            <a:r>
+              <a:rPr lang="en-US" sz="3200" b="1" dirty="0">
+                <a:solidFill>
+                  <a:srgbClr val="3B2A20"/>
+                </a:solidFill>
+                <a:latin typeface="Malgun Gothic" pitchFamily="34" charset="0"/>
+                <a:ea typeface="Malgun Gothic" pitchFamily="34" charset="-122"/>
+                <a:cs typeface="Malgun Gothic" pitchFamily="34" charset="-120"/>
+              </a:rPr>
+              <a:t>10분 </a:t>
+            </a:r>
+            <a:r>
+              <a:rPr lang="en-US" sz="3200" b="1" dirty="0" err="1">
+                <a:solidFill>
+                  <a:srgbClr val="3B2A20"/>
+                </a:solidFill>
+                <a:latin typeface="Malgun Gothic" pitchFamily="34" charset="0"/>
+                <a:ea typeface="Malgun Gothic" pitchFamily="34" charset="-122"/>
+                <a:cs typeface="Malgun Gothic" pitchFamily="34" charset="-120"/>
+              </a:rPr>
+              <a:t>만에</a:t>
+            </a:r>
+            <a:r>
+              <a:rPr lang="en-US" sz="3200" b="1" dirty="0">
+                <a:solidFill>
+                  <a:srgbClr val="3B2A20"/>
+                </a:solidFill>
+                <a:latin typeface="Malgun Gothic" pitchFamily="34" charset="0"/>
+                <a:ea typeface="Malgun Gothic" pitchFamily="34" charset="-122"/>
+                <a:cs typeface="Malgun Gothic" pitchFamily="34" charset="-120"/>
+              </a:rPr>
+              <a:t> </a:t>
+            </a:r>
+            <a:r>
+              <a:rPr lang="ko-KR" altLang="en-US" sz="3200" b="1" dirty="0">
+                <a:solidFill>
+                  <a:srgbClr val="3B2A20"/>
+                </a:solidFill>
+                <a:latin typeface="Malgun Gothic" pitchFamily="34" charset="0"/>
+                <a:ea typeface="Malgun Gothic" pitchFamily="34" charset="-122"/>
+                <a:cs typeface="Malgun Gothic" pitchFamily="34" charset="-120"/>
+              </a:rPr>
+              <a:t>등록</a:t>
+            </a:r>
+            <a:r>
+              <a:rPr lang="en-US" sz="3200" b="1" dirty="0">
+                <a:solidFill>
+                  <a:srgbClr val="3B2A20"/>
+                </a:solidFill>
+                <a:latin typeface="Malgun Gothic" pitchFamily="34" charset="0"/>
+                <a:ea typeface="Malgun Gothic" pitchFamily="34" charset="-122"/>
+                <a:cs typeface="Malgun Gothic" pitchFamily="34" charset="-120"/>
+              </a:rPr>
+              <a:t>!</a:t>
             </a:r>
             <a:endParaRPr lang="en-US" sz="3200" dirty="0"/>
           </a:p>
@@ -8998,7 +9478,7 @@
           <a:bodyPr wrap="square" lIns="0" tIns="0" rIns="0" bIns="0" rtlCol="0" anchor="ctr"/>
           <a:lstStyle/>
           <a:p>
-            <a:pPr indent="0" marL="0">
+            <a:pPr marL="0" indent="0">
               <a:buNone/>
             </a:pPr>
             <a:r>
@@ -9040,13 +9520,20 @@
             <a:prstDash val="solid"/>
           </a:ln>
           <a:effectLst>
-            <a:outerShdw sx="100000" sy="100000" kx="0" ky="0" algn="bl" rotWithShape="0" blurRad="101600" dist="38100" dir="8100000">
+            <a:outerShdw blurRad="101600" dist="38100" dir="8100000" algn="bl" rotWithShape="0">
               <a:srgbClr val="000000">
                 <a:alpha val="12000"/>
               </a:srgbClr>
             </a:outerShdw>
           </a:effectLst>
         </p:spPr>
+        <p:txBody>
+          <a:bodyPr/>
+          <a:lstStyle/>
+          <a:p>
+            <a:endParaRPr lang="ko-KR" altLang="en-US"/>
+          </a:p>
+        </p:txBody>
       </p:sp>
       <p:sp>
         <p:nvSpPr>
@@ -9067,6 +9554,13 @@
           </a:solidFill>
           <a:ln/>
         </p:spPr>
+        <p:txBody>
+          <a:bodyPr/>
+          <a:lstStyle/>
+          <a:p>
+            <a:endParaRPr lang="ko-KR" altLang="en-US"/>
+          </a:p>
+        </p:txBody>
       </p:sp>
       <p:sp>
         <p:nvSpPr>
@@ -9087,6 +9581,13 @@
           </a:solidFill>
           <a:ln/>
         </p:spPr>
+        <p:txBody>
+          <a:bodyPr/>
+          <a:lstStyle/>
+          <a:p>
+            <a:endParaRPr lang="ko-KR" altLang="en-US"/>
+          </a:p>
+        </p:txBody>
       </p:sp>
       <p:sp>
         <p:nvSpPr>
@@ -9109,7 +9610,7 @@
           <a:bodyPr wrap="square" lIns="0" tIns="0" rIns="0" bIns="0" rtlCol="0" anchor="ctr"/>
           <a:lstStyle/>
           <a:p>
-            <a:pPr algn="ctr" indent="0" marL="0">
+            <a:pPr marL="0" indent="0" algn="ctr">
               <a:buNone/>
             </a:pPr>
             <a:r>
@@ -9148,7 +9649,7 @@
           <a:bodyPr wrap="square" lIns="0" tIns="0" rIns="0" bIns="0" rtlCol="0" anchor="ctr"/>
           <a:lstStyle/>
           <a:p>
-            <a:pPr indent="0" marL="0">
+            <a:pPr marL="0" indent="0">
               <a:lnSpc>
                 <a:spcPct val="102000"/>
               </a:lnSpc>
@@ -9169,7 +9670,7 @@
             <a:endParaRPr lang="en-US" sz="1700" dirty="0"/>
           </a:p>
           <a:p>
-            <a:pPr indent="0" marL="0">
+            <a:pPr marL="0" indent="0">
               <a:lnSpc>
                 <a:spcPct val="102000"/>
               </a:lnSpc>
@@ -9214,13 +9715,20 @@
             <a:prstDash val="solid"/>
           </a:ln>
           <a:effectLst>
-            <a:outerShdw sx="100000" sy="100000" kx="0" ky="0" algn="bl" rotWithShape="0" blurRad="101600" dist="38100" dir="8100000">
+            <a:outerShdw blurRad="101600" dist="38100" dir="8100000" algn="bl" rotWithShape="0">
               <a:srgbClr val="000000">
                 <a:alpha val="12000"/>
               </a:srgbClr>
             </a:outerShdw>
           </a:effectLst>
         </p:spPr>
+        <p:txBody>
+          <a:bodyPr/>
+          <a:lstStyle/>
+          <a:p>
+            <a:endParaRPr lang="ko-KR" altLang="en-US"/>
+          </a:p>
+        </p:txBody>
       </p:sp>
       <p:sp>
         <p:nvSpPr>
@@ -9241,6 +9749,13 @@
           </a:solidFill>
           <a:ln/>
         </p:spPr>
+        <p:txBody>
+          <a:bodyPr/>
+          <a:lstStyle/>
+          <a:p>
+            <a:endParaRPr lang="ko-KR" altLang="en-US"/>
+          </a:p>
+        </p:txBody>
       </p:sp>
       <p:sp>
         <p:nvSpPr>
@@ -9261,6 +9776,13 @@
           </a:solidFill>
           <a:ln/>
         </p:spPr>
+        <p:txBody>
+          <a:bodyPr/>
+          <a:lstStyle/>
+          <a:p>
+            <a:endParaRPr lang="ko-KR" altLang="en-US"/>
+          </a:p>
+        </p:txBody>
       </p:sp>
       <p:sp>
         <p:nvSpPr>
@@ -9283,7 +9805,7 @@
           <a:bodyPr wrap="square" lIns="0" tIns="0" rIns="0" bIns="0" rtlCol="0" anchor="ctr"/>
           <a:lstStyle/>
           <a:p>
-            <a:pPr algn="ctr" indent="0" marL="0">
+            <a:pPr marL="0" indent="0" algn="ctr">
               <a:buNone/>
             </a:pPr>
             <a:r>
@@ -9322,7 +9844,7 @@
           <a:bodyPr wrap="square" lIns="0" tIns="0" rIns="0" bIns="0" rtlCol="0" anchor="ctr"/>
           <a:lstStyle/>
           <a:p>
-            <a:pPr indent="0" marL="0">
+            <a:pPr marL="0" indent="0">
               <a:lnSpc>
                 <a:spcPct val="102000"/>
               </a:lnSpc>
@@ -9343,7 +9865,7 @@
             <a:endParaRPr lang="en-US" sz="1700" dirty="0"/>
           </a:p>
           <a:p>
-            <a:pPr indent="0" marL="0">
+            <a:pPr marL="0" indent="0">
               <a:lnSpc>
                 <a:spcPct val="102000"/>
               </a:lnSpc>
@@ -9388,13 +9910,20 @@
             <a:prstDash val="solid"/>
           </a:ln>
           <a:effectLst>
-            <a:outerShdw sx="100000" sy="100000" kx="0" ky="0" algn="bl" rotWithShape="0" blurRad="101600" dist="38100" dir="8100000">
+            <a:outerShdw blurRad="101600" dist="38100" dir="8100000" algn="bl" rotWithShape="0">
               <a:srgbClr val="000000">
                 <a:alpha val="12000"/>
               </a:srgbClr>
             </a:outerShdw>
           </a:effectLst>
         </p:spPr>
+        <p:txBody>
+          <a:bodyPr/>
+          <a:lstStyle/>
+          <a:p>
+            <a:endParaRPr lang="ko-KR" altLang="en-US"/>
+          </a:p>
+        </p:txBody>
       </p:sp>
       <p:sp>
         <p:nvSpPr>
@@ -9415,6 +9944,13 @@
           </a:solidFill>
           <a:ln/>
         </p:spPr>
+        <p:txBody>
+          <a:bodyPr/>
+          <a:lstStyle/>
+          <a:p>
+            <a:endParaRPr lang="ko-KR" altLang="en-US"/>
+          </a:p>
+        </p:txBody>
       </p:sp>
       <p:sp>
         <p:nvSpPr>
@@ -9435,6 +9971,13 @@
           </a:solidFill>
           <a:ln/>
         </p:spPr>
+        <p:txBody>
+          <a:bodyPr/>
+          <a:lstStyle/>
+          <a:p>
+            <a:endParaRPr lang="ko-KR" altLang="en-US"/>
+          </a:p>
+        </p:txBody>
       </p:sp>
       <p:sp>
         <p:nvSpPr>
@@ -9457,7 +10000,7 @@
           <a:bodyPr wrap="square" lIns="0" tIns="0" rIns="0" bIns="0" rtlCol="0" anchor="ctr"/>
           <a:lstStyle/>
           <a:p>
-            <a:pPr algn="ctr" indent="0" marL="0">
+            <a:pPr marL="0" indent="0" algn="ctr">
               <a:buNone/>
             </a:pPr>
             <a:r>
@@ -9496,7 +10039,7 @@
           <a:bodyPr wrap="square" lIns="0" tIns="0" rIns="0" bIns="0" rtlCol="0" anchor="ctr"/>
           <a:lstStyle/>
           <a:p>
-            <a:pPr indent="0" marL="0">
+            <a:pPr marL="0" indent="0">
               <a:lnSpc>
                 <a:spcPct val="102000"/>
               </a:lnSpc>
@@ -9517,7 +10060,7 @@
             <a:endParaRPr lang="en-US" sz="1700" dirty="0"/>
           </a:p>
           <a:p>
-            <a:pPr indent="0" marL="0">
+            <a:pPr marL="0" indent="0">
               <a:lnSpc>
                 <a:spcPct val="102000"/>
               </a:lnSpc>
@@ -9562,13 +10105,20 @@
             <a:prstDash val="solid"/>
           </a:ln>
           <a:effectLst>
-            <a:outerShdw sx="100000" sy="100000" kx="0" ky="0" algn="bl" rotWithShape="0" blurRad="101600" dist="38100" dir="8100000">
+            <a:outerShdw blurRad="101600" dist="38100" dir="8100000" algn="bl" rotWithShape="0">
               <a:srgbClr val="000000">
                 <a:alpha val="12000"/>
               </a:srgbClr>
             </a:outerShdw>
           </a:effectLst>
         </p:spPr>
+        <p:txBody>
+          <a:bodyPr/>
+          <a:lstStyle/>
+          <a:p>
+            <a:endParaRPr lang="ko-KR" altLang="en-US"/>
+          </a:p>
+        </p:txBody>
       </p:sp>
       <p:sp>
         <p:nvSpPr>
@@ -9589,6 +10139,13 @@
           </a:solidFill>
           <a:ln/>
         </p:spPr>
+        <p:txBody>
+          <a:bodyPr/>
+          <a:lstStyle/>
+          <a:p>
+            <a:endParaRPr lang="ko-KR" altLang="en-US"/>
+          </a:p>
+        </p:txBody>
       </p:sp>
       <p:sp>
         <p:nvSpPr>
@@ -9609,6 +10166,13 @@
           </a:solidFill>
           <a:ln/>
         </p:spPr>
+        <p:txBody>
+          <a:bodyPr/>
+          <a:lstStyle/>
+          <a:p>
+            <a:endParaRPr lang="ko-KR" altLang="en-US"/>
+          </a:p>
+        </p:txBody>
       </p:sp>
       <p:sp>
         <p:nvSpPr>
@@ -9631,7 +10195,7 @@
           <a:bodyPr wrap="square" lIns="0" tIns="0" rIns="0" bIns="0" rtlCol="0" anchor="ctr"/>
           <a:lstStyle/>
           <a:p>
-            <a:pPr algn="ctr" indent="0" marL="0">
+            <a:pPr marL="0" indent="0" algn="ctr">
               <a:buNone/>
             </a:pPr>
             <a:r>
@@ -9670,7 +10234,7 @@
           <a:bodyPr wrap="square" lIns="0" tIns="0" rIns="0" bIns="0" rtlCol="0" anchor="ctr"/>
           <a:lstStyle/>
           <a:p>
-            <a:pPr indent="0" marL="0">
+            <a:pPr marL="0" indent="0">
               <a:lnSpc>
                 <a:spcPct val="102000"/>
               </a:lnSpc>
@@ -9691,7 +10255,7 @@
             <a:endParaRPr lang="en-US" sz="1700" dirty="0"/>
           </a:p>
           <a:p>
-            <a:pPr indent="0" marL="0">
+            <a:pPr marL="0" indent="0">
               <a:lnSpc>
                 <a:spcPct val="102000"/>
               </a:lnSpc>
@@ -9738,6 +10302,13 @@
             <a:prstDash val="solid"/>
           </a:ln>
         </p:spPr>
+        <p:txBody>
+          <a:bodyPr/>
+          <a:lstStyle/>
+          <a:p>
+            <a:endParaRPr lang="ko-KR" altLang="en-US"/>
+          </a:p>
+        </p:txBody>
       </p:sp>
       <p:sp>
         <p:nvSpPr>
@@ -9760,7 +10331,7 @@
           <a:bodyPr wrap="square" lIns="0" tIns="0" rIns="0" bIns="0" rtlCol="0" anchor="ctr"/>
           <a:lstStyle/>
           <a:p>
-            <a:pPr indent="0" marL="0">
+            <a:pPr marL="0" indent="0">
               <a:buNone/>
             </a:pPr>
             <a:r>
@@ -9774,9 +10345,6 @@
               </a:rPr>
               <a:t>💡 쉽게 말하면   </a:t>
             </a:r>
-            <a:pPr indent="0" marL="0">
-              <a:buNone/>
-            </a:pPr>
             <a:r>
               <a:rPr lang="en-US" sz="1350" dirty="0">
                 <a:solidFill>
@@ -9813,7 +10381,7 @@
           <a:bodyPr wrap="square" lIns="0" tIns="0" rIns="0" bIns="0" rtlCol="0" anchor="ctr"/>
           <a:lstStyle/>
           <a:p>
-            <a:pPr indent="0" marL="0">
+            <a:pPr marL="0" indent="0">
               <a:buNone/>
             </a:pPr>
             <a:r>
@@ -9827,9 +10395,6 @@
               </a:rPr>
               <a:t>☕ Cafe.pi</a:t>
             </a:r>
-            <a:pPr indent="0" marL="0">
-              <a:buNone/>
-            </a:pPr>
             <a:r>
               <a:rPr lang="en-US" sz="1000" dirty="0">
                 <a:solidFill>
@@ -9866,7 +10431,7 @@
           <a:bodyPr wrap="square" lIns="0" tIns="0" rIns="0" bIns="0" rtlCol="0" anchor="ctr"/>
           <a:lstStyle/>
           <a:p>
-            <a:pPr algn="r" indent="0" marL="0">
+            <a:pPr marL="0" indent="0" algn="r">
               <a:buNone/>
             </a:pPr>
             <a:r>
@@ -9900,6 +10465,7 @@
         <a:solidFill>
           <a:srgbClr val="FBF6EF"/>
         </a:solidFill>
+        <a:effectLst/>
       </p:bgPr>
     </p:bg>
     <p:spTree>
@@ -9937,7 +10503,7 @@
           <a:bodyPr wrap="square" lIns="0" tIns="0" rIns="0" bIns="0" rtlCol="0" anchor="ctr"/>
           <a:lstStyle/>
           <a:p>
-            <a:pPr indent="0" marL="0">
+            <a:pPr marL="0" indent="0">
               <a:buNone/>
             </a:pPr>
             <a:r>
@@ -9976,7 +10542,7 @@
           <a:bodyPr wrap="square" lIns="0" tIns="0" rIns="0" bIns="0" rtlCol="0" anchor="ctr"/>
           <a:lstStyle/>
           <a:p>
-            <a:pPr indent="0" marL="0">
+            <a:pPr marL="0" indent="0">
               <a:buNone/>
             </a:pPr>
             <a:r>
@@ -10018,13 +10584,20 @@
             <a:prstDash val="solid"/>
           </a:ln>
           <a:effectLst>
-            <a:outerShdw sx="100000" sy="100000" kx="0" ky="0" algn="bl" rotWithShape="0" blurRad="101600" dist="38100" dir="8100000">
+            <a:outerShdw blurRad="101600" dist="38100" dir="8100000" algn="bl" rotWithShape="0">
               <a:srgbClr val="000000">
                 <a:alpha val="12000"/>
               </a:srgbClr>
             </a:outerShdw>
           </a:effectLst>
         </p:spPr>
+        <p:txBody>
+          <a:bodyPr/>
+          <a:lstStyle/>
+          <a:p>
+            <a:endParaRPr lang="ko-KR" altLang="en-US"/>
+          </a:p>
+        </p:txBody>
       </p:sp>
       <p:sp>
         <p:nvSpPr>
@@ -10045,6 +10618,13 @@
           </a:solidFill>
           <a:ln/>
         </p:spPr>
+        <p:txBody>
+          <a:bodyPr/>
+          <a:lstStyle/>
+          <a:p>
+            <a:endParaRPr lang="ko-KR" altLang="en-US"/>
+          </a:p>
+        </p:txBody>
       </p:sp>
       <p:sp>
         <p:nvSpPr>
@@ -10067,7 +10647,7 @@
           <a:bodyPr wrap="square" lIns="0" tIns="0" rIns="0" bIns="0" rtlCol="0" anchor="ctr"/>
           <a:lstStyle/>
           <a:p>
-            <a:pPr algn="ctr" indent="0" marL="0">
+            <a:pPr marL="0" indent="0" algn="ctr">
               <a:buNone/>
             </a:pPr>
             <a:r>
@@ -10106,7 +10686,7 @@
           <a:bodyPr wrap="square" lIns="0" tIns="0" rIns="0" bIns="0" rtlCol="0" anchor="t"/>
           <a:lstStyle/>
           <a:p>
-            <a:pPr indent="0" marL="0">
+            <a:pPr marL="0" indent="0">
               <a:lnSpc>
                 <a:spcPct val="115000"/>
               </a:lnSpc>
@@ -10127,7 +10707,7 @@
             <a:endParaRPr lang="en-US" sz="1500" dirty="0"/>
           </a:p>
           <a:p>
-            <a:pPr indent="0" marL="0">
+            <a:pPr marL="0" indent="0">
               <a:lnSpc>
                 <a:spcPct val="115000"/>
               </a:lnSpc>
@@ -10148,7 +10728,7 @@
             <a:endParaRPr lang="en-US" sz="1500" dirty="0"/>
           </a:p>
           <a:p>
-            <a:pPr indent="0" marL="0">
+            <a:pPr marL="0" indent="0">
               <a:lnSpc>
                 <a:spcPct val="115000"/>
               </a:lnSpc>
@@ -10169,7 +10749,7 @@
             <a:endParaRPr lang="en-US" sz="1500" dirty="0"/>
           </a:p>
           <a:p>
-            <a:pPr indent="0" marL="0">
+            <a:pPr marL="0" indent="0">
               <a:lnSpc>
                 <a:spcPct val="115000"/>
               </a:lnSpc>
@@ -10190,7 +10770,7 @@
             <a:endParaRPr lang="en-US" sz="1500" dirty="0"/>
           </a:p>
           <a:p>
-            <a:pPr indent="0" marL="0">
+            <a:pPr marL="0" indent="0">
               <a:lnSpc>
                 <a:spcPct val="115000"/>
               </a:lnSpc>
@@ -10235,13 +10815,20 @@
             <a:prstDash val="solid"/>
           </a:ln>
           <a:effectLst>
-            <a:outerShdw sx="100000" sy="100000" kx="0" ky="0" algn="bl" rotWithShape="0" blurRad="101600" dist="38100" dir="8100000">
+            <a:outerShdw blurRad="101600" dist="38100" dir="8100000" algn="bl" rotWithShape="0">
               <a:srgbClr val="000000">
                 <a:alpha val="12000"/>
               </a:srgbClr>
             </a:outerShdw>
           </a:effectLst>
         </p:spPr>
+        <p:txBody>
+          <a:bodyPr/>
+          <a:lstStyle/>
+          <a:p>
+            <a:endParaRPr lang="ko-KR" altLang="en-US"/>
+          </a:p>
+        </p:txBody>
       </p:sp>
       <p:sp>
         <p:nvSpPr>
@@ -10262,6 +10849,13 @@
           </a:solidFill>
           <a:ln/>
         </p:spPr>
+        <p:txBody>
+          <a:bodyPr/>
+          <a:lstStyle/>
+          <a:p>
+            <a:endParaRPr lang="ko-KR" altLang="en-US"/>
+          </a:p>
+        </p:txBody>
       </p:sp>
       <p:sp>
         <p:nvSpPr>
@@ -10284,7 +10878,7 @@
           <a:bodyPr wrap="square" lIns="0" tIns="0" rIns="0" bIns="0" rtlCol="0" anchor="ctr"/>
           <a:lstStyle/>
           <a:p>
-            <a:pPr algn="ctr" indent="0" marL="0">
+            <a:pPr marL="0" indent="0" algn="ctr">
               <a:buNone/>
             </a:pPr>
             <a:r>
@@ -10323,7 +10917,7 @@
           <a:bodyPr wrap="square" lIns="0" tIns="0" rIns="0" bIns="0" rtlCol="0" anchor="t"/>
           <a:lstStyle/>
           <a:p>
-            <a:pPr indent="0" marL="0">
+            <a:pPr marL="0" indent="0">
               <a:lnSpc>
                 <a:spcPct val="115000"/>
               </a:lnSpc>
@@ -10344,7 +10938,7 @@
             <a:endParaRPr lang="en-US" sz="1500" dirty="0"/>
           </a:p>
           <a:p>
-            <a:pPr indent="0" marL="0">
+            <a:pPr marL="0" indent="0">
               <a:lnSpc>
                 <a:spcPct val="115000"/>
               </a:lnSpc>
@@ -10365,7 +10959,7 @@
             <a:endParaRPr lang="en-US" sz="1500" dirty="0"/>
           </a:p>
           <a:p>
-            <a:pPr indent="0" marL="0">
+            <a:pPr marL="0" indent="0">
               <a:lnSpc>
                 <a:spcPct val="115000"/>
               </a:lnSpc>
@@ -10386,7 +10980,7 @@
             <a:endParaRPr lang="en-US" sz="1500" dirty="0"/>
           </a:p>
           <a:p>
-            <a:pPr indent="0" marL="0">
+            <a:pPr marL="0" indent="0">
               <a:lnSpc>
                 <a:spcPct val="115000"/>
               </a:lnSpc>
@@ -10407,7 +11001,7 @@
             <a:endParaRPr lang="en-US" sz="1500" dirty="0"/>
           </a:p>
           <a:p>
-            <a:pPr indent="0" marL="0">
+            <a:pPr marL="0" indent="0">
               <a:lnSpc>
                 <a:spcPct val="115000"/>
               </a:lnSpc>
@@ -10449,7 +11043,7 @@
           <a:bodyPr wrap="square" lIns="0" tIns="0" rIns="0" bIns="0" rtlCol="0" anchor="ctr"/>
           <a:lstStyle/>
           <a:p>
-            <a:pPr indent="0" marL="0">
+            <a:pPr marL="0" indent="0">
               <a:buNone/>
             </a:pPr>
             <a:r>
@@ -10463,9 +11057,6 @@
               </a:rPr>
               <a:t>☕ Cafe.pi</a:t>
             </a:r>
-            <a:pPr indent="0" marL="0">
-              <a:buNone/>
-            </a:pPr>
             <a:r>
               <a:rPr lang="en-US" sz="1000" dirty="0">
                 <a:solidFill>
@@ -10502,7 +11093,7 @@
           <a:bodyPr wrap="square" lIns="0" tIns="0" rIns="0" bIns="0" rtlCol="0" anchor="ctr"/>
           <a:lstStyle/>
           <a:p>
-            <a:pPr algn="r" indent="0" marL="0">
+            <a:pPr marL="0" indent="0" algn="r">
               <a:buNone/>
             </a:pPr>
             <a:r>
@@ -10821,4 +11412,319 @@
     </a:ext>
   </a:extLst>
 </a:theme>
+</file>
+
+<file path=ppt/theme/theme2.xml><?xml version="1.0" encoding="utf-8"?>
+<a:theme xmlns:a="http://schemas.openxmlformats.org/drawingml/2006/main" name="Office 테마">
+  <a:themeElements>
+    <a:clrScheme name="Office">
+      <a:dk1>
+        <a:sysClr val="windowText" lastClr="000000"/>
+      </a:dk1>
+      <a:lt1>
+        <a:sysClr val="window" lastClr="FFFFFF"/>
+      </a:lt1>
+      <a:dk2>
+        <a:srgbClr val="0E2841"/>
+      </a:dk2>
+      <a:lt2>
+        <a:srgbClr val="E8E8E8"/>
+      </a:lt2>
+      <a:accent1>
+        <a:srgbClr val="156082"/>
+      </a:accent1>
+      <a:accent2>
+        <a:srgbClr val="E97132"/>
+      </a:accent2>
+      <a:accent3>
+        <a:srgbClr val="196B24"/>
+      </a:accent3>
+      <a:accent4>
+        <a:srgbClr val="0F9ED5"/>
+      </a:accent4>
+      <a:accent5>
+        <a:srgbClr val="A02B93"/>
+      </a:accent5>
+      <a:accent6>
+        <a:srgbClr val="4EA72E"/>
+      </a:accent6>
+      <a:hlink>
+        <a:srgbClr val="467886"/>
+      </a:hlink>
+      <a:folHlink>
+        <a:srgbClr val="96607D"/>
+      </a:folHlink>
+    </a:clrScheme>
+    <a:fontScheme name="Office">
+      <a:majorFont>
+        <a:latin typeface="맑은 고딕" panose="02110004020202020204"/>
+        <a:ea typeface=""/>
+        <a:cs typeface=""/>
+        <a:font script="Jpan" typeface="游ゴシック Light"/>
+        <a:font script="Hang" typeface="맑은 고딕"/>
+        <a:font script="Hans" typeface="等线 Light"/>
+        <a:font script="Hant" typeface="新細明體"/>
+        <a:font script="Arab" typeface="Times New Roman"/>
+        <a:font script="Hebr" typeface="Times New Roman"/>
+        <a:font script="Thai" typeface="Angsana New"/>
+        <a:font script="Ethi" typeface="Nyala"/>
+        <a:font script="Beng" typeface="Vrinda"/>
+        <a:font script="Gujr" typeface="Shruti"/>
+        <a:font script="Khmr" typeface="MoolBoran"/>
+        <a:font script="Knda" typeface="Tunga"/>
+        <a:font script="Guru" typeface="Raavi"/>
+        <a:font script="Cans" typeface="Euphemia"/>
+        <a:font script="Cher" typeface="Plantagenet Cherokee"/>
+        <a:font script="Yiii" typeface="Microsoft Yi Baiti"/>
+        <a:font script="Tibt" typeface="Microsoft Himalaya"/>
+        <a:font script="Thaa" typeface="MV Boli"/>
+        <a:font script="Deva" typeface="Mangal"/>
+        <a:font script="Telu" typeface="Gautami"/>
+        <a:font script="Taml" typeface="Latha"/>
+        <a:font script="Syrc" typeface="Estrangelo Edessa"/>
+        <a:font script="Orya" typeface="Kalinga"/>
+        <a:font script="Mlym" typeface="Kartika"/>
+        <a:font script="Laoo" typeface="DokChampa"/>
+        <a:font script="Sinh" typeface="Iskoola Pota"/>
+        <a:font script="Mong" typeface="Mongolian Baiti"/>
+        <a:font script="Viet" typeface="Times New Roman"/>
+        <a:font script="Uigh" typeface="Microsoft Uighur"/>
+        <a:font script="Geor" typeface="Sylfaen"/>
+        <a:font script="Armn" typeface="Arial"/>
+        <a:font script="Bugi" typeface="Leelawadee UI"/>
+        <a:font script="Bopo" typeface="Microsoft JhengHei"/>
+        <a:font script="Java" typeface="Javanese Text"/>
+        <a:font script="Lisu" typeface="Segoe UI"/>
+        <a:font script="Mymr" typeface="Myanmar Text"/>
+        <a:font script="Nkoo" typeface="Ebrima"/>
+        <a:font script="Olck" typeface="Nirmala UI"/>
+        <a:font script="Osma" typeface="Ebrima"/>
+        <a:font script="Phag" typeface="Phagspa"/>
+        <a:font script="Syrn" typeface="Estrangelo Edessa"/>
+        <a:font script="Syrj" typeface="Estrangelo Edessa"/>
+        <a:font script="Syre" typeface="Estrangelo Edessa"/>
+        <a:font script="Sora" typeface="Nirmala UI"/>
+        <a:font script="Tale" typeface="Microsoft Tai Le"/>
+        <a:font script="Talu" typeface="Microsoft New Tai Lue"/>
+        <a:font script="Tfng" typeface="Ebrima"/>
+      </a:majorFont>
+      <a:minorFont>
+        <a:latin typeface="맑은 고딕" panose="02110004020202020204"/>
+        <a:ea typeface=""/>
+        <a:cs typeface=""/>
+        <a:font script="Jpan" typeface="游ゴシック"/>
+        <a:font script="Hang" typeface="맑은 고딕"/>
+        <a:font script="Hans" typeface="等线"/>
+        <a:font script="Hant" typeface="新細明體"/>
+        <a:font script="Arab" typeface="Arial"/>
+        <a:font script="Hebr" typeface="Arial"/>
+        <a:font script="Thai" typeface="Cordia New"/>
+        <a:font script="Ethi" typeface="Nyala"/>
+        <a:font script="Beng" typeface="Vrinda"/>
+        <a:font script="Gujr" typeface="Shruti"/>
+        <a:font script="Khmr" typeface="DaunPenh"/>
+        <a:font script="Knda" typeface="Tunga"/>
+        <a:font script="Guru" typeface="Raavi"/>
+        <a:font script="Cans" typeface="Euphemia"/>
+        <a:font script="Cher" typeface="Plantagenet Cherokee"/>
+        <a:font script="Yiii" typeface="Microsoft Yi Baiti"/>
+        <a:font script="Tibt" typeface="Microsoft Himalaya"/>
+        <a:font script="Thaa" typeface="MV Boli"/>
+        <a:font script="Deva" typeface="Mangal"/>
+        <a:font script="Telu" typeface="Gautami"/>
+        <a:font script="Taml" typeface="Latha"/>
+        <a:font script="Syrc" typeface="Estrangelo Edessa"/>
+        <a:font script="Orya" typeface="Kalinga"/>
+        <a:font script="Mlym" typeface="Kartika"/>
+        <a:font script="Laoo" typeface="DokChampa"/>
+        <a:font script="Sinh" typeface="Iskoola Pota"/>
+        <a:font script="Mong" typeface="Mongolian Baiti"/>
+        <a:font script="Viet" typeface="Arial"/>
+        <a:font script="Uigh" typeface="Microsoft Uighur"/>
+        <a:font script="Geor" typeface="Sylfaen"/>
+        <a:font script="Armn" typeface="Arial"/>
+        <a:font script="Bugi" typeface="Leelawadee UI"/>
+        <a:font script="Bopo" typeface="Microsoft JhengHei"/>
+        <a:font script="Java" typeface="Javanese Text"/>
+        <a:font script="Lisu" typeface="Segoe UI"/>
+        <a:font script="Mymr" typeface="Myanmar Text"/>
+        <a:font script="Nkoo" typeface="Ebrima"/>
+        <a:font script="Olck" typeface="Nirmala UI"/>
+        <a:font script="Osma" typeface="Ebrima"/>
+        <a:font script="Phag" typeface="Phagspa"/>
+        <a:font script="Syrn" typeface="Estrangelo Edessa"/>
+        <a:font script="Syrj" typeface="Estrangelo Edessa"/>
+        <a:font script="Syre" typeface="Estrangelo Edessa"/>
+        <a:font script="Sora" typeface="Nirmala UI"/>
+        <a:font script="Tale" typeface="Microsoft Tai Le"/>
+        <a:font script="Talu" typeface="Microsoft New Tai Lue"/>
+        <a:font script="Tfng" typeface="Ebrima"/>
+      </a:minorFont>
+    </a:fontScheme>
+    <a:fmtScheme name="Office">
+      <a:fillStyleLst>
+        <a:solidFill>
+          <a:schemeClr val="phClr"/>
+        </a:solidFill>
+        <a:gradFill rotWithShape="1">
+          <a:gsLst>
+            <a:gs pos="0">
+              <a:schemeClr val="phClr">
+                <a:lumMod val="110000"/>
+                <a:satMod val="105000"/>
+                <a:tint val="67000"/>
+              </a:schemeClr>
+            </a:gs>
+            <a:gs pos="50000">
+              <a:schemeClr val="phClr">
+                <a:lumMod val="105000"/>
+                <a:satMod val="103000"/>
+                <a:tint val="73000"/>
+              </a:schemeClr>
+            </a:gs>
+            <a:gs pos="100000">
+              <a:schemeClr val="phClr">
+                <a:lumMod val="105000"/>
+                <a:satMod val="109000"/>
+                <a:tint val="81000"/>
+              </a:schemeClr>
+            </a:gs>
+          </a:gsLst>
+          <a:lin ang="5400000" scaled="0"/>
+        </a:gradFill>
+        <a:gradFill rotWithShape="1">
+          <a:gsLst>
+            <a:gs pos="0">
+              <a:schemeClr val="phClr">
+                <a:satMod val="103000"/>
+                <a:lumMod val="102000"/>
+                <a:tint val="94000"/>
+              </a:schemeClr>
+            </a:gs>
+            <a:gs pos="50000">
+              <a:schemeClr val="phClr">
+                <a:satMod val="110000"/>
+                <a:lumMod val="100000"/>
+                <a:shade val="100000"/>
+              </a:schemeClr>
+            </a:gs>
+            <a:gs pos="100000">
+              <a:schemeClr val="phClr">
+                <a:lumMod val="99000"/>
+                <a:satMod val="120000"/>
+                <a:shade val="78000"/>
+              </a:schemeClr>
+            </a:gs>
+          </a:gsLst>
+          <a:lin ang="5400000" scaled="0"/>
+        </a:gradFill>
+      </a:fillStyleLst>
+      <a:lnStyleLst>
+        <a:ln w="12700" cap="flat" cmpd="sng" algn="ctr">
+          <a:solidFill>
+            <a:schemeClr val="phClr"/>
+          </a:solidFill>
+          <a:prstDash val="solid"/>
+          <a:miter lim="800000"/>
+        </a:ln>
+        <a:ln w="19050" cap="flat" cmpd="sng" algn="ctr">
+          <a:solidFill>
+            <a:schemeClr val="phClr"/>
+          </a:solidFill>
+          <a:prstDash val="solid"/>
+          <a:miter lim="800000"/>
+        </a:ln>
+        <a:ln w="25400" cap="flat" cmpd="sng" algn="ctr">
+          <a:solidFill>
+            <a:schemeClr val="phClr"/>
+          </a:solidFill>
+          <a:prstDash val="solid"/>
+          <a:miter lim="800000"/>
+        </a:ln>
+      </a:lnStyleLst>
+      <a:effectStyleLst>
+        <a:effectStyle>
+          <a:effectLst/>
+        </a:effectStyle>
+        <a:effectStyle>
+          <a:effectLst/>
+        </a:effectStyle>
+        <a:effectStyle>
+          <a:effectLst>
+            <a:outerShdw blurRad="57150" dist="19050" dir="5400000" algn="ctr" rotWithShape="0">
+              <a:srgbClr val="000000">
+                <a:alpha val="63000"/>
+              </a:srgbClr>
+            </a:outerShdw>
+          </a:effectLst>
+        </a:effectStyle>
+      </a:effectStyleLst>
+      <a:bgFillStyleLst>
+        <a:solidFill>
+          <a:schemeClr val="phClr"/>
+        </a:solidFill>
+        <a:solidFill>
+          <a:schemeClr val="phClr">
+            <a:tint val="95000"/>
+            <a:satMod val="170000"/>
+          </a:schemeClr>
+        </a:solidFill>
+        <a:gradFill rotWithShape="1">
+          <a:gsLst>
+            <a:gs pos="0">
+              <a:schemeClr val="phClr">
+                <a:tint val="93000"/>
+                <a:satMod val="150000"/>
+                <a:shade val="98000"/>
+                <a:lumMod val="102000"/>
+              </a:schemeClr>
+            </a:gs>
+            <a:gs pos="50000">
+              <a:schemeClr val="phClr">
+                <a:tint val="98000"/>
+                <a:satMod val="130000"/>
+                <a:shade val="90000"/>
+                <a:lumMod val="103000"/>
+              </a:schemeClr>
+            </a:gs>
+            <a:gs pos="100000">
+              <a:schemeClr val="phClr">
+                <a:shade val="63000"/>
+                <a:satMod val="120000"/>
+              </a:schemeClr>
+            </a:gs>
+          </a:gsLst>
+          <a:lin ang="5400000" scaled="0"/>
+        </a:gradFill>
+      </a:bgFillStyleLst>
+    </a:fmtScheme>
+  </a:themeElements>
+  <a:objectDefaults>
+    <a:lnDef>
+      <a:spPr/>
+      <a:bodyPr/>
+      <a:lstStyle/>
+      <a:style>
+        <a:lnRef idx="2">
+          <a:schemeClr val="accent1"/>
+        </a:lnRef>
+        <a:fillRef idx="0">
+          <a:schemeClr val="accent1"/>
+        </a:fillRef>
+        <a:effectRef idx="1">
+          <a:schemeClr val="accent1"/>
+        </a:effectRef>
+        <a:fontRef idx="minor">
+          <a:schemeClr val="tx1"/>
+        </a:fontRef>
+      </a:style>
+    </a:lnDef>
+  </a:objectDefaults>
+  <a:extraClrSchemeLst/>
+  <a:extLst>
+    <a:ext uri="{05A4C25C-085E-4340-85A3-A5531E510DB2}">
+      <thm15:themeFamily xmlns:thm15="http://schemas.microsoft.com/office/thememl/2012/main" name="Office Theme" id="{2E142A2C-CD16-42D6-873A-C26D2A0506FA}" vid="{1BDDFF52-6CD6-40A5-AB3C-68EB2F1E4D0A}"/>
+    </a:ext>
+  </a:extLst>
+</a:theme>
 </file>
--- a/docs/Cafe.pi_쉬운_사용자매뉴얼.pptx
+++ b/docs/Cafe.pi_쉬운_사용자매뉴얼.pptx
@@ -2366,6 +2366,58 @@
           </a:p>
         </p:txBody>
       </p:sp>
+      <p:sp>
+        <p:nvSpPr>
+          <p:cNvPr id="19" name="Rounded Rectangle 18"/>
+          <p:cNvSpPr/>
+          <p:nvPr/>
+        </p:nvSpPr>
+        <p:spPr>
+          <a:xfrm>
+            <a:off x="1645920" y="5074920"/>
+            <a:ext cx="8897112" cy="438912"/>
+          </a:xfrm>
+          <a:prstGeom prst="roundRect">
+            <a:avLst/>
+          </a:prstGeom>
+          <a:solidFill>
+            <a:srgbClr val="F4A52A"/>
+          </a:solidFill>
+          <a:ln>
+            <a:noFill/>
+          </a:ln>
+          <a:effectLst/>
+        </p:spPr>
+        <p:style>
+          <a:lnRef idx="1">
+            <a:schemeClr val="accent1"/>
+          </a:lnRef>
+          <a:fillRef idx="3">
+            <a:schemeClr val="accent1"/>
+          </a:fillRef>
+          <a:effectRef idx="2">
+            <a:schemeClr val="accent1"/>
+          </a:effectRef>
+          <a:fontRef idx="minor">
+            <a:schemeClr val="lt1"/>
+          </a:fontRef>
+        </p:style>
+        <p:txBody>
+          <a:bodyPr rtlCol="0" anchor="ctr" wrap="square" tIns="25400" bIns="25400"/>
+          <a:lstStyle/>
+          <a:p>
+            <a:pPr algn="ctr"/>
+            <a:r>
+              <a:rPr sz="1500" b="1">
+                <a:solidFill>
+                  <a:srgbClr val="3B2A20"/>
+                </a:solidFill>
+              </a:rPr>
+              <a:t>🎁 지금 내 가게를 열면 — 선착순 100곳에 10,000 Bean 증정!</a:t>
+            </a:r>
+          </a:p>
+        </p:txBody>
+      </p:sp>
     </p:spTree>
   </p:cSld>
   <p:clrMapOvr>
@@ -2750,40 +2802,7 @@
                 <a:ea typeface="Malgun Gothic" pitchFamily="34" charset="-122"/>
                 <a:cs typeface="Malgun Gothic" pitchFamily="34" charset="-120"/>
               </a:rPr>
-              <a:t>커피빈 토큰</a:t>
-            </a:r>
-            <a:r>
-              <a:rPr lang="en-US" sz="1300" dirty="0">
-                <a:solidFill>
-                  <a:srgbClr val="8A7A6D"/>
-                </a:solidFill>
-                <a:latin typeface="Malgun Gothic" pitchFamily="34" charset="0"/>
-                <a:ea typeface="Malgun Gothic" pitchFamily="34" charset="-122"/>
-                <a:cs typeface="Malgun Gothic" pitchFamily="34" charset="-120"/>
-              </a:rPr>
-              <a:t> </a:t>
-            </a:r>
-            <a:r>
-              <a:rPr lang="ko-KR" altLang="en-US" sz="1300" dirty="0">
-                <a:solidFill>
-                  <a:srgbClr val="8A7A6D"/>
-                </a:solidFill>
-                <a:latin typeface="Malgun Gothic" pitchFamily="34" charset="0"/>
-                <a:ea typeface="Malgun Gothic" pitchFamily="34" charset="-122"/>
-                <a:cs typeface="Malgun Gothic" pitchFamily="34" charset="-120"/>
-              </a:rPr>
-              <a:t>토큰</a:t>
-            </a:r>
-            <a:r>
-              <a:rPr lang="en-US" sz="1300" dirty="0">
-                <a:solidFill>
-                  <a:srgbClr val="8A7A6D"/>
-                </a:solidFill>
-                <a:latin typeface="Malgun Gothic" pitchFamily="34" charset="0"/>
-                <a:ea typeface="Malgun Gothic" pitchFamily="34" charset="-122"/>
-                <a:cs typeface="Malgun Gothic" pitchFamily="34" charset="-120"/>
-              </a:rPr>
-              <a:t> — 충전하고 마음 전하기</a:t>
+              <a:t>커피빈 토큰 — 충전하고 마음 전하기</a:t>
             </a:r>
             <a:endParaRPr lang="en-US" sz="1700" dirty="0"/>
           </a:p>
@@ -4983,62 +5002,7 @@
                 <a:ea typeface="Malgun Gothic" pitchFamily="34" charset="-122"/>
                 <a:cs typeface="Malgun Gothic" pitchFamily="34" charset="-120"/>
               </a:rPr>
-              <a:t>커피빈 토큰은 앱 안에서 마음을 전하는 </a:t>
-            </a:r>
-            <a:r>
-              <a:rPr lang="en-US" sz="1600" dirty="0" err="1">
-                <a:solidFill>
-                  <a:srgbClr val="8A7A6D"/>
-                </a:solidFill>
-                <a:latin typeface="Malgun Gothic" pitchFamily="34" charset="0"/>
-                <a:ea typeface="Malgun Gothic" pitchFamily="34" charset="-122"/>
-                <a:cs typeface="Malgun Gothic" pitchFamily="34" charset="-120"/>
-              </a:rPr>
-              <a:t>작은</a:t>
-            </a:r>
-            <a:r>
-              <a:rPr lang="en-US" sz="1600" dirty="0">
-                <a:solidFill>
-                  <a:srgbClr val="8A7A6D"/>
-                </a:solidFill>
-                <a:latin typeface="Malgun Gothic" pitchFamily="34" charset="0"/>
-                <a:ea typeface="Malgun Gothic" pitchFamily="34" charset="-122"/>
-                <a:cs typeface="Malgun Gothic" pitchFamily="34" charset="-120"/>
-              </a:rPr>
-              <a:t> </a:t>
-            </a:r>
-            <a:r>
-              <a:rPr lang="ko-KR" altLang="en-US" sz="1600" dirty="0">
-                <a:solidFill>
-                  <a:srgbClr val="8A7A6D"/>
-                </a:solidFill>
-                <a:latin typeface="Malgun Gothic" pitchFamily="34" charset="0"/>
-                <a:ea typeface="Malgun Gothic" pitchFamily="34" charset="-122"/>
-                <a:cs typeface="Malgun Gothic" pitchFamily="34" charset="-120"/>
-              </a:rPr>
-              <a:t>토큰</a:t>
-            </a:r>
-            <a:r>
-              <a:rPr lang="en-US" sz="1600" dirty="0" err="1">
-                <a:solidFill>
-                  <a:srgbClr val="8A7A6D"/>
-                </a:solidFill>
-                <a:latin typeface="Malgun Gothic" pitchFamily="34" charset="0"/>
-                <a:ea typeface="Malgun Gothic" pitchFamily="34" charset="-122"/>
-                <a:cs typeface="Malgun Gothic" pitchFamily="34" charset="-120"/>
-              </a:rPr>
-              <a:t>이에요</a:t>
-            </a:r>
-            <a:r>
-              <a:rPr lang="en-US" sz="1600" dirty="0">
-                <a:solidFill>
-                  <a:srgbClr val="8A7A6D"/>
-                </a:solidFill>
-                <a:latin typeface="Malgun Gothic" pitchFamily="34" charset="0"/>
-                <a:ea typeface="Malgun Gothic" pitchFamily="34" charset="-122"/>
-                <a:cs typeface="Malgun Gothic" pitchFamily="34" charset="-120"/>
-              </a:rPr>
-              <a:t>. 충전해서 쓰고, 고마운 사람에게 보냅니다.</a:t>
+              <a:t>커피빈 토큰은 앱 안에서 마음을 전하는 작은 토큰이에요. 충전해서 쓰고, 고마운 사람에게 보냅니다.</a:t>
             </a:r>
             <a:endParaRPr lang="en-US" sz="1600" dirty="0"/>
           </a:p>
@@ -5233,51 +5197,7 @@
                 <a:ea typeface="Malgun Gothic" pitchFamily="34" charset="-122"/>
                 <a:cs typeface="Malgun Gothic" pitchFamily="34" charset="-120"/>
               </a:rPr>
-              <a:t>카페에서 고마운 사람에게 톡 보내는 "</a:t>
-            </a:r>
-            <a:r>
-              <a:rPr lang="en-US" sz="1350" dirty="0" err="1">
-                <a:solidFill>
-                  <a:srgbClr val="8A7A6D"/>
-                </a:solidFill>
-                <a:latin typeface="Malgun Gothic" pitchFamily="34" charset="0"/>
-                <a:ea typeface="Malgun Gothic" pitchFamily="34" charset="-122"/>
-                <a:cs typeface="Malgun Gothic" pitchFamily="34" charset="-120"/>
-              </a:rPr>
-              <a:t>커피빈 토큰</a:t>
-            </a:r>
-            <a:r>
-              <a:rPr lang="en-US" sz="1350" dirty="0">
-                <a:solidFill>
-                  <a:srgbClr val="8A7A6D"/>
-                </a:solidFill>
-                <a:latin typeface="Malgun Gothic" pitchFamily="34" charset="0"/>
-                <a:ea typeface="Malgun Gothic" pitchFamily="34" charset="-122"/>
-                <a:cs typeface="Malgun Gothic" pitchFamily="34" charset="-120"/>
-              </a:rPr>
-              <a:t> </a:t>
-            </a:r>
-            <a:r>
-              <a:rPr lang="ko-KR" altLang="en-US" sz="1350" dirty="0">
-                <a:solidFill>
-                  <a:srgbClr val="8A7A6D"/>
-                </a:solidFill>
-                <a:latin typeface="Malgun Gothic" pitchFamily="34" charset="0"/>
-                <a:ea typeface="Malgun Gothic" pitchFamily="34" charset="-122"/>
-                <a:cs typeface="Malgun Gothic" pitchFamily="34" charset="-120"/>
-              </a:rPr>
-              <a:t>토큰</a:t>
-            </a:r>
-            <a:r>
-              <a:rPr lang="en-US" sz="1350" dirty="0">
-                <a:solidFill>
-                  <a:srgbClr val="8A7A6D"/>
-                </a:solidFill>
-                <a:latin typeface="Malgun Gothic" pitchFamily="34" charset="0"/>
-                <a:ea typeface="Malgun Gothic" pitchFamily="34" charset="-122"/>
-                <a:cs typeface="Malgun Gothic" pitchFamily="34" charset="-120"/>
-              </a:rPr>
-              <a:t>(☕)"이에요. 칭찬·응원·감사를 숫자 대신 커피빈 토큰으로 표현합니다.</a:t>
+              <a:t>카페에서 고마운 사람에게 보내는 "커피빈 토큰(☕)"이에요. 칭찬·응원·감사를 숫자 대신 커피빈으로 표현합니다.</a:t>
             </a:r>
             <a:endParaRPr lang="en-US" sz="1700" dirty="0"/>
           </a:p>
@@ -5667,7 +5587,7 @@
                 <a:ea typeface="Malgun Gothic" pitchFamily="34" charset="-122"/>
                 <a:cs typeface="Malgun Gothic" pitchFamily="34" charset="-120"/>
               </a:rPr>
-              <a:t>대화방에서 상대에게 "커피빈 토큰 보내기"를 누르면 마음이 전달돼요. 받은 사람은 알림으로 확인합니다.</a:t>
+              <a:t>대화방에서 ☕ 선물 버튼을 누르고 10·50·100 Bean 중 골라 보내요. 누구나 보낼 수 있고, 받은 사람은 알림으로 확인합니다.</a:t>
             </a:r>
             <a:endParaRPr lang="en-US" sz="1700" dirty="0"/>
           </a:p>
@@ -5985,7 +5905,7 @@
                 <a:ea typeface="Malgun Gothic" pitchFamily="34" charset="-122"/>
                 <a:cs typeface="Malgun Gothic" pitchFamily="34" charset="-120"/>
               </a:rPr>
-              <a:t>🎫  구독(이용권) 요금제 — 카페 &amp; 매장</a:t>
+              <a:t>🎫  구독 요금제 — Bean으로 결제 (상품군별)</a:t>
             </a:r>
             <a:endParaRPr lang="en-US" sz="3200" dirty="0"/>
           </a:p>
@@ -6024,7 +5944,7 @@
                 <a:ea typeface="Malgun Gothic" pitchFamily="34" charset="-122"/>
                 <a:cs typeface="Malgun Gothic" pitchFamily="34" charset="-120"/>
               </a:rPr>
-              <a:t>필요한 만큼 기능을 넓히는 이용권. 무료로 시작하세요.</a:t>
+              <a:t>필요한 상품군만 골라 구독해요. 충전한 Bean으로 결제 · 무료로 시작.</a:t>
             </a:r>
             <a:endParaRPr lang="en-US" sz="1600" dirty="0"/>
           </a:p>
@@ -6253,7 +6173,7 @@
                 <a:ea typeface="Malgun Gothic" pitchFamily="34" charset="-122"/>
                 <a:cs typeface="Malgun Gothic" pitchFamily="34" charset="-120"/>
               </a:rPr>
-              <a:t>기본 테마 6개</a:t>
+              <a:t>일반 테마 사용</a:t>
             </a:r>
             <a:endParaRPr lang="en-US" sz="1100" dirty="0"/>
           </a:p>
@@ -6295,7 +6215,7 @@
                 <a:ea typeface="Malgun Gothic" pitchFamily="34" charset="-122"/>
                 <a:cs typeface="Malgun Gothic" pitchFamily="34" charset="-120"/>
               </a:rPr>
-              <a:t>Bean 받기</a:t>
+              <a:t>Bean 받기·선물</a:t>
             </a:r>
             <a:endParaRPr lang="en-US" sz="1100" dirty="0"/>
           </a:p>
@@ -6400,7 +6320,7 @@
                 <a:ea typeface="Malgun Gothic" pitchFamily="34" charset="-122"/>
                 <a:cs typeface="Malgun Gothic" pitchFamily="34" charset="-120"/>
               </a:rPr>
-              <a:t>Pi Creator</a:t>
+              <a:t>☕ PiCafe</a:t>
             </a:r>
             <a:endParaRPr lang="en-US" sz="1400" dirty="0"/>
           </a:p>
@@ -6439,7 +6359,7 @@
                 <a:ea typeface="Malgun Gothic" pitchFamily="34" charset="-122"/>
                 <a:cs typeface="Malgun Gothic" pitchFamily="34" charset="-120"/>
               </a:rPr>
-              <a:t>1 Pi</a:t>
+              <a:t>3,000</a:t>
             </a:r>
             <a:endParaRPr lang="en-US" sz="2500" dirty="0"/>
           </a:p>
@@ -6481,7 +6401,7 @@
                 <a:ea typeface="Malgun Gothic" pitchFamily="34" charset="-122"/>
                 <a:cs typeface="Malgun Gothic" pitchFamily="34" charset="-120"/>
               </a:rPr>
-              <a:t>월간 · 연 10 Pi</a:t>
+              <a:t>Bean/월 · 연 30,000</a:t>
             </a:r>
             <a:endParaRPr lang="en-US" sz="1050" dirty="0"/>
           </a:p>
@@ -6524,7 +6444,7 @@
                 <a:ea typeface="Malgun Gothic" pitchFamily="34" charset="-122"/>
                 <a:cs typeface="Malgun Gothic" pitchFamily="34" charset="-120"/>
               </a:rPr>
-              <a:t>전체 테마</a:t>
+              <a:t>프리미엄 테마 전체</a:t>
             </a:r>
             <a:endParaRPr lang="en-US" sz="1100" dirty="0"/>
           </a:p>
@@ -6545,7 +6465,7 @@
                 <a:ea typeface="Malgun Gothic" pitchFamily="34" charset="-122"/>
                 <a:cs typeface="Malgun Gothic" pitchFamily="34" charset="-120"/>
               </a:rPr>
-              <a:t>그룹방 월 3개</a:t>
+              <a:t>그룹방 무제한</a:t>
             </a:r>
             <a:endParaRPr lang="en-US" sz="1100" dirty="0"/>
           </a:p>
@@ -6566,7 +6486,7 @@
                 <a:ea typeface="Malgun Gothic" pitchFamily="34" charset="-122"/>
                 <a:cs typeface="Malgun Gothic" pitchFamily="34" charset="-120"/>
               </a:rPr>
-              <a:t>AI 비서 월 10회</a:t>
+              <a:t>AI·Bean 선물</a:t>
             </a:r>
             <a:endParaRPr lang="en-US" sz="1100" dirty="0"/>
           </a:p>
@@ -6746,7 +6666,7 @@
                 <a:ea typeface="Malgun Gothic" pitchFamily="34" charset="-122"/>
                 <a:cs typeface="Malgun Gothic" pitchFamily="34" charset="-120"/>
               </a:rPr>
-              <a:t>Pi Host</a:t>
+              <a:t>🏪 PiStore</a:t>
             </a:r>
             <a:endParaRPr lang="en-US" sz="1400" dirty="0"/>
           </a:p>
@@ -6785,7 +6705,7 @@
                 <a:ea typeface="Malgun Gothic" pitchFamily="34" charset="-122"/>
                 <a:cs typeface="Malgun Gothic" pitchFamily="34" charset="-120"/>
               </a:rPr>
-              <a:t>5 Pi</a:t>
+              <a:t>3,000~</a:t>
             </a:r>
             <a:endParaRPr lang="en-US" sz="2500" dirty="0"/>
           </a:p>
@@ -6827,7 +6747,7 @@
                 <a:ea typeface="Malgun Gothic" pitchFamily="34" charset="-122"/>
                 <a:cs typeface="Malgun Gothic" pitchFamily="34" charset="-120"/>
               </a:rPr>
-              <a:t>월간 · 연 50 Pi</a:t>
+              <a:t>Bean/월 · 연 30,000~</a:t>
             </a:r>
             <a:endParaRPr lang="en-US" sz="1050" dirty="0"/>
           </a:p>
@@ -6870,7 +6790,7 @@
                 <a:ea typeface="Malgun Gothic" pitchFamily="34" charset="-122"/>
                 <a:cs typeface="Malgun Gothic" pitchFamily="34" charset="-120"/>
               </a:rPr>
-              <a:t>무제한 그룹방</a:t>
+              <a:t>S 상품 30개</a:t>
             </a:r>
             <a:endParaRPr lang="en-US" sz="1100" dirty="0"/>
           </a:p>
@@ -6891,7 +6811,7 @@
                 <a:ea typeface="Malgun Gothic" pitchFamily="34" charset="-122"/>
                 <a:cs typeface="Malgun Gothic" pitchFamily="34" charset="-120"/>
               </a:rPr>
-              <a:t>이벤트방·분석</a:t>
+              <a:t>M 상품 50개</a:t>
             </a:r>
             <a:endParaRPr lang="en-US" sz="1100" dirty="0"/>
           </a:p>
@@ -6912,7 +6832,7 @@
                 <a:ea typeface="Malgun Gothic" pitchFamily="34" charset="-122"/>
                 <a:cs typeface="Malgun Gothic" pitchFamily="34" charset="-120"/>
               </a:rPr>
-              <a:t>자동 봇</a:t>
+              <a:t>L 무제한·통계</a:t>
             </a:r>
             <a:endParaRPr lang="en-US" sz="1100" dirty="0"/>
           </a:p>
@@ -7017,7 +6937,7 @@
                 <a:ea typeface="Malgun Gothic" pitchFamily="34" charset="-122"/>
                 <a:cs typeface="Malgun Gothic" pitchFamily="34" charset="-120"/>
               </a:rPr>
-              <a:t>🏪 PiShop Seller</a:t>
+              <a:t>💬 자동번역</a:t>
             </a:r>
             <a:endParaRPr lang="en-US" sz="1400" dirty="0"/>
           </a:p>
@@ -7056,7 +6976,7 @@
                 <a:ea typeface="Malgun Gothic" pitchFamily="34" charset="-122"/>
                 <a:cs typeface="Malgun Gothic" pitchFamily="34" charset="-120"/>
               </a:rPr>
-              <a:t>0.5 Pi</a:t>
+              <a:t>1,000</a:t>
             </a:r>
             <a:endParaRPr lang="en-US" sz="2500" dirty="0"/>
           </a:p>
@@ -7098,7 +7018,7 @@
                 <a:ea typeface="Malgun Gothic" pitchFamily="34" charset="-122"/>
                 <a:cs typeface="Malgun Gothic" pitchFamily="34" charset="-120"/>
               </a:rPr>
-              <a:t>월간 · 연 5 Pi (매장용)</a:t>
+              <a:t>Bean/월 · 연 10,000</a:t>
             </a:r>
             <a:endParaRPr lang="en-US" sz="1050" dirty="0"/>
           </a:p>
@@ -7141,7 +7061,7 @@
                 <a:ea typeface="Malgun Gothic" pitchFamily="34" charset="-122"/>
                 <a:cs typeface="Malgun Gothic" pitchFamily="34" charset="-120"/>
               </a:rPr>
-              <a:t>상품 무제한</a:t>
+              <a:t>200개+ 언어</a:t>
             </a:r>
             <a:endParaRPr lang="en-US" sz="1100" dirty="0"/>
           </a:p>
@@ -7162,7 +7082,7 @@
                 <a:ea typeface="Malgun Gothic" pitchFamily="34" charset="-122"/>
                 <a:cs typeface="Malgun Gothic" pitchFamily="34" charset="-120"/>
               </a:rPr>
-              <a:t>매장 통계</a:t>
+              <a:t>무제한 자동번역</a:t>
             </a:r>
             <a:endParaRPr lang="en-US" sz="1100" dirty="0"/>
           </a:p>
@@ -7183,7 +7103,7 @@
                 <a:ea typeface="Malgun Gothic" pitchFamily="34" charset="-122"/>
                 <a:cs typeface="Malgun Gothic" pitchFamily="34" charset="-120"/>
               </a:rPr>
-              <a:t>우선 노출</a:t>
+              <a:t>카페·1:1 대화</a:t>
             </a:r>
             <a:endParaRPr lang="en-US" sz="1100" dirty="0"/>
           </a:p>
@@ -7267,7 +7187,7 @@
                 <a:ea typeface="Malgun Gothic" pitchFamily="34" charset="-122"/>
                 <a:cs typeface="Malgun Gothic" pitchFamily="34" charset="-120"/>
               </a:rPr>
-              <a:t>결제는 지금 Pi로 해요(앞으로 ‘Bean 적립’으로 전환 예정 · Bean은 플랫폼 사용 전용, 환금 안 됨). 매장 판매엔 보증금 1 Pi 별도(안전 거래용).</a:t>
+              <a:t>구독료는 충전한 Bean으로 결제해요(1 Pi = 100 Bean). 연간은 월 × 10 = 2개월 무료! Bean은 플랫폼 전용 · 환금 안 됨. 매장 판매엔 보증금 1 Pi 별도.</a:t>
             </a:r>
             <a:endParaRPr lang="en-US" sz="1350" dirty="0"/>
           </a:p>
@@ -8125,7 +8045,7 @@
                 <a:ea typeface="Malgun Gothic" pitchFamily="34" charset="-122"/>
                 <a:cs typeface="Malgun Gothic" pitchFamily="34" charset="-120"/>
               </a:rPr>
-              <a:t>상대가 외국어로 써도 내 언어로 바로 보여요(200개 넘는 언어). 내가 쓴 글도 상대 언어로 번역됩니다.</a:t>
+              <a:t>상대가 외국어로 써도 내 언어로 바로 보여요(200개 넘는 언어). 구독하면 무제한, 가끔 쓰면 1회당 소량 Bean으로도 이용해요.</a:t>
             </a:r>
             <a:endParaRPr lang="en-US" sz="1700" dirty="0"/>
           </a:p>
